--- a/Sprints/Sprint_5/PPT/Sprint5_Review.pptx
+++ b/Sprints/Sprint_5/PPT/Sprint5_Review.pptx
@@ -12276,7 +12276,7 @@
                 </a:solidFill>
                 <a:latin typeface="Arial"/>
               </a:rPr>
-              <a:t>MERGED IN #38</a:t>
+              <a:t>MERGED</a:t>
             </a:r>
           </a:p>
         </p:txBody>
@@ -15691,7 +15691,7 @@
                 </a:solidFill>
                 <a:latin typeface="Arial"/>
               </a:rPr>
-              <a:t>#32 CLOSED · MERGED INTO MAIN IN #38</a:t>
+              <a:t>MERGED</a:t>
             </a:r>
           </a:p>
         </p:txBody>

--- a/Sprints/Sprint_5/PPT/Sprint5_Review.pptx
+++ b/Sprints/Sprint_5/PPT/Sprint5_Review.pptx
@@ -20,7 +20,6 @@
     <p:sldId id="268" r:id="rId4"/>
     <p:sldId id="269" r:id="rId3"/>
     <p:sldId id="270" r:id="rId2"/>
-    <p:sldId id="271" r:id="rId22"/>
   </p:sldIdLst>
   <p:notesMasterIdLst>
     <p:notesMasterId r:id="rId17"/>
@@ -608,7 +607,7 @@
           <a:lstStyle/>
           <a:p>
             <a:r>
-              <a:t>Presenter: Melvin</a:t>
+              <a:t>Presenter: Kaleb</a:t>
             </a:r>
           </a:p>
           <a:p>
@@ -619,7 +618,7 @@
           <a:p/>
           <a:p>
             <a:r>
-              <a:t>The upcoming work stays visible: player/possession restrictions, Apple Watch workout keep-alive, duplicate-file cleanup and the older repeated-shot bug. Kellam owns issues 36 and 37 in this presentation as requested; the slide edit does not change GitHub assignee fields. Android/Wear OS UI, regression polish and the remaining edge cases also stay tracked under issue 20. The full Sprint 5 closeout work is on the previous slide so the backlog can be read without dense text or hiding tasks in the notes.</a:t>
+              <a:t>The September 30 Sprint 4 demo/planning meeting set parity and 1v1 as the next goals, with Apple implementation first and Android/Wear OS porting afterward. The October 14 review emphasized wrist input, preserving the existing court, and letting each player use their own phone. Online accounts were left for later. October 28 was cancelled and is not counted as a held meeting. Melvin’s documentation branch contains both minutes.</a:t>
             </a:r>
           </a:p>
           <a:p/>
@@ -630,27 +629,12 @@
           </a:p>
           <a:p>
             <a:r>
-              <a:t>https://github.com/KellamA/Squatch-Sports-Team-11-Capstone-Project/issues/25</a:t>
-            </a:r>
-          </a:p>
-          <a:p>
-            <a:r>
-              <a:t>https://github.com/KellamA/Squatch-Sports-Team-11-Capstone-Project/issues/36</a:t>
-            </a:r>
-          </a:p>
-          <a:p>
-            <a:r>
-              <a:t>https://github.com/KellamA/Squatch-Sports-Team-11-Capstone-Project/issues/37</a:t>
-            </a:r>
-          </a:p>
-          <a:p>
-            <a:r>
-              <a:t>https://github.com/KellamA/Squatch-Sports-Team-11-Capstone-Project/issues/19</a:t>
-            </a:r>
-          </a:p>
-          <a:p>
-            <a:r>
-              <a:t>https://github.com/KellamA/Squatch-Sports-Team-11-Capstone-Project/issues/20</a:t>
+              <a:t>https://github.com/KellamA/Squatch-Sports-Team-11-Capstone-Project/blob/melvin-sprint5-docs/Sprints/Sprint_5/MoM/MoM_2026-09-30.md</a:t>
+            </a:r>
+          </a:p>
+          <a:p>
+            <a:r>
+              <a:t>https://github.com/KellamA/Squatch-Sports-Team-11-Capstone-Project/blob/melvin-sprint5-docs/Sprints/Sprint_5/MoM/MoM_2026-10-14.md</a:t>
             </a:r>
           </a:p>
         </p:txBody>
@@ -725,13 +709,13 @@
           </a:p>
           <a:p>
             <a:r>
-              <a:t>Target narration: ~35 seconds (plus any live demo)</a:t>
+              <a:t>Target narration: ~30 seconds (plus any live demo)</a:t>
             </a:r>
           </a:p>
           <a:p/>
           <a:p>
             <a:r>
-              <a:t>The September 30 Sprint 4 demo/planning meeting set parity and 1v1 as the next goals, with Apple implementation first and Android/Wear OS porting afterward. The October 14 review emphasized wrist input, preserving the existing court, and letting each player use their own phone. Online accounts were left for later. October 28 was cancelled and is not counted as a held meeting. Melvin’s documentation branch contains both minutes.</a:t>
+              <a:t>The report and meeting minutes were sourced from Melvin’s documentation branch, commit 86171e9. That draft predates the Android merge and latest team confirmation, so reconcile its old pending/local-only wording before submission. The Android verification package includes the screenshot, actual Gradle logs, JSON summaries and APK hashes. The presentation and speaker scripts are ready. The recording and actual unlisted video URL still need to be produced; no course submission, upload or client release is being claimed.</a:t>
             </a:r>
           </a:p>
           <a:p/>
@@ -742,12 +726,22 @@
           </a:p>
           <a:p>
             <a:r>
-              <a:t>https://github.com/KellamA/Squatch-Sports-Team-11-Capstone-Project/blob/melvin-sprint5-docs/Sprints/Sprint_5/MoM/MoM_2026-09-30.md</a:t>
-            </a:r>
-          </a:p>
-          <a:p>
-            <a:r>
-              <a:t>https://github.com/KellamA/Squatch-Sports-Team-11-Capstone-Project/blob/melvin-sprint5-docs/Sprints/Sprint_5/MoM/MoM_2026-10-14.md</a:t>
+              <a:t>https://github.com/KellamA/Squatch-Sports-Team-11-Capstone-Project/blob/melvin-sprint5-docs/Sprints/Sprint_5/Sprint_Report/Sprint5_Report.md</a:t>
+            </a:r>
+          </a:p>
+          <a:p>
+            <a:r>
+              <a:t>https://github.com/KellamA/Squatch-Sports-Team-11-Capstone-Project/tree/melvin-sprint5-docs/Sprints/Sprint_5/MoM</a:t>
+            </a:r>
+          </a:p>
+          <a:p>
+            <a:r>
+              <a:t>Sprints/Sprint_5/Testing/Android_Verification.md</a:t>
+            </a:r>
+          </a:p>
+          <a:p>
+            <a:r>
+              <a:t>https://github.com/KellamA/Squatch-Sports-Team-11-Capstone-Project/issues/35</a:t>
             </a:r>
           </a:p>
         </p:txBody>
@@ -817,18 +811,18 @@
           <a:lstStyle/>
           <a:p>
             <a:r>
-              <a:t>Presenter: Kaleb</a:t>
-            </a:r>
-          </a:p>
-          <a:p>
-            <a:r>
-              <a:t>Target narration: ~30 seconds (plus any live demo)</a:t>
+              <a:t>Presenter: Melvin</a:t>
+            </a:r>
+          </a:p>
+          <a:p>
+            <a:r>
+              <a:t>Target narration: ~45 seconds (plus any live demo)</a:t>
             </a:r>
           </a:p>
           <a:p/>
           <a:p>
             <a:r>
-              <a:t>The report and meeting minutes were sourced from Melvin’s documentation branch, commit 86171e9. That draft predates the Android merge and latest team confirmation, so reconcile its old pending/local-only wording before submission. The Android verification package includes the screenshot, actual Gradle logs, JSON summaries and APK hashes. The presentation and speaker scripts are ready. The recording and actual unlisted video URL still need to be produced; no course submission, upload or client release is being claimed.</a:t>
+              <a:t>AI coding tools accelerated Swift-to-Kotlin porting, feature implementation, tests and diagnosis of emulator/toolchain issues. AI also helped organize this deck and the evidence package. Humans chose the gameplay rules, team split, watch UX and acceptance standards. A build or generated test alone cannot prove real-device radio behavior; the team reviews code and tests it in context. Kaleb’s iPhone testing is team-provided confirmation, distinct from the Android tests reproduced here. We remain responsible for the result and for completing the outstanding hardware and release checks.</a:t>
             </a:r>
           </a:p>
           <a:p/>
@@ -844,17 +838,7 @@
           </a:p>
           <a:p>
             <a:r>
-              <a:t>https://github.com/KellamA/Squatch-Sports-Team-11-Capstone-Project/tree/melvin-sprint5-docs/Sprints/Sprint_5/MoM</a:t>
-            </a:r>
-          </a:p>
-          <a:p>
-            <a:r>
               <a:t>Sprints/Sprint_5/Testing/Android_Verification.md</a:t>
-            </a:r>
-          </a:p>
-          <a:p>
-            <a:r>
-              <a:t>https://github.com/KellamA/Squatch-Sports-Team-11-Capstone-Project/issues/35</a:t>
             </a:r>
           </a:p>
         </p:txBody>
@@ -924,7 +908,7 @@
           <a:lstStyle/>
           <a:p>
             <a:r>
-              <a:t>Presenter: Melvin</a:t>
+              <a:t>Presenter: Team</a:t>
             </a:r>
           </a:p>
           <a:p>
@@ -935,7 +919,7 @@
           <a:p/>
           <a:p>
             <a:r>
-              <a:t>AI coding tools accelerated Swift-to-Kotlin porting, feature implementation, tests and diagnosis of emulator/toolchain issues. AI also helped organize this deck and the evidence package. Humans chose the gameplay rules, team split, watch UX and acceptance standards. A build or generated test alone cannot prove real-device radio behavior; the team reviews code and tests it in context. Kaleb’s iPhone testing is team-provided confirmation, distinct from the Android tests reproduced here. We remain responsible for the result and for completing the outstanding hardware and release checks.</a:t>
+              <a:t>The achievement is a full path from training and rewards into phone/watch 1v1 and nearby competition within each platform. Ordering guest commands at one host, saving IDs and replaying event logs handle duplicate and delayed plays. The Android SDK mismatch was solved by pinning a Nearby release compatible with the project’s Kotlin compiler rather than bypassing checks. Round watches require large controls plus scrolling/paging; we are not claiming that every screen is validated on every device. Kaleb’s feature is complete per team confirmation. Android physical Nearby checks, latency, client distribution and collected user feedback remain the key unfinished acceptance work.</a:t>
             </a:r>
           </a:p>
           <a:p/>
@@ -951,7 +935,12 @@
           </a:p>
           <a:p>
             <a:r>
-              <a:t>Sprints/Sprint_5/Testing/Android_Verification.md</a:t>
+              <a:t>android/README.md</a:t>
+            </a:r>
+          </a:p>
+          <a:p>
+            <a:r>
+              <a:t>android/gradle/libs.versions.toml</a:t>
             </a:r>
           </a:p>
         </p:txBody>
@@ -1021,18 +1010,18 @@
           <a:lstStyle/>
           <a:p>
             <a:r>
-              <a:t>Presenter: Team</a:t>
-            </a:r>
-          </a:p>
-          <a:p>
-            <a:r>
-              <a:t>Target narration: ~45 seconds (plus any live demo)</a:t>
+              <a:t>Presenter: Kellam</a:t>
+            </a:r>
+          </a:p>
+          <a:p>
+            <a:r>
+              <a:t>Target narration: ~40 seconds (plus any live demo)</a:t>
             </a:r>
           </a:p>
           <a:p/>
           <a:p>
             <a:r>
-              <a:t>The achievement is a full path from training and rewards into phone/watch 1v1 and nearby competition within each platform. Ordering guest commands at one host, saving IDs and replaying event logs handle duplicate and delayed plays. The Android SDK mismatch was solved by pinning a Nearby release compatible with the project’s Kotlin compiler rather than bypassing checks. Round watches require large controls plus scrolling/paging; we are not claiming that every screen is validated on every device. Kaleb’s feature is complete per team confirmation. Android physical Nearby checks, latency, client distribution and collected user feedback remain the key unfinished acceptance work.</a:t>
+              <a:t>The implementation is already merged, so the next work is acceptance and handoff rather than another Android publishing task. Issue 33 covers system/integration checks, latency, reconnect behavior and actual player feedback. Issue 34 covers physical-device checks and client TestFlight/Play internal distribution. Test Android Nearby with two real phones and paired watches. Issue 35 includes finishing the report, meeting minutes and slides, recording the review and adding the actual unlisted video URL; no upload is claimed. Kaleb’s nearby feature is tested and complete per team confirmation; issue 31 is board reconciliation, not unfinished feature work. Sprint 6 ownership stays visible in Kanban: Kaleb handles possession restrictions, and Kellam handles Apple Watch keep-alive plus repository cleanup. Mixed Android–iPhone games require a shared transport or backend and are not delivered here.</a:t>
             </a:r>
           </a:p>
           <a:p/>
@@ -1043,17 +1032,37 @@
           </a:p>
           <a:p>
             <a:r>
-              <a:t>https://github.com/KellamA/Squatch-Sports-Team-11-Capstone-Project/blob/melvin-sprint5-docs/Sprints/Sprint_5/Sprint_Report/Sprint5_Report.md</a:t>
-            </a:r>
-          </a:p>
-          <a:p>
-            <a:r>
-              <a:t>android/README.md</a:t>
-            </a:r>
-          </a:p>
-          <a:p>
-            <a:r>
-              <a:t>android/gradle/libs.versions.toml</a:t>
+              <a:t>https://github.com/KellamA/Squatch-Sports-Team-11-Capstone-Project/issues/33</a:t>
+            </a:r>
+          </a:p>
+          <a:p>
+            <a:r>
+              <a:t>https://github.com/KellamA/Squatch-Sports-Team-11-Capstone-Project/issues/34</a:t>
+            </a:r>
+          </a:p>
+          <a:p>
+            <a:r>
+              <a:t>https://github.com/KellamA/Squatch-Sports-Team-11-Capstone-Project/issues/35</a:t>
+            </a:r>
+          </a:p>
+          <a:p>
+            <a:r>
+              <a:t>https://github.com/KellamA/Squatch-Sports-Team-11-Capstone-Project/issues/31</a:t>
+            </a:r>
+          </a:p>
+          <a:p>
+            <a:r>
+              <a:t>https://github.com/KellamA/Squatch-Sports-Team-11-Capstone-Project/issues/25</a:t>
+            </a:r>
+          </a:p>
+          <a:p>
+            <a:r>
+              <a:t>https://github.com/KellamA/Squatch-Sports-Team-11-Capstone-Project/issues/36</a:t>
+            </a:r>
+          </a:p>
+          <a:p>
+            <a:r>
+              <a:t>https://github.com/KellamA/Squatch-Sports-Team-11-Capstone-Project/issues/37</a:t>
             </a:r>
           </a:p>
         </p:txBody>
@@ -1128,123 +1137,6 @@
           </a:p>
           <a:p>
             <a:r>
-              <a:t>Target narration: ~40 seconds (plus any live demo)</a:t>
-            </a:r>
-          </a:p>
-          <a:p/>
-          <a:p>
-            <a:r>
-              <a:t>The implementation is already merged, so the next work is acceptance and handoff rather than another Android publishing task. Test Android Nearby with two real phones and paired watches, record latency/reconnect behavior, collect actual player feedback and coordinate TestFlight/Play internal distribution with the client. Rehearse and record this sprint review, add the unlisted link and reconcile the report. Sprint 6 ownership is shown in the Kanban slide: Kaleb handles possession restrictions, and Kellam handles Apple Watch keep-alive plus repository cleanup. Mixed Android–iPhone games require a shared transport or backend and are not delivered here.</a:t>
-            </a:r>
-          </a:p>
-          <a:p/>
-          <a:p>
-            <a:r>
-              <a:t>Sources / evidence:</a:t>
-            </a:r>
-          </a:p>
-          <a:p>
-            <a:r>
-              <a:t>https://github.com/KellamA/Squatch-Sports-Team-11-Capstone-Project/issues/33</a:t>
-            </a:r>
-          </a:p>
-          <a:p>
-            <a:r>
-              <a:t>https://github.com/KellamA/Squatch-Sports-Team-11-Capstone-Project/issues/34</a:t>
-            </a:r>
-          </a:p>
-          <a:p>
-            <a:r>
-              <a:t>https://github.com/KellamA/Squatch-Sports-Team-11-Capstone-Project/issues/35</a:t>
-            </a:r>
-          </a:p>
-          <a:p>
-            <a:r>
-              <a:t>https://github.com/KellamA/Squatch-Sports-Team-11-Capstone-Project/issues/25</a:t>
-            </a:r>
-          </a:p>
-          <a:p>
-            <a:r>
-              <a:t>https://github.com/KellamA/Squatch-Sports-Team-11-Capstone-Project/issues/36</a:t>
-            </a:r>
-          </a:p>
-          <a:p>
-            <a:r>
-              <a:t>https://github.com/KellamA/Squatch-Sports-Team-11-Capstone-Project/issues/37</a:t>
-            </a:r>
-          </a:p>
-        </p:txBody>
-      </p:sp>
-      <p:sp>
-        <p:nvSpPr>
-          <p:cNvPr id="4" name="Slide Number Placeholder 3"/>
-          <p:cNvSpPr>
-            <a:spLocks noGrp="1"/>
-          </p:cNvSpPr>
-          <p:nvPr>
-            <p:ph type="sldNum" idx="5" sz="quarter"/>
-          </p:nvPr>
-        </p:nvSpPr>
-        <p:spPr/>
-      </p:sp>
-    </p:spTree>
-  </p:cSld>
-  <p:clrMapOvr>
-    <a:masterClrMapping/>
-  </p:clrMapOvr>
-</p:notes>
-</file>
-
-<file path=ppt/notesSlides/notesSlide16.xml><?xml version="1.0" encoding="utf-8"?>
-<p:notes xmlns:a="http://schemas.openxmlformats.org/drawingml/2006/main" xmlns:p="http://schemas.openxmlformats.org/presentationml/2006/main" xmlns:r="http://schemas.openxmlformats.org/officeDocument/2006/relationships">
-  <p:cSld>
-    <p:spTree>
-      <p:nvGrpSpPr>
-        <p:cNvPr id="1" name=""/>
-        <p:cNvGrpSpPr/>
-        <p:nvPr/>
-      </p:nvGrpSpPr>
-      <p:grpSpPr>
-        <a:xfrm>
-          <a:off x="0" y="0"/>
-          <a:ext cx="0" cy="0"/>
-          <a:chOff x="0" y="0"/>
-          <a:chExt cx="0" cy="0"/>
-        </a:xfrm>
-      </p:grpSpPr>
-      <p:sp>
-        <p:nvSpPr>
-          <p:cNvPr id="2" name="Slide Image Placeholder 1"/>
-          <p:cNvSpPr>
-            <a:spLocks noGrp="1"/>
-          </p:cNvSpPr>
-          <p:nvPr>
-            <p:ph type="sldImg" idx="2"/>
-          </p:nvPr>
-        </p:nvSpPr>
-        <p:spPr/>
-      </p:sp>
-      <p:sp>
-        <p:nvSpPr>
-          <p:cNvPr id="3" name="Notes Placeholder 2"/>
-          <p:cNvSpPr>
-            <a:spLocks noGrp="1"/>
-          </p:cNvSpPr>
-          <p:nvPr>
-            <p:ph type="body" idx="3" sz="quarter"/>
-          </p:nvPr>
-        </p:nvSpPr>
-        <p:spPr/>
-        <p:txBody>
-          <a:bodyPr/>
-          <a:lstStyle/>
-          <a:p>
-            <a:r>
-              <a:t>Presenter: Kellam</a:t>
-            </a:r>
-          </a:p>
-          <a:p>
-            <a:r>
               <a:t>Target narration: ~20 seconds (plus any live demo)</a:t>
             </a:r>
           </a:p>
@@ -2121,7 +2013,7 @@
           <a:p/>
           <a:p>
             <a:r>
-              <a:t>These Sprint 5 closeout items remain visible rather than being hidden in the notes. Issue 33 covers system/integration checks, latency and user feedback. Issue 34 covers physical devices and client TestFlight/Play internal testing. Issue 35 includes the report, meeting minutes, slides and actual recorded demo/video link; the presentation does not imply the video has been uploaded. Kaleb’s nearby feature is considered tested and complete per Kellam’s confirmation. The existing GitHub ticket 31 is still open, so its remaining presentation item is reconciling the board with that confirmed completion, not claiming the feature is untested.</a:t>
+              <a:t>The upcoming work stays visible: player/possession restrictions, Apple Watch workout keep-alive, duplicate-file cleanup and the older repeated-shot bug. Kellam owns issues 36 and 37 in this presentation as requested; the slide edit does not change GitHub assignee fields. Android/Wear OS UI, regression polish and the remaining edge cases also stay tracked under issue 20. The remaining Sprint 5 work is visible in the required Next Steps section; a separate closeout slide is not needed.</a:t>
             </a:r>
           </a:p>
           <a:p/>
@@ -2132,22 +2024,27 @@
           </a:p>
           <a:p>
             <a:r>
-              <a:t>https://github.com/KellamA/Squatch-Sports-Team-11-Capstone-Project/issues/31</a:t>
-            </a:r>
-          </a:p>
-          <a:p>
-            <a:r>
-              <a:t>https://github.com/KellamA/Squatch-Sports-Team-11-Capstone-Project/issues/33</a:t>
-            </a:r>
-          </a:p>
-          <a:p>
-            <a:r>
-              <a:t>https://github.com/KellamA/Squatch-Sports-Team-11-Capstone-Project/issues/34</a:t>
-            </a:r>
-          </a:p>
-          <a:p>
-            <a:r>
-              <a:t>https://github.com/KellamA/Squatch-Sports-Team-11-Capstone-Project/issues/35</a:t>
+              <a:t>https://github.com/KellamA/Squatch-Sports-Team-11-Capstone-Project/issues/25</a:t>
+            </a:r>
+          </a:p>
+          <a:p>
+            <a:r>
+              <a:t>https://github.com/KellamA/Squatch-Sports-Team-11-Capstone-Project/issues/36</a:t>
+            </a:r>
+          </a:p>
+          <a:p>
+            <a:r>
+              <a:t>https://github.com/KellamA/Squatch-Sports-Team-11-Capstone-Project/issues/37</a:t>
+            </a:r>
+          </a:p>
+          <a:p>
+            <a:r>
+              <a:t>https://github.com/KellamA/Squatch-Sports-Team-11-Capstone-Project/issues/19</a:t>
+            </a:r>
+          </a:p>
+          <a:p>
+            <a:r>
+              <a:t>https://github.com/KellamA/Squatch-Sports-Team-11-Capstone-Project/issues/20</a:t>
             </a:r>
           </a:p>
         </p:txBody>
@@ -2926,7 +2823,7 @@
                 </a:solidFill>
                 <a:latin typeface="Arial"/>
               </a:rPr>
-              <a:t>KANBAN</a:t>
+              <a:t>CLIENT MEETINGS</a:t>
             </a:r>
           </a:p>
         </p:txBody>
@@ -2971,7 +2868,7 @@
                 </a:solidFill>
                 <a:latin typeface="Arial"/>
               </a:rPr>
-              <a:t>Sprint 6 ownership</a:t>
+              <a:t>Feedback shaped the feature</a:t>
             </a:r>
           </a:p>
         </p:txBody>
@@ -3062,6 +2959,2978 @@
                 <a:latin typeface="Arial"/>
               </a:rPr>
               <a:t>10</a:t>
+            </a:r>
+          </a:p>
+        </p:txBody>
+      </p:sp>
+      <p:sp>
+        <p:nvSpPr>
+          <p:cNvPr id="6" name="Rounded Rectangle 5"/>
+          <p:cNvSpPr/>
+          <p:nvPr/>
+        </p:nvSpPr>
+        <p:spPr>
+          <a:xfrm>
+            <a:off x="548640" y="1938528"/>
+            <a:ext cx="5394960" cy="2761488"/>
+          </a:xfrm>
+          <a:prstGeom prst="roundRect">
+            <a:avLst>
+              <a:gd name="adj" fmla="val 10000"/>
+            </a:avLst>
+          </a:prstGeom>
+          <a:solidFill>
+            <a:srgbClr val="F3F4F6"/>
+          </a:solidFill>
+          <a:ln>
+            <a:noFill/>
+          </a:ln>
+        </p:spPr>
+        <p:style>
+          <a:lnRef idx="1">
+            <a:schemeClr val="accent1"/>
+          </a:lnRef>
+          <a:fillRef idx="3">
+            <a:schemeClr val="accent1"/>
+          </a:fillRef>
+          <a:effectRef idx="2">
+            <a:schemeClr val="accent1"/>
+          </a:effectRef>
+          <a:fontRef idx="minor">
+            <a:schemeClr val="lt1"/>
+          </a:fontRef>
+        </p:style>
+        <p:txBody>
+          <a:bodyPr rtlCol="0" anchor="ctr"/>
+          <a:lstStyle/>
+          <a:p>
+            <a:pPr algn="ctr"/>
+          </a:p>
+        </p:txBody>
+      </p:sp>
+      <p:sp>
+        <p:nvSpPr>
+          <p:cNvPr id="7" name="TextBox 6"/>
+          <p:cNvSpPr txBox="1"/>
+          <p:nvPr/>
+        </p:nvSpPr>
+        <p:spPr>
+          <a:xfrm>
+            <a:off x="822959" y="2267712"/>
+            <a:ext cx="4846320" cy="329184"/>
+          </a:xfrm>
+          <a:prstGeom prst="rect">
+            <a:avLst/>
+          </a:prstGeom>
+          <a:noFill/>
+        </p:spPr>
+        <p:txBody>
+          <a:bodyPr wrap="square" lIns="0" rIns="0" tIns="0" bIns="0">
+            <a:noAutofit/>
+          </a:bodyPr>
+          <a:lstStyle/>
+          <a:p>
+            <a:pPr algn="l">
+              <a:lnSpc>
+                <a:spcPct val="112000"/>
+              </a:lnSpc>
+              <a:spcBef>
+                <a:spcPts val="0"/>
+              </a:spcBef>
+              <a:spcAft>
+                <a:spcPts val="700"/>
+              </a:spcAft>
+            </a:pPr>
+            <a:r>
+              <a:rPr sz="1500" b="1">
+                <a:solidFill>
+                  <a:srgbClr val="FF8A00"/>
+                </a:solidFill>
+                <a:latin typeface="Arial"/>
+              </a:rPr>
+              <a:t>SEPTEMBER 30</a:t>
+            </a:r>
+          </a:p>
+        </p:txBody>
+      </p:sp>
+      <p:sp>
+        <p:nvSpPr>
+          <p:cNvPr id="8" name="TextBox 7"/>
+          <p:cNvSpPr txBox="1"/>
+          <p:nvPr/>
+        </p:nvSpPr>
+        <p:spPr>
+          <a:xfrm>
+            <a:off x="822959" y="2889504"/>
+            <a:ext cx="4846320" cy="521207"/>
+          </a:xfrm>
+          <a:prstGeom prst="rect">
+            <a:avLst/>
+          </a:prstGeom>
+          <a:noFill/>
+        </p:spPr>
+        <p:txBody>
+          <a:bodyPr wrap="square" lIns="0" rIns="0" tIns="0" bIns="0">
+            <a:noAutofit/>
+          </a:bodyPr>
+          <a:lstStyle/>
+          <a:p>
+            <a:pPr algn="l">
+              <a:lnSpc>
+                <a:spcPct val="112000"/>
+              </a:lnSpc>
+              <a:spcBef>
+                <a:spcPts val="0"/>
+              </a:spcBef>
+              <a:spcAft>
+                <a:spcPts val="700"/>
+              </a:spcAft>
+            </a:pPr>
+            <a:r>
+              <a:rPr sz="2700" b="1">
+                <a:solidFill>
+                  <a:srgbClr val="1F2328"/>
+                </a:solidFill>
+                <a:latin typeface="Arial"/>
+              </a:rPr>
+              <a:t>Align the platforms</a:t>
+            </a:r>
+          </a:p>
+        </p:txBody>
+      </p:sp>
+      <p:sp>
+        <p:nvSpPr>
+          <p:cNvPr id="9" name="TextBox 8"/>
+          <p:cNvSpPr txBox="1"/>
+          <p:nvPr/>
+        </p:nvSpPr>
+        <p:spPr>
+          <a:xfrm>
+            <a:off x="822959" y="3758184"/>
+            <a:ext cx="4846320" cy="640080"/>
+          </a:xfrm>
+          <a:prstGeom prst="rect">
+            <a:avLst/>
+          </a:prstGeom>
+          <a:noFill/>
+        </p:spPr>
+        <p:txBody>
+          <a:bodyPr wrap="square" lIns="0" rIns="0" tIns="0" bIns="0">
+            <a:noAutofit/>
+          </a:bodyPr>
+          <a:lstStyle/>
+          <a:p>
+            <a:pPr algn="l">
+              <a:lnSpc>
+                <a:spcPct val="112000"/>
+              </a:lnSpc>
+              <a:spcBef>
+                <a:spcPts val="0"/>
+              </a:spcBef>
+              <a:spcAft>
+                <a:spcPts val="700"/>
+              </a:spcAft>
+            </a:pPr>
+            <a:r>
+              <a:rPr sz="2000" b="0">
+                <a:solidFill>
+                  <a:srgbClr val="5B6573"/>
+                </a:solidFill>
+                <a:latin typeface="Arial"/>
+              </a:rPr>
+              <a:t>Gamification parity + a new 1v1 mode.</a:t>
+            </a:r>
+          </a:p>
+        </p:txBody>
+      </p:sp>
+      <p:sp>
+        <p:nvSpPr>
+          <p:cNvPr id="10" name="Rounded Rectangle 9"/>
+          <p:cNvSpPr/>
+          <p:nvPr/>
+        </p:nvSpPr>
+        <p:spPr>
+          <a:xfrm>
+            <a:off x="6217920" y="1938528"/>
+            <a:ext cx="5394960" cy="2761488"/>
+          </a:xfrm>
+          <a:prstGeom prst="roundRect">
+            <a:avLst>
+              <a:gd name="adj" fmla="val 10000"/>
+            </a:avLst>
+          </a:prstGeom>
+          <a:solidFill>
+            <a:srgbClr val="F3F4F6"/>
+          </a:solidFill>
+          <a:ln>
+            <a:noFill/>
+          </a:ln>
+        </p:spPr>
+        <p:style>
+          <a:lnRef idx="1">
+            <a:schemeClr val="accent1"/>
+          </a:lnRef>
+          <a:fillRef idx="3">
+            <a:schemeClr val="accent1"/>
+          </a:fillRef>
+          <a:effectRef idx="2">
+            <a:schemeClr val="accent1"/>
+          </a:effectRef>
+          <a:fontRef idx="minor">
+            <a:schemeClr val="lt1"/>
+          </a:fontRef>
+        </p:style>
+        <p:txBody>
+          <a:bodyPr rtlCol="0" anchor="ctr"/>
+          <a:lstStyle/>
+          <a:p>
+            <a:pPr algn="ctr"/>
+          </a:p>
+        </p:txBody>
+      </p:sp>
+      <p:sp>
+        <p:nvSpPr>
+          <p:cNvPr id="11" name="TextBox 10"/>
+          <p:cNvSpPr txBox="1"/>
+          <p:nvPr/>
+        </p:nvSpPr>
+        <p:spPr>
+          <a:xfrm>
+            <a:off x="6492240" y="2267712"/>
+            <a:ext cx="4846320" cy="329184"/>
+          </a:xfrm>
+          <a:prstGeom prst="rect">
+            <a:avLst/>
+          </a:prstGeom>
+          <a:noFill/>
+        </p:spPr>
+        <p:txBody>
+          <a:bodyPr wrap="square" lIns="0" rIns="0" tIns="0" bIns="0">
+            <a:noAutofit/>
+          </a:bodyPr>
+          <a:lstStyle/>
+          <a:p>
+            <a:pPr algn="l">
+              <a:lnSpc>
+                <a:spcPct val="112000"/>
+              </a:lnSpc>
+              <a:spcBef>
+                <a:spcPts val="0"/>
+              </a:spcBef>
+              <a:spcAft>
+                <a:spcPts val="700"/>
+              </a:spcAft>
+            </a:pPr>
+            <a:r>
+              <a:rPr sz="1500" b="1">
+                <a:solidFill>
+                  <a:srgbClr val="FF8A00"/>
+                </a:solidFill>
+                <a:latin typeface="Arial"/>
+              </a:rPr>
+              <a:t>OCTOBER 14</a:t>
+            </a:r>
+          </a:p>
+        </p:txBody>
+      </p:sp>
+      <p:sp>
+        <p:nvSpPr>
+          <p:cNvPr id="12" name="TextBox 11"/>
+          <p:cNvSpPr txBox="1"/>
+          <p:nvPr/>
+        </p:nvSpPr>
+        <p:spPr>
+          <a:xfrm>
+            <a:off x="6492240" y="2889504"/>
+            <a:ext cx="4846320" cy="521207"/>
+          </a:xfrm>
+          <a:prstGeom prst="rect">
+            <a:avLst/>
+          </a:prstGeom>
+          <a:noFill/>
+        </p:spPr>
+        <p:txBody>
+          <a:bodyPr wrap="square" lIns="0" rIns="0" tIns="0" bIns="0">
+            <a:noAutofit/>
+          </a:bodyPr>
+          <a:lstStyle/>
+          <a:p>
+            <a:pPr algn="l">
+              <a:lnSpc>
+                <a:spcPct val="112000"/>
+              </a:lnSpc>
+              <a:spcBef>
+                <a:spcPts val="0"/>
+              </a:spcBef>
+              <a:spcAft>
+                <a:spcPts val="700"/>
+              </a:spcAft>
+            </a:pPr>
+            <a:r>
+              <a:rPr sz="2700" b="1">
+                <a:solidFill>
+                  <a:srgbClr val="1F2328"/>
+                </a:solidFill>
+                <a:latin typeface="Arial"/>
+              </a:rPr>
+              <a:t>Make it watch-first</a:t>
+            </a:r>
+          </a:p>
+        </p:txBody>
+      </p:sp>
+      <p:sp>
+        <p:nvSpPr>
+          <p:cNvPr id="13" name="TextBox 12"/>
+          <p:cNvSpPr txBox="1"/>
+          <p:nvPr/>
+        </p:nvSpPr>
+        <p:spPr>
+          <a:xfrm>
+            <a:off x="6492240" y="3758184"/>
+            <a:ext cx="4846320" cy="640080"/>
+          </a:xfrm>
+          <a:prstGeom prst="rect">
+            <a:avLst/>
+          </a:prstGeom>
+          <a:noFill/>
+        </p:spPr>
+        <p:txBody>
+          <a:bodyPr wrap="square" lIns="0" rIns="0" tIns="0" bIns="0">
+            <a:noAutofit/>
+          </a:bodyPr>
+          <a:lstStyle/>
+          <a:p>
+            <a:pPr algn="l">
+              <a:lnSpc>
+                <a:spcPct val="112000"/>
+              </a:lnSpc>
+              <a:spcBef>
+                <a:spcPts val="0"/>
+              </a:spcBef>
+              <a:spcAft>
+                <a:spcPts val="700"/>
+              </a:spcAft>
+            </a:pPr>
+            <a:r>
+              <a:rPr sz="2000" b="0">
+                <a:solidFill>
+                  <a:srgbClr val="5B6573"/>
+                </a:solidFill>
+                <a:latin typeface="Arial"/>
+              </a:rPr>
+              <a:t>Keep the court. Let each player use a phone.</a:t>
+            </a:r>
+          </a:p>
+        </p:txBody>
+      </p:sp>
+      <p:sp>
+        <p:nvSpPr>
+          <p:cNvPr id="14" name="TextBox 13"/>
+          <p:cNvSpPr txBox="1"/>
+          <p:nvPr/>
+        </p:nvSpPr>
+        <p:spPr>
+          <a:xfrm>
+            <a:off x="548640" y="5650992"/>
+            <a:ext cx="11064240" cy="384048"/>
+          </a:xfrm>
+          <a:prstGeom prst="rect">
+            <a:avLst/>
+          </a:prstGeom>
+          <a:noFill/>
+        </p:spPr>
+        <p:txBody>
+          <a:bodyPr wrap="square" lIns="0" rIns="0" tIns="0" bIns="0">
+            <a:noAutofit/>
+          </a:bodyPr>
+          <a:lstStyle/>
+          <a:p>
+            <a:pPr algn="l">
+              <a:lnSpc>
+                <a:spcPct val="112000"/>
+              </a:lnSpc>
+              <a:spcBef>
+                <a:spcPts val="0"/>
+              </a:spcBef>
+              <a:spcAft>
+                <a:spcPts val="700"/>
+              </a:spcAft>
+            </a:pPr>
+            <a:r>
+              <a:rPr sz="1700" b="0">
+                <a:solidFill>
+                  <a:srgbClr val="5B6573"/>
+                </a:solidFill>
+                <a:latin typeface="Arial"/>
+              </a:rPr>
+              <a:t>October 28 meeting cancelled.</a:t>
+            </a:r>
+          </a:p>
+        </p:txBody>
+      </p:sp>
+    </p:spTree>
+  </p:cSld>
+  <p:clrMapOvr>
+    <a:masterClrMapping/>
+  </p:clrMapOvr>
+</p:sld>
+</file>
+
+<file path=ppt/slides/slide11.xml><?xml version="1.0" encoding="utf-8"?>
+<p:sld xmlns:a="http://schemas.openxmlformats.org/drawingml/2006/main" xmlns:p="http://schemas.openxmlformats.org/presentationml/2006/main" xmlns:r="http://schemas.openxmlformats.org/officeDocument/2006/relationships">
+  <p:cSld>
+    <p:bg>
+      <p:bgPr>
+        <a:solidFill>
+          <a:srgbClr val="FFFFFF"/>
+        </a:solidFill>
+        <a:effectLst/>
+      </p:bgPr>
+    </p:bg>
+    <p:spTree>
+      <p:nvGrpSpPr>
+        <p:cNvPr id="1" name=""/>
+        <p:cNvGrpSpPr/>
+        <p:nvPr/>
+      </p:nvGrpSpPr>
+      <p:grpSpPr/>
+      <p:sp>
+        <p:nvSpPr>
+          <p:cNvPr id="2" name="TextBox 1"/>
+          <p:cNvSpPr txBox="1"/>
+          <p:nvPr/>
+        </p:nvSpPr>
+        <p:spPr>
+          <a:xfrm>
+            <a:off x="548640" y="329184"/>
+            <a:ext cx="11064240" cy="256032"/>
+          </a:xfrm>
+          <a:prstGeom prst="rect">
+            <a:avLst/>
+          </a:prstGeom>
+          <a:noFill/>
+        </p:spPr>
+        <p:txBody>
+          <a:bodyPr wrap="square" lIns="0" rIns="0" tIns="0" bIns="0">
+            <a:noAutofit/>
+          </a:bodyPr>
+          <a:lstStyle/>
+          <a:p>
+            <a:pPr algn="l">
+              <a:lnSpc>
+                <a:spcPct val="112000"/>
+              </a:lnSpc>
+              <a:spcBef>
+                <a:spcPts val="0"/>
+              </a:spcBef>
+              <a:spcAft>
+                <a:spcPts val="700"/>
+              </a:spcAft>
+            </a:pPr>
+            <a:r>
+              <a:rPr sz="1200" b="1">
+                <a:solidFill>
+                  <a:srgbClr val="FF8A00"/>
+                </a:solidFill>
+                <a:latin typeface="Arial"/>
+              </a:rPr>
+              <a:t>REPORT</a:t>
+            </a:r>
+          </a:p>
+        </p:txBody>
+      </p:sp>
+      <p:sp>
+        <p:nvSpPr>
+          <p:cNvPr id="3" name="TextBox 2"/>
+          <p:cNvSpPr txBox="1"/>
+          <p:nvPr/>
+        </p:nvSpPr>
+        <p:spPr>
+          <a:xfrm>
+            <a:off x="548640" y="777240"/>
+            <a:ext cx="11064240" cy="749808"/>
+          </a:xfrm>
+          <a:prstGeom prst="rect">
+            <a:avLst/>
+          </a:prstGeom>
+          <a:noFill/>
+        </p:spPr>
+        <p:txBody>
+          <a:bodyPr wrap="square" lIns="0" rIns="0" tIns="0" bIns="0">
+            <a:noAutofit/>
+          </a:bodyPr>
+          <a:lstStyle/>
+          <a:p>
+            <a:pPr algn="l">
+              <a:lnSpc>
+                <a:spcPct val="112000"/>
+              </a:lnSpc>
+              <a:spcBef>
+                <a:spcPts val="0"/>
+              </a:spcBef>
+              <a:spcAft>
+                <a:spcPts val="700"/>
+              </a:spcAft>
+            </a:pPr>
+            <a:r>
+              <a:rPr sz="3400" b="1">
+                <a:solidFill>
+                  <a:srgbClr val="1F2328"/>
+                </a:solidFill>
+                <a:latin typeface="Arial"/>
+              </a:rPr>
+              <a:t>Documentation for handoff</a:t>
+            </a:r>
+          </a:p>
+        </p:txBody>
+      </p:sp>
+      <p:sp>
+        <p:nvSpPr>
+          <p:cNvPr id="4" name="TextBox 3"/>
+          <p:cNvSpPr txBox="1"/>
+          <p:nvPr/>
+        </p:nvSpPr>
+        <p:spPr>
+          <a:xfrm>
+            <a:off x="548640" y="6528816"/>
+            <a:ext cx="9144000" cy="182880"/>
+          </a:xfrm>
+          <a:prstGeom prst="rect">
+            <a:avLst/>
+          </a:prstGeom>
+          <a:noFill/>
+        </p:spPr>
+        <p:txBody>
+          <a:bodyPr wrap="square" lIns="0" rIns="0" tIns="0" bIns="0">
+            <a:noAutofit/>
+          </a:bodyPr>
+          <a:lstStyle/>
+          <a:p>
+            <a:pPr algn="l">
+              <a:lnSpc>
+                <a:spcPct val="112000"/>
+              </a:lnSpc>
+              <a:spcBef>
+                <a:spcPts val="0"/>
+              </a:spcBef>
+              <a:spcAft>
+                <a:spcPts val="700"/>
+              </a:spcAft>
+            </a:pPr>
+            <a:r>
+              <a:rPr sz="1000" b="0">
+                <a:solidFill>
+                  <a:srgbClr val="5B6573"/>
+                </a:solidFill>
+                <a:latin typeface="Arial"/>
+              </a:rPr>
+              <a:t>SQUATCH SPORTS · TEAM 11</a:t>
+            </a:r>
+          </a:p>
+        </p:txBody>
+      </p:sp>
+      <p:sp>
+        <p:nvSpPr>
+          <p:cNvPr id="5" name="TextBox 4"/>
+          <p:cNvSpPr txBox="1"/>
+          <p:nvPr/>
+        </p:nvSpPr>
+        <p:spPr>
+          <a:xfrm>
+            <a:off x="11091672" y="6510528"/>
+            <a:ext cx="521207" cy="201168"/>
+          </a:xfrm>
+          <a:prstGeom prst="rect">
+            <a:avLst/>
+          </a:prstGeom>
+          <a:noFill/>
+        </p:spPr>
+        <p:txBody>
+          <a:bodyPr wrap="square" lIns="0" rIns="0" tIns="0" bIns="0">
+            <a:noAutofit/>
+          </a:bodyPr>
+          <a:lstStyle/>
+          <a:p>
+            <a:pPr algn="r">
+              <a:lnSpc>
+                <a:spcPct val="112000"/>
+              </a:lnSpc>
+              <a:spcBef>
+                <a:spcPts val="0"/>
+              </a:spcBef>
+              <a:spcAft>
+                <a:spcPts val="700"/>
+              </a:spcAft>
+            </a:pPr>
+            <a:r>
+              <a:rPr sz="1000" b="0">
+                <a:solidFill>
+                  <a:srgbClr val="5B6573"/>
+                </a:solidFill>
+                <a:latin typeface="Arial"/>
+              </a:rPr>
+              <a:t>11</a:t>
+            </a:r>
+          </a:p>
+        </p:txBody>
+      </p:sp>
+      <p:sp>
+        <p:nvSpPr>
+          <p:cNvPr id="6" name="Rounded Rectangle 5"/>
+          <p:cNvSpPr/>
+          <p:nvPr/>
+        </p:nvSpPr>
+        <p:spPr>
+          <a:xfrm>
+            <a:off x="548640" y="2048256"/>
+            <a:ext cx="3566160" cy="2231136"/>
+          </a:xfrm>
+          <a:prstGeom prst="roundRect">
+            <a:avLst>
+              <a:gd name="adj" fmla="val 10000"/>
+            </a:avLst>
+          </a:prstGeom>
+          <a:solidFill>
+            <a:srgbClr val="F3F4F6"/>
+          </a:solidFill>
+          <a:ln>
+            <a:noFill/>
+          </a:ln>
+        </p:spPr>
+        <p:style>
+          <a:lnRef idx="1">
+            <a:schemeClr val="accent1"/>
+          </a:lnRef>
+          <a:fillRef idx="3">
+            <a:schemeClr val="accent1"/>
+          </a:fillRef>
+          <a:effectRef idx="2">
+            <a:schemeClr val="accent1"/>
+          </a:effectRef>
+          <a:fontRef idx="minor">
+            <a:schemeClr val="lt1"/>
+          </a:fontRef>
+        </p:style>
+        <p:txBody>
+          <a:bodyPr rtlCol="0" anchor="ctr"/>
+          <a:lstStyle/>
+          <a:p>
+            <a:pPr algn="ctr"/>
+          </a:p>
+        </p:txBody>
+      </p:sp>
+      <p:sp>
+        <p:nvSpPr>
+          <p:cNvPr id="7" name="TextBox 6"/>
+          <p:cNvSpPr txBox="1"/>
+          <p:nvPr/>
+        </p:nvSpPr>
+        <p:spPr>
+          <a:xfrm>
+            <a:off x="777240" y="2450592"/>
+            <a:ext cx="3108960" cy="612648"/>
+          </a:xfrm>
+          <a:prstGeom prst="rect">
+            <a:avLst/>
+          </a:prstGeom>
+          <a:noFill/>
+        </p:spPr>
+        <p:txBody>
+          <a:bodyPr wrap="square" lIns="0" rIns="0" tIns="0" bIns="0">
+            <a:noAutofit/>
+          </a:bodyPr>
+          <a:lstStyle/>
+          <a:p>
+            <a:pPr algn="l">
+              <a:lnSpc>
+                <a:spcPct val="112000"/>
+              </a:lnSpc>
+              <a:spcBef>
+                <a:spcPts val="0"/>
+              </a:spcBef>
+              <a:spcAft>
+                <a:spcPts val="700"/>
+              </a:spcAft>
+            </a:pPr>
+            <a:r>
+              <a:rPr sz="2500" b="1">
+                <a:solidFill>
+                  <a:srgbClr val="FF8A00"/>
+                </a:solidFill>
+                <a:latin typeface="Arial"/>
+              </a:rPr>
+              <a:t>Report</a:t>
+            </a:r>
+          </a:p>
+        </p:txBody>
+      </p:sp>
+      <p:sp>
+        <p:nvSpPr>
+          <p:cNvPr id="8" name="TextBox 7"/>
+          <p:cNvSpPr txBox="1"/>
+          <p:nvPr/>
+        </p:nvSpPr>
+        <p:spPr>
+          <a:xfrm>
+            <a:off x="777240" y="3337560"/>
+            <a:ext cx="3108960" cy="594360"/>
+          </a:xfrm>
+          <a:prstGeom prst="rect">
+            <a:avLst/>
+          </a:prstGeom>
+          <a:noFill/>
+        </p:spPr>
+        <p:txBody>
+          <a:bodyPr wrap="square" lIns="0" rIns="0" tIns="0" bIns="0">
+            <a:noAutofit/>
+          </a:bodyPr>
+          <a:lstStyle/>
+          <a:p>
+            <a:pPr algn="l">
+              <a:lnSpc>
+                <a:spcPct val="112000"/>
+              </a:lnSpc>
+              <a:spcBef>
+                <a:spcPts val="0"/>
+              </a:spcBef>
+              <a:spcAft>
+                <a:spcPts val="700"/>
+              </a:spcAft>
+            </a:pPr>
+            <a:r>
+              <a:rPr sz="2000" b="0">
+                <a:solidFill>
+                  <a:srgbClr val="5B6573"/>
+                </a:solidFill>
+                <a:latin typeface="Arial"/>
+              </a:rPr>
+              <a:t>Features + team contributions</a:t>
+            </a:r>
+          </a:p>
+        </p:txBody>
+      </p:sp>
+      <p:sp>
+        <p:nvSpPr>
+          <p:cNvPr id="9" name="Rounded Rectangle 8"/>
+          <p:cNvSpPr/>
+          <p:nvPr/>
+        </p:nvSpPr>
+        <p:spPr>
+          <a:xfrm>
+            <a:off x="4343400" y="2048256"/>
+            <a:ext cx="3566160" cy="2231136"/>
+          </a:xfrm>
+          <a:prstGeom prst="roundRect">
+            <a:avLst>
+              <a:gd name="adj" fmla="val 10000"/>
+            </a:avLst>
+          </a:prstGeom>
+          <a:solidFill>
+            <a:srgbClr val="F3F4F6"/>
+          </a:solidFill>
+          <a:ln>
+            <a:noFill/>
+          </a:ln>
+        </p:spPr>
+        <p:style>
+          <a:lnRef idx="1">
+            <a:schemeClr val="accent1"/>
+          </a:lnRef>
+          <a:fillRef idx="3">
+            <a:schemeClr val="accent1"/>
+          </a:fillRef>
+          <a:effectRef idx="2">
+            <a:schemeClr val="accent1"/>
+          </a:effectRef>
+          <a:fontRef idx="minor">
+            <a:schemeClr val="lt1"/>
+          </a:fontRef>
+        </p:style>
+        <p:txBody>
+          <a:bodyPr rtlCol="0" anchor="ctr"/>
+          <a:lstStyle/>
+          <a:p>
+            <a:pPr algn="ctr"/>
+          </a:p>
+        </p:txBody>
+      </p:sp>
+      <p:sp>
+        <p:nvSpPr>
+          <p:cNvPr id="10" name="TextBox 9"/>
+          <p:cNvSpPr txBox="1"/>
+          <p:nvPr/>
+        </p:nvSpPr>
+        <p:spPr>
+          <a:xfrm>
+            <a:off x="4572000" y="2450592"/>
+            <a:ext cx="3108960" cy="612648"/>
+          </a:xfrm>
+          <a:prstGeom prst="rect">
+            <a:avLst/>
+          </a:prstGeom>
+          <a:noFill/>
+        </p:spPr>
+        <p:txBody>
+          <a:bodyPr wrap="square" lIns="0" rIns="0" tIns="0" bIns="0">
+            <a:noAutofit/>
+          </a:bodyPr>
+          <a:lstStyle/>
+          <a:p>
+            <a:pPr algn="l">
+              <a:lnSpc>
+                <a:spcPct val="112000"/>
+              </a:lnSpc>
+              <a:spcBef>
+                <a:spcPts val="0"/>
+              </a:spcBef>
+              <a:spcAft>
+                <a:spcPts val="700"/>
+              </a:spcAft>
+            </a:pPr>
+            <a:r>
+              <a:rPr sz="2500" b="1">
+                <a:solidFill>
+                  <a:srgbClr val="FF8A00"/>
+                </a:solidFill>
+                <a:latin typeface="Arial"/>
+              </a:rPr>
+              <a:t>Meeting minutes</a:t>
+            </a:r>
+          </a:p>
+        </p:txBody>
+      </p:sp>
+      <p:sp>
+        <p:nvSpPr>
+          <p:cNvPr id="11" name="TextBox 10"/>
+          <p:cNvSpPr txBox="1"/>
+          <p:nvPr/>
+        </p:nvSpPr>
+        <p:spPr>
+          <a:xfrm>
+            <a:off x="4572000" y="3337560"/>
+            <a:ext cx="3108960" cy="594360"/>
+          </a:xfrm>
+          <a:prstGeom prst="rect">
+            <a:avLst/>
+          </a:prstGeom>
+          <a:noFill/>
+        </p:spPr>
+        <p:txBody>
+          <a:bodyPr wrap="square" lIns="0" rIns="0" tIns="0" bIns="0">
+            <a:noAutofit/>
+          </a:bodyPr>
+          <a:lstStyle/>
+          <a:p>
+            <a:pPr algn="l">
+              <a:lnSpc>
+                <a:spcPct val="112000"/>
+              </a:lnSpc>
+              <a:spcBef>
+                <a:spcPts val="0"/>
+              </a:spcBef>
+              <a:spcAft>
+                <a:spcPts val="700"/>
+              </a:spcAft>
+            </a:pPr>
+            <a:r>
+              <a:rPr sz="2000" b="0">
+                <a:solidFill>
+                  <a:srgbClr val="5B6573"/>
+                </a:solidFill>
+                <a:latin typeface="Arial"/>
+              </a:rPr>
+              <a:t>Decisions + action items</a:t>
+            </a:r>
+          </a:p>
+        </p:txBody>
+      </p:sp>
+      <p:sp>
+        <p:nvSpPr>
+          <p:cNvPr id="12" name="Rounded Rectangle 11"/>
+          <p:cNvSpPr/>
+          <p:nvPr/>
+        </p:nvSpPr>
+        <p:spPr>
+          <a:xfrm>
+            <a:off x="8138160" y="2048256"/>
+            <a:ext cx="3566160" cy="2231136"/>
+          </a:xfrm>
+          <a:prstGeom prst="roundRect">
+            <a:avLst>
+              <a:gd name="adj" fmla="val 10000"/>
+            </a:avLst>
+          </a:prstGeom>
+          <a:solidFill>
+            <a:srgbClr val="F3F4F6"/>
+          </a:solidFill>
+          <a:ln>
+            <a:noFill/>
+          </a:ln>
+        </p:spPr>
+        <p:style>
+          <a:lnRef idx="1">
+            <a:schemeClr val="accent1"/>
+          </a:lnRef>
+          <a:fillRef idx="3">
+            <a:schemeClr val="accent1"/>
+          </a:fillRef>
+          <a:effectRef idx="2">
+            <a:schemeClr val="accent1"/>
+          </a:effectRef>
+          <a:fontRef idx="minor">
+            <a:schemeClr val="lt1"/>
+          </a:fontRef>
+        </p:style>
+        <p:txBody>
+          <a:bodyPr rtlCol="0" anchor="ctr"/>
+          <a:lstStyle/>
+          <a:p>
+            <a:pPr algn="ctr"/>
+          </a:p>
+        </p:txBody>
+      </p:sp>
+      <p:sp>
+        <p:nvSpPr>
+          <p:cNvPr id="13" name="TextBox 12"/>
+          <p:cNvSpPr txBox="1"/>
+          <p:nvPr/>
+        </p:nvSpPr>
+        <p:spPr>
+          <a:xfrm>
+            <a:off x="8366760" y="2450592"/>
+            <a:ext cx="3108960" cy="612648"/>
+          </a:xfrm>
+          <a:prstGeom prst="rect">
+            <a:avLst/>
+          </a:prstGeom>
+          <a:noFill/>
+        </p:spPr>
+        <p:txBody>
+          <a:bodyPr wrap="square" lIns="0" rIns="0" tIns="0" bIns="0">
+            <a:noAutofit/>
+          </a:bodyPr>
+          <a:lstStyle/>
+          <a:p>
+            <a:pPr algn="l">
+              <a:lnSpc>
+                <a:spcPct val="112000"/>
+              </a:lnSpc>
+              <a:spcBef>
+                <a:spcPts val="0"/>
+              </a:spcBef>
+              <a:spcAft>
+                <a:spcPts val="700"/>
+              </a:spcAft>
+            </a:pPr>
+            <a:r>
+              <a:rPr sz="2500" b="1">
+                <a:solidFill>
+                  <a:srgbClr val="FF8A00"/>
+                </a:solidFill>
+                <a:latin typeface="Arial"/>
+              </a:rPr>
+              <a:t>Test evidence</a:t>
+            </a:r>
+          </a:p>
+        </p:txBody>
+      </p:sp>
+      <p:sp>
+        <p:nvSpPr>
+          <p:cNvPr id="14" name="TextBox 13"/>
+          <p:cNvSpPr txBox="1"/>
+          <p:nvPr/>
+        </p:nvSpPr>
+        <p:spPr>
+          <a:xfrm>
+            <a:off x="8366760" y="3337560"/>
+            <a:ext cx="3108960" cy="594360"/>
+          </a:xfrm>
+          <a:prstGeom prst="rect">
+            <a:avLst/>
+          </a:prstGeom>
+          <a:noFill/>
+        </p:spPr>
+        <p:txBody>
+          <a:bodyPr wrap="square" lIns="0" rIns="0" tIns="0" bIns="0">
+            <a:noAutofit/>
+          </a:bodyPr>
+          <a:lstStyle/>
+          <a:p>
+            <a:pPr algn="l">
+              <a:lnSpc>
+                <a:spcPct val="112000"/>
+              </a:lnSpc>
+              <a:spcBef>
+                <a:spcPts val="0"/>
+              </a:spcBef>
+              <a:spcAft>
+                <a:spcPts val="700"/>
+              </a:spcAft>
+            </a:pPr>
+            <a:r>
+              <a:rPr sz="2000" b="0">
+                <a:solidFill>
+                  <a:srgbClr val="5B6573"/>
+                </a:solidFill>
+                <a:latin typeface="Arial"/>
+              </a:rPr>
+              <a:t>Results + logs + screenshots</a:t>
+            </a:r>
+          </a:p>
+        </p:txBody>
+      </p:sp>
+      <p:sp>
+        <p:nvSpPr>
+          <p:cNvPr id="15" name="TextBox 14"/>
+          <p:cNvSpPr txBox="1"/>
+          <p:nvPr/>
+        </p:nvSpPr>
+        <p:spPr>
+          <a:xfrm>
+            <a:off x="548640" y="5221224"/>
+            <a:ext cx="11064240" cy="621792"/>
+          </a:xfrm>
+          <a:prstGeom prst="rect">
+            <a:avLst/>
+          </a:prstGeom>
+          <a:noFill/>
+        </p:spPr>
+        <p:txBody>
+          <a:bodyPr wrap="square" lIns="0" rIns="0" tIns="0" bIns="0">
+            <a:noAutofit/>
+          </a:bodyPr>
+          <a:lstStyle/>
+          <a:p>
+            <a:pPr algn="ctr">
+              <a:lnSpc>
+                <a:spcPct val="112000"/>
+              </a:lnSpc>
+              <a:spcBef>
+                <a:spcPts val="0"/>
+              </a:spcBef>
+              <a:spcAft>
+                <a:spcPts val="700"/>
+              </a:spcAft>
+            </a:pPr>
+            <a:r>
+              <a:rPr sz="2600" b="1">
+                <a:solidFill>
+                  <a:srgbClr val="1F2328"/>
+                </a:solidFill>
+                <a:latin typeface="Arial"/>
+              </a:rPr>
+              <a:t>Next: recording + unlisted video link.</a:t>
+            </a:r>
+          </a:p>
+        </p:txBody>
+      </p:sp>
+    </p:spTree>
+  </p:cSld>
+  <p:clrMapOvr>
+    <a:masterClrMapping/>
+  </p:clrMapOvr>
+</p:sld>
+</file>
+
+<file path=ppt/slides/slide12.xml><?xml version="1.0" encoding="utf-8"?>
+<p:sld xmlns:a="http://schemas.openxmlformats.org/drawingml/2006/main" xmlns:p="http://schemas.openxmlformats.org/presentationml/2006/main" xmlns:r="http://schemas.openxmlformats.org/officeDocument/2006/relationships">
+  <p:cSld>
+    <p:bg>
+      <p:bgPr>
+        <a:solidFill>
+          <a:srgbClr val="FFFFFF"/>
+        </a:solidFill>
+        <a:effectLst/>
+      </p:bgPr>
+    </p:bg>
+    <p:spTree>
+      <p:nvGrpSpPr>
+        <p:cNvPr id="1" name=""/>
+        <p:cNvGrpSpPr/>
+        <p:nvPr/>
+      </p:nvGrpSpPr>
+      <p:grpSpPr/>
+      <p:sp>
+        <p:nvSpPr>
+          <p:cNvPr id="2" name="TextBox 1"/>
+          <p:cNvSpPr txBox="1"/>
+          <p:nvPr/>
+        </p:nvSpPr>
+        <p:spPr>
+          <a:xfrm>
+            <a:off x="548640" y="329184"/>
+            <a:ext cx="11064240" cy="256032"/>
+          </a:xfrm>
+          <a:prstGeom prst="rect">
+            <a:avLst/>
+          </a:prstGeom>
+          <a:noFill/>
+        </p:spPr>
+        <p:txBody>
+          <a:bodyPr wrap="square" lIns="0" rIns="0" tIns="0" bIns="0">
+            <a:noAutofit/>
+          </a:bodyPr>
+          <a:lstStyle/>
+          <a:p>
+            <a:pPr algn="l">
+              <a:lnSpc>
+                <a:spcPct val="112000"/>
+              </a:lnSpc>
+              <a:spcBef>
+                <a:spcPts val="0"/>
+              </a:spcBef>
+              <a:spcAft>
+                <a:spcPts val="700"/>
+              </a:spcAft>
+            </a:pPr>
+            <a:r>
+              <a:rPr sz="1200" b="1">
+                <a:solidFill>
+                  <a:srgbClr val="FF8A00"/>
+                </a:solidFill>
+                <a:latin typeface="Arial"/>
+              </a:rPr>
+              <a:t>AI</a:t>
+            </a:r>
+          </a:p>
+        </p:txBody>
+      </p:sp>
+      <p:sp>
+        <p:nvSpPr>
+          <p:cNvPr id="3" name="TextBox 2"/>
+          <p:cNvSpPr txBox="1"/>
+          <p:nvPr/>
+        </p:nvSpPr>
+        <p:spPr>
+          <a:xfrm>
+            <a:off x="548640" y="777240"/>
+            <a:ext cx="11064240" cy="749808"/>
+          </a:xfrm>
+          <a:prstGeom prst="rect">
+            <a:avLst/>
+          </a:prstGeom>
+          <a:noFill/>
+        </p:spPr>
+        <p:txBody>
+          <a:bodyPr wrap="square" lIns="0" rIns="0" tIns="0" bIns="0">
+            <a:noAutofit/>
+          </a:bodyPr>
+          <a:lstStyle/>
+          <a:p>
+            <a:pPr algn="l">
+              <a:lnSpc>
+                <a:spcPct val="112000"/>
+              </a:lnSpc>
+              <a:spcBef>
+                <a:spcPts val="0"/>
+              </a:spcBef>
+              <a:spcAft>
+                <a:spcPts val="700"/>
+              </a:spcAft>
+            </a:pPr>
+            <a:r>
+              <a:rPr sz="3400" b="1">
+                <a:solidFill>
+                  <a:srgbClr val="1F2328"/>
+                </a:solidFill>
+                <a:latin typeface="Arial"/>
+              </a:rPr>
+              <a:t>AI accelerated. The team verified.</a:t>
+            </a:r>
+          </a:p>
+        </p:txBody>
+      </p:sp>
+      <p:sp>
+        <p:nvSpPr>
+          <p:cNvPr id="4" name="TextBox 3"/>
+          <p:cNvSpPr txBox="1"/>
+          <p:nvPr/>
+        </p:nvSpPr>
+        <p:spPr>
+          <a:xfrm>
+            <a:off x="548640" y="6528816"/>
+            <a:ext cx="9144000" cy="182880"/>
+          </a:xfrm>
+          <a:prstGeom prst="rect">
+            <a:avLst/>
+          </a:prstGeom>
+          <a:noFill/>
+        </p:spPr>
+        <p:txBody>
+          <a:bodyPr wrap="square" lIns="0" rIns="0" tIns="0" bIns="0">
+            <a:noAutofit/>
+          </a:bodyPr>
+          <a:lstStyle/>
+          <a:p>
+            <a:pPr algn="l">
+              <a:lnSpc>
+                <a:spcPct val="112000"/>
+              </a:lnSpc>
+              <a:spcBef>
+                <a:spcPts val="0"/>
+              </a:spcBef>
+              <a:spcAft>
+                <a:spcPts val="700"/>
+              </a:spcAft>
+            </a:pPr>
+            <a:r>
+              <a:rPr sz="1000" b="0">
+                <a:solidFill>
+                  <a:srgbClr val="5B6573"/>
+                </a:solidFill>
+                <a:latin typeface="Arial"/>
+              </a:rPr>
+              <a:t>SQUATCH SPORTS · TEAM 11</a:t>
+            </a:r>
+          </a:p>
+        </p:txBody>
+      </p:sp>
+      <p:sp>
+        <p:nvSpPr>
+          <p:cNvPr id="5" name="TextBox 4"/>
+          <p:cNvSpPr txBox="1"/>
+          <p:nvPr/>
+        </p:nvSpPr>
+        <p:spPr>
+          <a:xfrm>
+            <a:off x="11091672" y="6510528"/>
+            <a:ext cx="521207" cy="201168"/>
+          </a:xfrm>
+          <a:prstGeom prst="rect">
+            <a:avLst/>
+          </a:prstGeom>
+          <a:noFill/>
+        </p:spPr>
+        <p:txBody>
+          <a:bodyPr wrap="square" lIns="0" rIns="0" tIns="0" bIns="0">
+            <a:noAutofit/>
+          </a:bodyPr>
+          <a:lstStyle/>
+          <a:p>
+            <a:pPr algn="r">
+              <a:lnSpc>
+                <a:spcPct val="112000"/>
+              </a:lnSpc>
+              <a:spcBef>
+                <a:spcPts val="0"/>
+              </a:spcBef>
+              <a:spcAft>
+                <a:spcPts val="700"/>
+              </a:spcAft>
+            </a:pPr>
+            <a:r>
+              <a:rPr sz="1000" b="0">
+                <a:solidFill>
+                  <a:srgbClr val="5B6573"/>
+                </a:solidFill>
+                <a:latin typeface="Arial"/>
+              </a:rPr>
+              <a:t>12</a:t>
+            </a:r>
+          </a:p>
+        </p:txBody>
+      </p:sp>
+      <p:sp>
+        <p:nvSpPr>
+          <p:cNvPr id="6" name="Rounded Rectangle 5"/>
+          <p:cNvSpPr/>
+          <p:nvPr/>
+        </p:nvSpPr>
+        <p:spPr>
+          <a:xfrm>
+            <a:off x="548640" y="1920240"/>
+            <a:ext cx="3566160" cy="3136392"/>
+          </a:xfrm>
+          <a:prstGeom prst="roundRect">
+            <a:avLst>
+              <a:gd name="adj" fmla="val 10000"/>
+            </a:avLst>
+          </a:prstGeom>
+          <a:solidFill>
+            <a:srgbClr val="F3F4F6"/>
+          </a:solidFill>
+          <a:ln>
+            <a:noFill/>
+          </a:ln>
+        </p:spPr>
+        <p:style>
+          <a:lnRef idx="1">
+            <a:schemeClr val="accent1"/>
+          </a:lnRef>
+          <a:fillRef idx="3">
+            <a:schemeClr val="accent1"/>
+          </a:fillRef>
+          <a:effectRef idx="2">
+            <a:schemeClr val="accent1"/>
+          </a:effectRef>
+          <a:fontRef idx="minor">
+            <a:schemeClr val="lt1"/>
+          </a:fontRef>
+        </p:style>
+        <p:txBody>
+          <a:bodyPr rtlCol="0" anchor="ctr"/>
+          <a:lstStyle/>
+          <a:p>
+            <a:pPr algn="ctr"/>
+          </a:p>
+        </p:txBody>
+      </p:sp>
+      <p:sp>
+        <p:nvSpPr>
+          <p:cNvPr id="7" name="TextBox 6"/>
+          <p:cNvSpPr txBox="1"/>
+          <p:nvPr/>
+        </p:nvSpPr>
+        <p:spPr>
+          <a:xfrm>
+            <a:off x="822959" y="2240280"/>
+            <a:ext cx="3017520" cy="594360"/>
+          </a:xfrm>
+          <a:prstGeom prst="rect">
+            <a:avLst/>
+          </a:prstGeom>
+          <a:noFill/>
+        </p:spPr>
+        <p:txBody>
+          <a:bodyPr wrap="square" lIns="0" rIns="0" tIns="0" bIns="0">
+            <a:noAutofit/>
+          </a:bodyPr>
+          <a:lstStyle/>
+          <a:p>
+            <a:pPr algn="l">
+              <a:lnSpc>
+                <a:spcPct val="112000"/>
+              </a:lnSpc>
+              <a:spcBef>
+                <a:spcPts val="0"/>
+              </a:spcBef>
+              <a:spcAft>
+                <a:spcPts val="700"/>
+              </a:spcAft>
+            </a:pPr>
+            <a:r>
+              <a:rPr sz="3600" b="1">
+                <a:solidFill>
+                  <a:srgbClr val="FF8A00"/>
+                </a:solidFill>
+                <a:latin typeface="Arial"/>
+              </a:rPr>
+              <a:t>01</a:t>
+            </a:r>
+          </a:p>
+        </p:txBody>
+      </p:sp>
+      <p:sp>
+        <p:nvSpPr>
+          <p:cNvPr id="8" name="TextBox 7"/>
+          <p:cNvSpPr txBox="1"/>
+          <p:nvPr/>
+        </p:nvSpPr>
+        <p:spPr>
+          <a:xfrm>
+            <a:off x="822959" y="3200400"/>
+            <a:ext cx="3017520" cy="603504"/>
+          </a:xfrm>
+          <a:prstGeom prst="rect">
+            <a:avLst/>
+          </a:prstGeom>
+          <a:noFill/>
+        </p:spPr>
+        <p:txBody>
+          <a:bodyPr wrap="square" lIns="0" rIns="0" tIns="0" bIns="0">
+            <a:noAutofit/>
+          </a:bodyPr>
+          <a:lstStyle/>
+          <a:p>
+            <a:pPr algn="l">
+              <a:lnSpc>
+                <a:spcPct val="112000"/>
+              </a:lnSpc>
+              <a:spcBef>
+                <a:spcPts val="0"/>
+              </a:spcBef>
+              <a:spcAft>
+                <a:spcPts val="700"/>
+              </a:spcAft>
+            </a:pPr>
+            <a:r>
+              <a:rPr sz="2400" b="1">
+                <a:solidFill>
+                  <a:srgbClr val="1F2328"/>
+                </a:solidFill>
+                <a:latin typeface="Arial"/>
+              </a:rPr>
+              <a:t>Build faster</a:t>
+            </a:r>
+          </a:p>
+        </p:txBody>
+      </p:sp>
+      <p:sp>
+        <p:nvSpPr>
+          <p:cNvPr id="9" name="TextBox 8"/>
+          <p:cNvSpPr txBox="1"/>
+          <p:nvPr/>
+        </p:nvSpPr>
+        <p:spPr>
+          <a:xfrm>
+            <a:off x="822959" y="4123944"/>
+            <a:ext cx="3017520" cy="640080"/>
+          </a:xfrm>
+          <a:prstGeom prst="rect">
+            <a:avLst/>
+          </a:prstGeom>
+          <a:noFill/>
+        </p:spPr>
+        <p:txBody>
+          <a:bodyPr wrap="square" lIns="0" rIns="0" tIns="0" bIns="0">
+            <a:noAutofit/>
+          </a:bodyPr>
+          <a:lstStyle/>
+          <a:p>
+            <a:pPr algn="l">
+              <a:lnSpc>
+                <a:spcPct val="112000"/>
+              </a:lnSpc>
+              <a:spcBef>
+                <a:spcPts val="0"/>
+              </a:spcBef>
+              <a:spcAft>
+                <a:spcPts val="700"/>
+              </a:spcAft>
+            </a:pPr>
+            <a:r>
+              <a:rPr sz="2000" b="0">
+                <a:solidFill>
+                  <a:srgbClr val="5B6573"/>
+                </a:solidFill>
+                <a:latin typeface="Arial"/>
+              </a:rPr>
+              <a:t>Porting, tests and debugging</a:t>
+            </a:r>
+          </a:p>
+        </p:txBody>
+      </p:sp>
+      <p:sp>
+        <p:nvSpPr>
+          <p:cNvPr id="10" name="Rounded Rectangle 9"/>
+          <p:cNvSpPr/>
+          <p:nvPr/>
+        </p:nvSpPr>
+        <p:spPr>
+          <a:xfrm>
+            <a:off x="4343400" y="1920240"/>
+            <a:ext cx="3566160" cy="3136392"/>
+          </a:xfrm>
+          <a:prstGeom prst="roundRect">
+            <a:avLst>
+              <a:gd name="adj" fmla="val 10000"/>
+            </a:avLst>
+          </a:prstGeom>
+          <a:solidFill>
+            <a:srgbClr val="F3F4F6"/>
+          </a:solidFill>
+          <a:ln>
+            <a:noFill/>
+          </a:ln>
+        </p:spPr>
+        <p:style>
+          <a:lnRef idx="1">
+            <a:schemeClr val="accent1"/>
+          </a:lnRef>
+          <a:fillRef idx="3">
+            <a:schemeClr val="accent1"/>
+          </a:fillRef>
+          <a:effectRef idx="2">
+            <a:schemeClr val="accent1"/>
+          </a:effectRef>
+          <a:fontRef idx="minor">
+            <a:schemeClr val="lt1"/>
+          </a:fontRef>
+        </p:style>
+        <p:txBody>
+          <a:bodyPr rtlCol="0" anchor="ctr"/>
+          <a:lstStyle/>
+          <a:p>
+            <a:pPr algn="ctr"/>
+          </a:p>
+        </p:txBody>
+      </p:sp>
+      <p:sp>
+        <p:nvSpPr>
+          <p:cNvPr id="11" name="TextBox 10"/>
+          <p:cNvSpPr txBox="1"/>
+          <p:nvPr/>
+        </p:nvSpPr>
+        <p:spPr>
+          <a:xfrm>
+            <a:off x="4617720" y="2240280"/>
+            <a:ext cx="3017520" cy="594360"/>
+          </a:xfrm>
+          <a:prstGeom prst="rect">
+            <a:avLst/>
+          </a:prstGeom>
+          <a:noFill/>
+        </p:spPr>
+        <p:txBody>
+          <a:bodyPr wrap="square" lIns="0" rIns="0" tIns="0" bIns="0">
+            <a:noAutofit/>
+          </a:bodyPr>
+          <a:lstStyle/>
+          <a:p>
+            <a:pPr algn="l">
+              <a:lnSpc>
+                <a:spcPct val="112000"/>
+              </a:lnSpc>
+              <a:spcBef>
+                <a:spcPts val="0"/>
+              </a:spcBef>
+              <a:spcAft>
+                <a:spcPts val="700"/>
+              </a:spcAft>
+            </a:pPr>
+            <a:r>
+              <a:rPr sz="3600" b="1">
+                <a:solidFill>
+                  <a:srgbClr val="FF8A00"/>
+                </a:solidFill>
+                <a:latin typeface="Arial"/>
+              </a:rPr>
+              <a:t>02</a:t>
+            </a:r>
+          </a:p>
+        </p:txBody>
+      </p:sp>
+      <p:sp>
+        <p:nvSpPr>
+          <p:cNvPr id="12" name="TextBox 11"/>
+          <p:cNvSpPr txBox="1"/>
+          <p:nvPr/>
+        </p:nvSpPr>
+        <p:spPr>
+          <a:xfrm>
+            <a:off x="4617720" y="3200400"/>
+            <a:ext cx="3017520" cy="603504"/>
+          </a:xfrm>
+          <a:prstGeom prst="rect">
+            <a:avLst/>
+          </a:prstGeom>
+          <a:noFill/>
+        </p:spPr>
+        <p:txBody>
+          <a:bodyPr wrap="square" lIns="0" rIns="0" tIns="0" bIns="0">
+            <a:noAutofit/>
+          </a:bodyPr>
+          <a:lstStyle/>
+          <a:p>
+            <a:pPr algn="l">
+              <a:lnSpc>
+                <a:spcPct val="112000"/>
+              </a:lnSpc>
+              <a:spcBef>
+                <a:spcPts val="0"/>
+              </a:spcBef>
+              <a:spcAft>
+                <a:spcPts val="700"/>
+              </a:spcAft>
+            </a:pPr>
+            <a:r>
+              <a:rPr sz="2400" b="1">
+                <a:solidFill>
+                  <a:srgbClr val="1F2328"/>
+                </a:solidFill>
+                <a:latin typeface="Arial"/>
+              </a:rPr>
+              <a:t>Review carefully</a:t>
+            </a:r>
+          </a:p>
+        </p:txBody>
+      </p:sp>
+      <p:sp>
+        <p:nvSpPr>
+          <p:cNvPr id="13" name="TextBox 12"/>
+          <p:cNvSpPr txBox="1"/>
+          <p:nvPr/>
+        </p:nvSpPr>
+        <p:spPr>
+          <a:xfrm>
+            <a:off x="4617720" y="4123944"/>
+            <a:ext cx="3017520" cy="640080"/>
+          </a:xfrm>
+          <a:prstGeom prst="rect">
+            <a:avLst/>
+          </a:prstGeom>
+          <a:noFill/>
+        </p:spPr>
+        <p:txBody>
+          <a:bodyPr wrap="square" lIns="0" rIns="0" tIns="0" bIns="0">
+            <a:noAutofit/>
+          </a:bodyPr>
+          <a:lstStyle/>
+          <a:p>
+            <a:pPr algn="l">
+              <a:lnSpc>
+                <a:spcPct val="112000"/>
+              </a:lnSpc>
+              <a:spcBef>
+                <a:spcPts val="0"/>
+              </a:spcBef>
+              <a:spcAft>
+                <a:spcPts val="700"/>
+              </a:spcAft>
+            </a:pPr>
+            <a:r>
+              <a:rPr sz="2000" b="0">
+                <a:solidFill>
+                  <a:srgbClr val="5B6573"/>
+                </a:solidFill>
+                <a:latin typeface="Arial"/>
+              </a:rPr>
+              <a:t>Rules, code and UX decisions</a:t>
+            </a:r>
+          </a:p>
+        </p:txBody>
+      </p:sp>
+      <p:sp>
+        <p:nvSpPr>
+          <p:cNvPr id="14" name="Rounded Rectangle 13"/>
+          <p:cNvSpPr/>
+          <p:nvPr/>
+        </p:nvSpPr>
+        <p:spPr>
+          <a:xfrm>
+            <a:off x="8138160" y="1920240"/>
+            <a:ext cx="3566160" cy="3136392"/>
+          </a:xfrm>
+          <a:prstGeom prst="roundRect">
+            <a:avLst>
+              <a:gd name="adj" fmla="val 10000"/>
+            </a:avLst>
+          </a:prstGeom>
+          <a:solidFill>
+            <a:srgbClr val="F3F4F6"/>
+          </a:solidFill>
+          <a:ln>
+            <a:noFill/>
+          </a:ln>
+        </p:spPr>
+        <p:style>
+          <a:lnRef idx="1">
+            <a:schemeClr val="accent1"/>
+          </a:lnRef>
+          <a:fillRef idx="3">
+            <a:schemeClr val="accent1"/>
+          </a:fillRef>
+          <a:effectRef idx="2">
+            <a:schemeClr val="accent1"/>
+          </a:effectRef>
+          <a:fontRef idx="minor">
+            <a:schemeClr val="lt1"/>
+          </a:fontRef>
+        </p:style>
+        <p:txBody>
+          <a:bodyPr rtlCol="0" anchor="ctr"/>
+          <a:lstStyle/>
+          <a:p>
+            <a:pPr algn="ctr"/>
+          </a:p>
+        </p:txBody>
+      </p:sp>
+      <p:sp>
+        <p:nvSpPr>
+          <p:cNvPr id="15" name="TextBox 14"/>
+          <p:cNvSpPr txBox="1"/>
+          <p:nvPr/>
+        </p:nvSpPr>
+        <p:spPr>
+          <a:xfrm>
+            <a:off x="8412480" y="2240280"/>
+            <a:ext cx="3017520" cy="594360"/>
+          </a:xfrm>
+          <a:prstGeom prst="rect">
+            <a:avLst/>
+          </a:prstGeom>
+          <a:noFill/>
+        </p:spPr>
+        <p:txBody>
+          <a:bodyPr wrap="square" lIns="0" rIns="0" tIns="0" bIns="0">
+            <a:noAutofit/>
+          </a:bodyPr>
+          <a:lstStyle/>
+          <a:p>
+            <a:pPr algn="l">
+              <a:lnSpc>
+                <a:spcPct val="112000"/>
+              </a:lnSpc>
+              <a:spcBef>
+                <a:spcPts val="0"/>
+              </a:spcBef>
+              <a:spcAft>
+                <a:spcPts val="700"/>
+              </a:spcAft>
+            </a:pPr>
+            <a:r>
+              <a:rPr sz="3600" b="1">
+                <a:solidFill>
+                  <a:srgbClr val="FF8A00"/>
+                </a:solidFill>
+                <a:latin typeface="Arial"/>
+              </a:rPr>
+              <a:t>03</a:t>
+            </a:r>
+          </a:p>
+        </p:txBody>
+      </p:sp>
+      <p:sp>
+        <p:nvSpPr>
+          <p:cNvPr id="16" name="TextBox 15"/>
+          <p:cNvSpPr txBox="1"/>
+          <p:nvPr/>
+        </p:nvSpPr>
+        <p:spPr>
+          <a:xfrm>
+            <a:off x="8412480" y="3200400"/>
+            <a:ext cx="3017520" cy="603504"/>
+          </a:xfrm>
+          <a:prstGeom prst="rect">
+            <a:avLst/>
+          </a:prstGeom>
+          <a:noFill/>
+        </p:spPr>
+        <p:txBody>
+          <a:bodyPr wrap="square" lIns="0" rIns="0" tIns="0" bIns="0">
+            <a:noAutofit/>
+          </a:bodyPr>
+          <a:lstStyle/>
+          <a:p>
+            <a:pPr algn="l">
+              <a:lnSpc>
+                <a:spcPct val="112000"/>
+              </a:lnSpc>
+              <a:spcBef>
+                <a:spcPts val="0"/>
+              </a:spcBef>
+              <a:spcAft>
+                <a:spcPts val="700"/>
+              </a:spcAft>
+            </a:pPr>
+            <a:r>
+              <a:rPr sz="2400" b="1">
+                <a:solidFill>
+                  <a:srgbClr val="1F2328"/>
+                </a:solidFill>
+                <a:latin typeface="Arial"/>
+              </a:rPr>
+              <a:t>Verify results</a:t>
+            </a:r>
+          </a:p>
+        </p:txBody>
+      </p:sp>
+      <p:sp>
+        <p:nvSpPr>
+          <p:cNvPr id="17" name="TextBox 16"/>
+          <p:cNvSpPr txBox="1"/>
+          <p:nvPr/>
+        </p:nvSpPr>
+        <p:spPr>
+          <a:xfrm>
+            <a:off x="8412480" y="4123944"/>
+            <a:ext cx="3017520" cy="640080"/>
+          </a:xfrm>
+          <a:prstGeom prst="rect">
+            <a:avLst/>
+          </a:prstGeom>
+          <a:noFill/>
+        </p:spPr>
+        <p:txBody>
+          <a:bodyPr wrap="square" lIns="0" rIns="0" tIns="0" bIns="0">
+            <a:noAutofit/>
+          </a:bodyPr>
+          <a:lstStyle/>
+          <a:p>
+            <a:pPr algn="l">
+              <a:lnSpc>
+                <a:spcPct val="112000"/>
+              </a:lnSpc>
+              <a:spcBef>
+                <a:spcPts val="0"/>
+              </a:spcBef>
+              <a:spcAft>
+                <a:spcPts val="700"/>
+              </a:spcAft>
+            </a:pPr>
+            <a:r>
+              <a:rPr sz="2000" b="0">
+                <a:solidFill>
+                  <a:srgbClr val="5B6573"/>
+                </a:solidFill>
+                <a:latin typeface="Arial"/>
+              </a:rPr>
+              <a:t>Automated checks + device tests</a:t>
+            </a:r>
+          </a:p>
+        </p:txBody>
+      </p:sp>
+      <p:sp>
+        <p:nvSpPr>
+          <p:cNvPr id="18" name="TextBox 17"/>
+          <p:cNvSpPr txBox="1"/>
+          <p:nvPr/>
+        </p:nvSpPr>
+        <p:spPr>
+          <a:xfrm>
+            <a:off x="548640" y="5641848"/>
+            <a:ext cx="11064240" cy="420624"/>
+          </a:xfrm>
+          <a:prstGeom prst="rect">
+            <a:avLst/>
+          </a:prstGeom>
+          <a:noFill/>
+        </p:spPr>
+        <p:txBody>
+          <a:bodyPr wrap="square" lIns="0" rIns="0" tIns="0" bIns="0">
+            <a:noAutofit/>
+          </a:bodyPr>
+          <a:lstStyle/>
+          <a:p>
+            <a:pPr algn="ctr">
+              <a:lnSpc>
+                <a:spcPct val="112000"/>
+              </a:lnSpc>
+              <a:spcBef>
+                <a:spcPts val="0"/>
+              </a:spcBef>
+              <a:spcAft>
+                <a:spcPts val="700"/>
+              </a:spcAft>
+            </a:pPr>
+            <a:r>
+              <a:rPr sz="1900" b="0">
+                <a:solidFill>
+                  <a:srgbClr val="5B6573"/>
+                </a:solidFill>
+                <a:latin typeface="Arial"/>
+              </a:rPr>
+              <a:t>Final decisions and deliverables remain our responsibility.</a:t>
+            </a:r>
+          </a:p>
+        </p:txBody>
+      </p:sp>
+    </p:spTree>
+  </p:cSld>
+  <p:clrMapOvr>
+    <a:masterClrMapping/>
+  </p:clrMapOvr>
+</p:sld>
+</file>
+
+<file path=ppt/slides/slide13.xml><?xml version="1.0" encoding="utf-8"?>
+<p:sld xmlns:a="http://schemas.openxmlformats.org/drawingml/2006/main" xmlns:p="http://schemas.openxmlformats.org/presentationml/2006/main" xmlns:r="http://schemas.openxmlformats.org/officeDocument/2006/relationships">
+  <p:cSld>
+    <p:bg>
+      <p:bgPr>
+        <a:solidFill>
+          <a:srgbClr val="FFFFFF"/>
+        </a:solidFill>
+        <a:effectLst/>
+      </p:bgPr>
+    </p:bg>
+    <p:spTree>
+      <p:nvGrpSpPr>
+        <p:cNvPr id="1" name=""/>
+        <p:cNvGrpSpPr/>
+        <p:nvPr/>
+      </p:nvGrpSpPr>
+      <p:grpSpPr/>
+      <p:sp>
+        <p:nvSpPr>
+          <p:cNvPr id="2" name="TextBox 1"/>
+          <p:cNvSpPr txBox="1"/>
+          <p:nvPr/>
+        </p:nvSpPr>
+        <p:spPr>
+          <a:xfrm>
+            <a:off x="548640" y="329184"/>
+            <a:ext cx="11064240" cy="256032"/>
+          </a:xfrm>
+          <a:prstGeom prst="rect">
+            <a:avLst/>
+          </a:prstGeom>
+          <a:noFill/>
+        </p:spPr>
+        <p:txBody>
+          <a:bodyPr wrap="square" lIns="0" rIns="0" tIns="0" bIns="0">
+            <a:noAutofit/>
+          </a:bodyPr>
+          <a:lstStyle/>
+          <a:p>
+            <a:pPr algn="l">
+              <a:lnSpc>
+                <a:spcPct val="112000"/>
+              </a:lnSpc>
+              <a:spcBef>
+                <a:spcPts val="0"/>
+              </a:spcBef>
+              <a:spcAft>
+                <a:spcPts val="700"/>
+              </a:spcAft>
+            </a:pPr>
+            <a:r>
+              <a:rPr sz="1200" b="1">
+                <a:solidFill>
+                  <a:srgbClr val="FF8A00"/>
+                </a:solidFill>
+                <a:latin typeface="Arial"/>
+              </a:rPr>
+              <a:t>ACHIEVEMENTS &amp; CHALLENGES</a:t>
+            </a:r>
+          </a:p>
+        </p:txBody>
+      </p:sp>
+      <p:sp>
+        <p:nvSpPr>
+          <p:cNvPr id="3" name="TextBox 2"/>
+          <p:cNvSpPr txBox="1"/>
+          <p:nvPr/>
+        </p:nvSpPr>
+        <p:spPr>
+          <a:xfrm>
+            <a:off x="548640" y="777240"/>
+            <a:ext cx="11064240" cy="749808"/>
+          </a:xfrm>
+          <a:prstGeom prst="rect">
+            <a:avLst/>
+          </a:prstGeom>
+          <a:noFill/>
+        </p:spPr>
+        <p:txBody>
+          <a:bodyPr wrap="square" lIns="0" rIns="0" tIns="0" bIns="0">
+            <a:noAutofit/>
+          </a:bodyPr>
+          <a:lstStyle/>
+          <a:p>
+            <a:pPr algn="l">
+              <a:lnSpc>
+                <a:spcPct val="112000"/>
+              </a:lnSpc>
+              <a:spcBef>
+                <a:spcPts val="0"/>
+              </a:spcBef>
+              <a:spcAft>
+                <a:spcPts val="700"/>
+              </a:spcAft>
+            </a:pPr>
+            <a:r>
+              <a:rPr sz="3400" b="1">
+                <a:solidFill>
+                  <a:srgbClr val="1F2328"/>
+                </a:solidFill>
+                <a:latin typeface="Arial"/>
+              </a:rPr>
+              <a:t>What we delivered. What we learned.</a:t>
+            </a:r>
+          </a:p>
+        </p:txBody>
+      </p:sp>
+      <p:sp>
+        <p:nvSpPr>
+          <p:cNvPr id="4" name="TextBox 3"/>
+          <p:cNvSpPr txBox="1"/>
+          <p:nvPr/>
+        </p:nvSpPr>
+        <p:spPr>
+          <a:xfrm>
+            <a:off x="548640" y="6528816"/>
+            <a:ext cx="9144000" cy="182880"/>
+          </a:xfrm>
+          <a:prstGeom prst="rect">
+            <a:avLst/>
+          </a:prstGeom>
+          <a:noFill/>
+        </p:spPr>
+        <p:txBody>
+          <a:bodyPr wrap="square" lIns="0" rIns="0" tIns="0" bIns="0">
+            <a:noAutofit/>
+          </a:bodyPr>
+          <a:lstStyle/>
+          <a:p>
+            <a:pPr algn="l">
+              <a:lnSpc>
+                <a:spcPct val="112000"/>
+              </a:lnSpc>
+              <a:spcBef>
+                <a:spcPts val="0"/>
+              </a:spcBef>
+              <a:spcAft>
+                <a:spcPts val="700"/>
+              </a:spcAft>
+            </a:pPr>
+            <a:r>
+              <a:rPr sz="1000" b="0">
+                <a:solidFill>
+                  <a:srgbClr val="5B6573"/>
+                </a:solidFill>
+                <a:latin typeface="Arial"/>
+              </a:rPr>
+              <a:t>SQUATCH SPORTS · TEAM 11</a:t>
+            </a:r>
+          </a:p>
+        </p:txBody>
+      </p:sp>
+      <p:sp>
+        <p:nvSpPr>
+          <p:cNvPr id="5" name="TextBox 4"/>
+          <p:cNvSpPr txBox="1"/>
+          <p:nvPr/>
+        </p:nvSpPr>
+        <p:spPr>
+          <a:xfrm>
+            <a:off x="11091672" y="6510528"/>
+            <a:ext cx="521207" cy="201168"/>
+          </a:xfrm>
+          <a:prstGeom prst="rect">
+            <a:avLst/>
+          </a:prstGeom>
+          <a:noFill/>
+        </p:spPr>
+        <p:txBody>
+          <a:bodyPr wrap="square" lIns="0" rIns="0" tIns="0" bIns="0">
+            <a:noAutofit/>
+          </a:bodyPr>
+          <a:lstStyle/>
+          <a:p>
+            <a:pPr algn="r">
+              <a:lnSpc>
+                <a:spcPct val="112000"/>
+              </a:lnSpc>
+              <a:spcBef>
+                <a:spcPts val="0"/>
+              </a:spcBef>
+              <a:spcAft>
+                <a:spcPts val="700"/>
+              </a:spcAft>
+            </a:pPr>
+            <a:r>
+              <a:rPr sz="1000" b="0">
+                <a:solidFill>
+                  <a:srgbClr val="5B6573"/>
+                </a:solidFill>
+                <a:latin typeface="Arial"/>
+              </a:rPr>
+              <a:t>13</a:t>
+            </a:r>
+          </a:p>
+        </p:txBody>
+      </p:sp>
+      <p:sp>
+        <p:nvSpPr>
+          <p:cNvPr id="6" name="Rounded Rectangle 5"/>
+          <p:cNvSpPr/>
+          <p:nvPr/>
+        </p:nvSpPr>
+        <p:spPr>
+          <a:xfrm>
+            <a:off x="548640" y="1856231"/>
+            <a:ext cx="5394960" cy="4087368"/>
+          </a:xfrm>
+          <a:prstGeom prst="roundRect">
+            <a:avLst>
+              <a:gd name="adj" fmla="val 10000"/>
+            </a:avLst>
+          </a:prstGeom>
+          <a:solidFill>
+            <a:srgbClr val="F3F4F6"/>
+          </a:solidFill>
+          <a:ln>
+            <a:noFill/>
+          </a:ln>
+        </p:spPr>
+        <p:style>
+          <a:lnRef idx="1">
+            <a:schemeClr val="accent1"/>
+          </a:lnRef>
+          <a:fillRef idx="3">
+            <a:schemeClr val="accent1"/>
+          </a:fillRef>
+          <a:effectRef idx="2">
+            <a:schemeClr val="accent1"/>
+          </a:effectRef>
+          <a:fontRef idx="minor">
+            <a:schemeClr val="lt1"/>
+          </a:fontRef>
+        </p:style>
+        <p:txBody>
+          <a:bodyPr rtlCol="0" anchor="ctr"/>
+          <a:lstStyle/>
+          <a:p>
+            <a:pPr algn="ctr"/>
+          </a:p>
+        </p:txBody>
+      </p:sp>
+      <p:sp>
+        <p:nvSpPr>
+          <p:cNvPr id="7" name="TextBox 6"/>
+          <p:cNvSpPr txBox="1"/>
+          <p:nvPr/>
+        </p:nvSpPr>
+        <p:spPr>
+          <a:xfrm>
+            <a:off x="822959" y="2212848"/>
+            <a:ext cx="4846320" cy="493776"/>
+          </a:xfrm>
+          <a:prstGeom prst="rect">
+            <a:avLst/>
+          </a:prstGeom>
+          <a:noFill/>
+        </p:spPr>
+        <p:txBody>
+          <a:bodyPr wrap="square" lIns="0" rIns="0" tIns="0" bIns="0">
+            <a:noAutofit/>
+          </a:bodyPr>
+          <a:lstStyle/>
+          <a:p>
+            <a:pPr algn="l">
+              <a:lnSpc>
+                <a:spcPct val="112000"/>
+              </a:lnSpc>
+              <a:spcBef>
+                <a:spcPts val="0"/>
+              </a:spcBef>
+              <a:spcAft>
+                <a:spcPts val="700"/>
+              </a:spcAft>
+            </a:pPr>
+            <a:r>
+              <a:rPr sz="2700" b="1">
+                <a:solidFill>
+                  <a:srgbClr val="2FA85A"/>
+                </a:solidFill>
+                <a:latin typeface="Arial"/>
+              </a:rPr>
+              <a:t>Delivered</a:t>
+            </a:r>
+          </a:p>
+        </p:txBody>
+      </p:sp>
+      <p:sp>
+        <p:nvSpPr>
+          <p:cNvPr id="8" name="Rectangle 7"/>
+          <p:cNvSpPr/>
+          <p:nvPr/>
+        </p:nvSpPr>
+        <p:spPr>
+          <a:xfrm>
+            <a:off x="822959" y="3255264"/>
+            <a:ext cx="82296" cy="82296"/>
+          </a:xfrm>
+          <a:prstGeom prst="rect">
+            <a:avLst/>
+          </a:prstGeom>
+          <a:solidFill>
+            <a:srgbClr val="FF8A00"/>
+          </a:solidFill>
+          <a:ln>
+            <a:noFill/>
+          </a:ln>
+        </p:spPr>
+        <p:style>
+          <a:lnRef idx="1">
+            <a:schemeClr val="accent1"/>
+          </a:lnRef>
+          <a:fillRef idx="3">
+            <a:schemeClr val="accent1"/>
+          </a:fillRef>
+          <a:effectRef idx="2">
+            <a:schemeClr val="accent1"/>
+          </a:effectRef>
+          <a:fontRef idx="minor">
+            <a:schemeClr val="lt1"/>
+          </a:fontRef>
+        </p:style>
+        <p:txBody>
+          <a:bodyPr rtlCol="0" anchor="ctr"/>
+          <a:lstStyle/>
+          <a:p>
+            <a:pPr algn="ctr"/>
+          </a:p>
+        </p:txBody>
+      </p:sp>
+      <p:sp>
+        <p:nvSpPr>
+          <p:cNvPr id="9" name="TextBox 8"/>
+          <p:cNvSpPr txBox="1"/>
+          <p:nvPr/>
+        </p:nvSpPr>
+        <p:spPr>
+          <a:xfrm>
+            <a:off x="1078992" y="3145536"/>
+            <a:ext cx="4498848" cy="713232"/>
+          </a:xfrm>
+          <a:prstGeom prst="rect">
+            <a:avLst/>
+          </a:prstGeom>
+          <a:noFill/>
+        </p:spPr>
+        <p:txBody>
+          <a:bodyPr wrap="square" lIns="0" rIns="0" tIns="0" bIns="0">
+            <a:noAutofit/>
+          </a:bodyPr>
+          <a:lstStyle/>
+          <a:p>
+            <a:pPr algn="l">
+              <a:lnSpc>
+                <a:spcPct val="112000"/>
+              </a:lnSpc>
+              <a:spcBef>
+                <a:spcPts val="0"/>
+              </a:spcBef>
+              <a:spcAft>
+                <a:spcPts val="700"/>
+              </a:spcAft>
+            </a:pPr>
+            <a:r>
+              <a:rPr sz="2200" b="0">
+                <a:solidFill>
+                  <a:srgbClr val="1F2328"/>
+                </a:solidFill>
+                <a:latin typeface="Arial"/>
+              </a:rPr>
+              <a:t>Aligned major features</a:t>
+            </a:r>
+          </a:p>
+        </p:txBody>
+      </p:sp>
+      <p:sp>
+        <p:nvSpPr>
+          <p:cNvPr id="10" name="Rectangle 9"/>
+          <p:cNvSpPr/>
+          <p:nvPr/>
+        </p:nvSpPr>
+        <p:spPr>
+          <a:xfrm>
+            <a:off x="822959" y="4078224"/>
+            <a:ext cx="82296" cy="82296"/>
+          </a:xfrm>
+          <a:prstGeom prst="rect">
+            <a:avLst/>
+          </a:prstGeom>
+          <a:solidFill>
+            <a:srgbClr val="FF8A00"/>
+          </a:solidFill>
+          <a:ln>
+            <a:noFill/>
+          </a:ln>
+        </p:spPr>
+        <p:style>
+          <a:lnRef idx="1">
+            <a:schemeClr val="accent1"/>
+          </a:lnRef>
+          <a:fillRef idx="3">
+            <a:schemeClr val="accent1"/>
+          </a:fillRef>
+          <a:effectRef idx="2">
+            <a:schemeClr val="accent1"/>
+          </a:effectRef>
+          <a:fontRef idx="minor">
+            <a:schemeClr val="lt1"/>
+          </a:fontRef>
+        </p:style>
+        <p:txBody>
+          <a:bodyPr rtlCol="0" anchor="ctr"/>
+          <a:lstStyle/>
+          <a:p>
+            <a:pPr algn="ctr"/>
+          </a:p>
+        </p:txBody>
+      </p:sp>
+      <p:sp>
+        <p:nvSpPr>
+          <p:cNvPr id="11" name="TextBox 10"/>
+          <p:cNvSpPr txBox="1"/>
+          <p:nvPr/>
+        </p:nvSpPr>
+        <p:spPr>
+          <a:xfrm>
+            <a:off x="1078992" y="3968496"/>
+            <a:ext cx="4498848" cy="713232"/>
+          </a:xfrm>
+          <a:prstGeom prst="rect">
+            <a:avLst/>
+          </a:prstGeom>
+          <a:noFill/>
+        </p:spPr>
+        <p:txBody>
+          <a:bodyPr wrap="square" lIns="0" rIns="0" tIns="0" bIns="0">
+            <a:noAutofit/>
+          </a:bodyPr>
+          <a:lstStyle/>
+          <a:p>
+            <a:pPr algn="l">
+              <a:lnSpc>
+                <a:spcPct val="112000"/>
+              </a:lnSpc>
+              <a:spcBef>
+                <a:spcPts val="0"/>
+              </a:spcBef>
+              <a:spcAft>
+                <a:spcPts val="700"/>
+              </a:spcAft>
+            </a:pPr>
+            <a:r>
+              <a:rPr sz="2200" b="0">
+                <a:solidFill>
+                  <a:srgbClr val="1F2328"/>
+                </a:solidFill>
+                <a:latin typeface="Arial"/>
+              </a:rPr>
+              <a:t>Phone + watch 1v1</a:t>
+            </a:r>
+          </a:p>
+        </p:txBody>
+      </p:sp>
+      <p:sp>
+        <p:nvSpPr>
+          <p:cNvPr id="12" name="Rectangle 11"/>
+          <p:cNvSpPr/>
+          <p:nvPr/>
+        </p:nvSpPr>
+        <p:spPr>
+          <a:xfrm>
+            <a:off x="822959" y="4901184"/>
+            <a:ext cx="82296" cy="82296"/>
+          </a:xfrm>
+          <a:prstGeom prst="rect">
+            <a:avLst/>
+          </a:prstGeom>
+          <a:solidFill>
+            <a:srgbClr val="FF8A00"/>
+          </a:solidFill>
+          <a:ln>
+            <a:noFill/>
+          </a:ln>
+        </p:spPr>
+        <p:style>
+          <a:lnRef idx="1">
+            <a:schemeClr val="accent1"/>
+          </a:lnRef>
+          <a:fillRef idx="3">
+            <a:schemeClr val="accent1"/>
+          </a:fillRef>
+          <a:effectRef idx="2">
+            <a:schemeClr val="accent1"/>
+          </a:effectRef>
+          <a:fontRef idx="minor">
+            <a:schemeClr val="lt1"/>
+          </a:fontRef>
+        </p:style>
+        <p:txBody>
+          <a:bodyPr rtlCol="0" anchor="ctr"/>
+          <a:lstStyle/>
+          <a:p>
+            <a:pPr algn="ctr"/>
+          </a:p>
+        </p:txBody>
+      </p:sp>
+      <p:sp>
+        <p:nvSpPr>
+          <p:cNvPr id="13" name="TextBox 12"/>
+          <p:cNvSpPr txBox="1"/>
+          <p:nvPr/>
+        </p:nvSpPr>
+        <p:spPr>
+          <a:xfrm>
+            <a:off x="1078992" y="4791456"/>
+            <a:ext cx="4498848" cy="713232"/>
+          </a:xfrm>
+          <a:prstGeom prst="rect">
+            <a:avLst/>
+          </a:prstGeom>
+          <a:noFill/>
+        </p:spPr>
+        <p:txBody>
+          <a:bodyPr wrap="square" lIns="0" rIns="0" tIns="0" bIns="0">
+            <a:noAutofit/>
+          </a:bodyPr>
+          <a:lstStyle/>
+          <a:p>
+            <a:pPr algn="l">
+              <a:lnSpc>
+                <a:spcPct val="112000"/>
+              </a:lnSpc>
+              <a:spcBef>
+                <a:spcPts val="0"/>
+              </a:spcBef>
+              <a:spcAft>
+                <a:spcPts val="700"/>
+              </a:spcAft>
+            </a:pPr>
+            <a:r>
+              <a:rPr sz="2200" b="0">
+                <a:solidFill>
+                  <a:srgbClr val="1F2328"/>
+                </a:solidFill>
+                <a:latin typeface="Arial"/>
+              </a:rPr>
+              <a:t>Nearby competition</a:t>
+            </a:r>
+          </a:p>
+        </p:txBody>
+      </p:sp>
+      <p:sp>
+        <p:nvSpPr>
+          <p:cNvPr id="14" name="Rounded Rectangle 13"/>
+          <p:cNvSpPr/>
+          <p:nvPr/>
+        </p:nvSpPr>
+        <p:spPr>
+          <a:xfrm>
+            <a:off x="6217920" y="1856231"/>
+            <a:ext cx="5394960" cy="4087368"/>
+          </a:xfrm>
+          <a:prstGeom prst="roundRect">
+            <a:avLst>
+              <a:gd name="adj" fmla="val 10000"/>
+            </a:avLst>
+          </a:prstGeom>
+          <a:solidFill>
+            <a:srgbClr val="F3F4F6"/>
+          </a:solidFill>
+          <a:ln>
+            <a:noFill/>
+          </a:ln>
+        </p:spPr>
+        <p:style>
+          <a:lnRef idx="1">
+            <a:schemeClr val="accent1"/>
+          </a:lnRef>
+          <a:fillRef idx="3">
+            <a:schemeClr val="accent1"/>
+          </a:fillRef>
+          <a:effectRef idx="2">
+            <a:schemeClr val="accent1"/>
+          </a:effectRef>
+          <a:fontRef idx="minor">
+            <a:schemeClr val="lt1"/>
+          </a:fontRef>
+        </p:style>
+        <p:txBody>
+          <a:bodyPr rtlCol="0" anchor="ctr"/>
+          <a:lstStyle/>
+          <a:p>
+            <a:pPr algn="ctr"/>
+          </a:p>
+        </p:txBody>
+      </p:sp>
+      <p:sp>
+        <p:nvSpPr>
+          <p:cNvPr id="15" name="TextBox 14"/>
+          <p:cNvSpPr txBox="1"/>
+          <p:nvPr/>
+        </p:nvSpPr>
+        <p:spPr>
+          <a:xfrm>
+            <a:off x="6492240" y="2212848"/>
+            <a:ext cx="4846320" cy="493776"/>
+          </a:xfrm>
+          <a:prstGeom prst="rect">
+            <a:avLst/>
+          </a:prstGeom>
+          <a:noFill/>
+        </p:spPr>
+        <p:txBody>
+          <a:bodyPr wrap="square" lIns="0" rIns="0" tIns="0" bIns="0">
+            <a:noAutofit/>
+          </a:bodyPr>
+          <a:lstStyle/>
+          <a:p>
+            <a:pPr algn="l">
+              <a:lnSpc>
+                <a:spcPct val="112000"/>
+              </a:lnSpc>
+              <a:spcBef>
+                <a:spcPts val="0"/>
+              </a:spcBef>
+              <a:spcAft>
+                <a:spcPts val="700"/>
+              </a:spcAft>
+            </a:pPr>
+            <a:r>
+              <a:rPr sz="2700" b="1">
+                <a:solidFill>
+                  <a:srgbClr val="FF8A00"/>
+                </a:solidFill>
+                <a:latin typeface="Arial"/>
+              </a:rPr>
+              <a:t>Learned</a:t>
+            </a:r>
+          </a:p>
+        </p:txBody>
+      </p:sp>
+      <p:sp>
+        <p:nvSpPr>
+          <p:cNvPr id="16" name="Rectangle 15"/>
+          <p:cNvSpPr/>
+          <p:nvPr/>
+        </p:nvSpPr>
+        <p:spPr>
+          <a:xfrm>
+            <a:off x="6492240" y="3255264"/>
+            <a:ext cx="82296" cy="82296"/>
+          </a:xfrm>
+          <a:prstGeom prst="rect">
+            <a:avLst/>
+          </a:prstGeom>
+          <a:solidFill>
+            <a:srgbClr val="FF8A00"/>
+          </a:solidFill>
+          <a:ln>
+            <a:noFill/>
+          </a:ln>
+        </p:spPr>
+        <p:style>
+          <a:lnRef idx="1">
+            <a:schemeClr val="accent1"/>
+          </a:lnRef>
+          <a:fillRef idx="3">
+            <a:schemeClr val="accent1"/>
+          </a:fillRef>
+          <a:effectRef idx="2">
+            <a:schemeClr val="accent1"/>
+          </a:effectRef>
+          <a:fontRef idx="minor">
+            <a:schemeClr val="lt1"/>
+          </a:fontRef>
+        </p:style>
+        <p:txBody>
+          <a:bodyPr rtlCol="0" anchor="ctr"/>
+          <a:lstStyle/>
+          <a:p>
+            <a:pPr algn="ctr"/>
+          </a:p>
+        </p:txBody>
+      </p:sp>
+      <p:sp>
+        <p:nvSpPr>
+          <p:cNvPr id="17" name="TextBox 16"/>
+          <p:cNvSpPr txBox="1"/>
+          <p:nvPr/>
+        </p:nvSpPr>
+        <p:spPr>
+          <a:xfrm>
+            <a:off x="6748272" y="3145536"/>
+            <a:ext cx="4498848" cy="713232"/>
+          </a:xfrm>
+          <a:prstGeom prst="rect">
+            <a:avLst/>
+          </a:prstGeom>
+          <a:noFill/>
+        </p:spPr>
+        <p:txBody>
+          <a:bodyPr wrap="square" lIns="0" rIns="0" tIns="0" bIns="0">
+            <a:noAutofit/>
+          </a:bodyPr>
+          <a:lstStyle/>
+          <a:p>
+            <a:pPr algn="l">
+              <a:lnSpc>
+                <a:spcPct val="112000"/>
+              </a:lnSpc>
+              <a:spcBef>
+                <a:spcPts val="0"/>
+              </a:spcBef>
+              <a:spcAft>
+                <a:spcPts val="700"/>
+              </a:spcAft>
+            </a:pPr>
+            <a:r>
+              <a:rPr sz="2200" b="0">
+                <a:solidFill>
+                  <a:srgbClr val="1F2328"/>
+                </a:solidFill>
+                <a:latin typeface="Arial"/>
+              </a:rPr>
+              <a:t>Order plays in one place</a:t>
+            </a:r>
+          </a:p>
+        </p:txBody>
+      </p:sp>
+      <p:sp>
+        <p:nvSpPr>
+          <p:cNvPr id="18" name="Rectangle 17"/>
+          <p:cNvSpPr/>
+          <p:nvPr/>
+        </p:nvSpPr>
+        <p:spPr>
+          <a:xfrm>
+            <a:off x="6492240" y="4078224"/>
+            <a:ext cx="82296" cy="82296"/>
+          </a:xfrm>
+          <a:prstGeom prst="rect">
+            <a:avLst/>
+          </a:prstGeom>
+          <a:solidFill>
+            <a:srgbClr val="FF8A00"/>
+          </a:solidFill>
+          <a:ln>
+            <a:noFill/>
+          </a:ln>
+        </p:spPr>
+        <p:style>
+          <a:lnRef idx="1">
+            <a:schemeClr val="accent1"/>
+          </a:lnRef>
+          <a:fillRef idx="3">
+            <a:schemeClr val="accent1"/>
+          </a:fillRef>
+          <a:effectRef idx="2">
+            <a:schemeClr val="accent1"/>
+          </a:effectRef>
+          <a:fontRef idx="minor">
+            <a:schemeClr val="lt1"/>
+          </a:fontRef>
+        </p:style>
+        <p:txBody>
+          <a:bodyPr rtlCol="0" anchor="ctr"/>
+          <a:lstStyle/>
+          <a:p>
+            <a:pPr algn="ctr"/>
+          </a:p>
+        </p:txBody>
+      </p:sp>
+      <p:sp>
+        <p:nvSpPr>
+          <p:cNvPr id="19" name="TextBox 18"/>
+          <p:cNvSpPr txBox="1"/>
+          <p:nvPr/>
+        </p:nvSpPr>
+        <p:spPr>
+          <a:xfrm>
+            <a:off x="6748272" y="3968496"/>
+            <a:ext cx="4498848" cy="713232"/>
+          </a:xfrm>
+          <a:prstGeom prst="rect">
+            <a:avLst/>
+          </a:prstGeom>
+          <a:noFill/>
+        </p:spPr>
+        <p:txBody>
+          <a:bodyPr wrap="square" lIns="0" rIns="0" tIns="0" bIns="0">
+            <a:noAutofit/>
+          </a:bodyPr>
+          <a:lstStyle/>
+          <a:p>
+            <a:pPr algn="l">
+              <a:lnSpc>
+                <a:spcPct val="112000"/>
+              </a:lnSpc>
+              <a:spcBef>
+                <a:spcPts val="0"/>
+              </a:spcBef>
+              <a:spcAft>
+                <a:spcPts val="700"/>
+              </a:spcAft>
+            </a:pPr>
+            <a:r>
+              <a:rPr sz="2200" b="0">
+                <a:solidFill>
+                  <a:srgbClr val="1F2328"/>
+                </a:solidFill>
+                <a:latin typeface="Arial"/>
+              </a:rPr>
+              <a:t>Design for round screens</a:t>
+            </a:r>
+          </a:p>
+        </p:txBody>
+      </p:sp>
+      <p:sp>
+        <p:nvSpPr>
+          <p:cNvPr id="20" name="Rectangle 19"/>
+          <p:cNvSpPr/>
+          <p:nvPr/>
+        </p:nvSpPr>
+        <p:spPr>
+          <a:xfrm>
+            <a:off x="6492240" y="4901184"/>
+            <a:ext cx="82296" cy="82296"/>
+          </a:xfrm>
+          <a:prstGeom prst="rect">
+            <a:avLst/>
+          </a:prstGeom>
+          <a:solidFill>
+            <a:srgbClr val="FF8A00"/>
+          </a:solidFill>
+          <a:ln>
+            <a:noFill/>
+          </a:ln>
+        </p:spPr>
+        <p:style>
+          <a:lnRef idx="1">
+            <a:schemeClr val="accent1"/>
+          </a:lnRef>
+          <a:fillRef idx="3">
+            <a:schemeClr val="accent1"/>
+          </a:fillRef>
+          <a:effectRef idx="2">
+            <a:schemeClr val="accent1"/>
+          </a:effectRef>
+          <a:fontRef idx="minor">
+            <a:schemeClr val="lt1"/>
+          </a:fontRef>
+        </p:style>
+        <p:txBody>
+          <a:bodyPr rtlCol="0" anchor="ctr"/>
+          <a:lstStyle/>
+          <a:p>
+            <a:pPr algn="ctr"/>
+          </a:p>
+        </p:txBody>
+      </p:sp>
+      <p:sp>
+        <p:nvSpPr>
+          <p:cNvPr id="21" name="TextBox 20"/>
+          <p:cNvSpPr txBox="1"/>
+          <p:nvPr/>
+        </p:nvSpPr>
+        <p:spPr>
+          <a:xfrm>
+            <a:off x="6748272" y="4791456"/>
+            <a:ext cx="4498848" cy="713232"/>
+          </a:xfrm>
+          <a:prstGeom prst="rect">
+            <a:avLst/>
+          </a:prstGeom>
+          <a:noFill/>
+        </p:spPr>
+        <p:txBody>
+          <a:bodyPr wrap="square" lIns="0" rIns="0" tIns="0" bIns="0">
+            <a:noAutofit/>
+          </a:bodyPr>
+          <a:lstStyle/>
+          <a:p>
+            <a:pPr algn="l">
+              <a:lnSpc>
+                <a:spcPct val="112000"/>
+              </a:lnSpc>
+              <a:spcBef>
+                <a:spcPts val="0"/>
+              </a:spcBef>
+              <a:spcAft>
+                <a:spcPts val="700"/>
+              </a:spcAft>
+            </a:pPr>
+            <a:r>
+              <a:rPr sz="2200" b="0">
+                <a:solidFill>
+                  <a:srgbClr val="1F2328"/>
+                </a:solidFill>
+                <a:latin typeface="Arial"/>
+              </a:rPr>
+              <a:t>Test on hardware earlier</a:t>
+            </a:r>
+          </a:p>
+        </p:txBody>
+      </p:sp>
+    </p:spTree>
+  </p:cSld>
+  <p:clrMapOvr>
+    <a:masterClrMapping/>
+  </p:clrMapOvr>
+</p:sld>
+</file>
+
+<file path=ppt/slides/slide14.xml><?xml version="1.0" encoding="utf-8"?>
+<p:sld xmlns:a="http://schemas.openxmlformats.org/drawingml/2006/main" xmlns:p="http://schemas.openxmlformats.org/presentationml/2006/main" xmlns:r="http://schemas.openxmlformats.org/officeDocument/2006/relationships">
+  <p:cSld>
+    <p:bg>
+      <p:bgPr>
+        <a:solidFill>
+          <a:srgbClr val="FFFFFF"/>
+        </a:solidFill>
+        <a:effectLst/>
+      </p:bgPr>
+    </p:bg>
+    <p:spTree>
+      <p:nvGrpSpPr>
+        <p:cNvPr id="1" name=""/>
+        <p:cNvGrpSpPr/>
+        <p:nvPr/>
+      </p:nvGrpSpPr>
+      <p:grpSpPr/>
+      <p:sp>
+        <p:nvSpPr>
+          <p:cNvPr id="2" name="TextBox 1"/>
+          <p:cNvSpPr txBox="1"/>
+          <p:nvPr/>
+        </p:nvSpPr>
+        <p:spPr>
+          <a:xfrm>
+            <a:off x="548640" y="329184"/>
+            <a:ext cx="11064240" cy="256032"/>
+          </a:xfrm>
+          <a:prstGeom prst="rect">
+            <a:avLst/>
+          </a:prstGeom>
+          <a:noFill/>
+        </p:spPr>
+        <p:txBody>
+          <a:bodyPr wrap="square" lIns="0" rIns="0" tIns="0" bIns="0">
+            <a:noAutofit/>
+          </a:bodyPr>
+          <a:lstStyle/>
+          <a:p>
+            <a:pPr algn="l">
+              <a:lnSpc>
+                <a:spcPct val="112000"/>
+              </a:lnSpc>
+              <a:spcBef>
+                <a:spcPts val="0"/>
+              </a:spcBef>
+              <a:spcAft>
+                <a:spcPts val="700"/>
+              </a:spcAft>
+            </a:pPr>
+            <a:r>
+              <a:rPr sz="1200" b="1">
+                <a:solidFill>
+                  <a:srgbClr val="FF8A00"/>
+                </a:solidFill>
+                <a:latin typeface="Arial"/>
+              </a:rPr>
+              <a:t>NEXT STEPS</a:t>
+            </a:r>
+          </a:p>
+        </p:txBody>
+      </p:sp>
+      <p:sp>
+        <p:nvSpPr>
+          <p:cNvPr id="3" name="TextBox 2"/>
+          <p:cNvSpPr txBox="1"/>
+          <p:nvPr/>
+        </p:nvSpPr>
+        <p:spPr>
+          <a:xfrm>
+            <a:off x="548640" y="777240"/>
+            <a:ext cx="11064240" cy="749808"/>
+          </a:xfrm>
+          <a:prstGeom prst="rect">
+            <a:avLst/>
+          </a:prstGeom>
+          <a:noFill/>
+        </p:spPr>
+        <p:txBody>
+          <a:bodyPr wrap="square" lIns="0" rIns="0" tIns="0" bIns="0">
+            <a:noAutofit/>
+          </a:bodyPr>
+          <a:lstStyle/>
+          <a:p>
+            <a:pPr algn="l">
+              <a:lnSpc>
+                <a:spcPct val="112000"/>
+              </a:lnSpc>
+              <a:spcBef>
+                <a:spcPts val="0"/>
+              </a:spcBef>
+              <a:spcAft>
+                <a:spcPts val="700"/>
+              </a:spcAft>
+            </a:pPr>
+            <a:r>
+              <a:rPr sz="3400" b="1">
+                <a:solidFill>
+                  <a:srgbClr val="1F2328"/>
+                </a:solidFill>
+                <a:latin typeface="Arial"/>
+              </a:rPr>
+              <a:t>Validate. Refine. Hand off.</a:t>
+            </a:r>
+          </a:p>
+        </p:txBody>
+      </p:sp>
+      <p:sp>
+        <p:nvSpPr>
+          <p:cNvPr id="4" name="TextBox 3"/>
+          <p:cNvSpPr txBox="1"/>
+          <p:nvPr/>
+        </p:nvSpPr>
+        <p:spPr>
+          <a:xfrm>
+            <a:off x="548640" y="6528816"/>
+            <a:ext cx="9144000" cy="182880"/>
+          </a:xfrm>
+          <a:prstGeom prst="rect">
+            <a:avLst/>
+          </a:prstGeom>
+          <a:noFill/>
+        </p:spPr>
+        <p:txBody>
+          <a:bodyPr wrap="square" lIns="0" rIns="0" tIns="0" bIns="0">
+            <a:noAutofit/>
+          </a:bodyPr>
+          <a:lstStyle/>
+          <a:p>
+            <a:pPr algn="l">
+              <a:lnSpc>
+                <a:spcPct val="112000"/>
+              </a:lnSpc>
+              <a:spcBef>
+                <a:spcPts val="0"/>
+              </a:spcBef>
+              <a:spcAft>
+                <a:spcPts val="700"/>
+              </a:spcAft>
+            </a:pPr>
+            <a:r>
+              <a:rPr sz="1000" b="0">
+                <a:solidFill>
+                  <a:srgbClr val="5B6573"/>
+                </a:solidFill>
+                <a:latin typeface="Arial"/>
+              </a:rPr>
+              <a:t>SQUATCH SPORTS · TEAM 11</a:t>
+            </a:r>
+          </a:p>
+        </p:txBody>
+      </p:sp>
+      <p:sp>
+        <p:nvSpPr>
+          <p:cNvPr id="5" name="TextBox 4"/>
+          <p:cNvSpPr txBox="1"/>
+          <p:nvPr/>
+        </p:nvSpPr>
+        <p:spPr>
+          <a:xfrm>
+            <a:off x="11091672" y="6510528"/>
+            <a:ext cx="521207" cy="201168"/>
+          </a:xfrm>
+          <a:prstGeom prst="rect">
+            <a:avLst/>
+          </a:prstGeom>
+          <a:noFill/>
+        </p:spPr>
+        <p:txBody>
+          <a:bodyPr wrap="square" lIns="0" rIns="0" tIns="0" bIns="0">
+            <a:noAutofit/>
+          </a:bodyPr>
+          <a:lstStyle/>
+          <a:p>
+            <a:pPr algn="r">
+              <a:lnSpc>
+                <a:spcPct val="112000"/>
+              </a:lnSpc>
+              <a:spcBef>
+                <a:spcPts val="0"/>
+              </a:spcBef>
+              <a:spcAft>
+                <a:spcPts val="700"/>
+              </a:spcAft>
+            </a:pPr>
+            <a:r>
+              <a:rPr sz="1000" b="0">
+                <a:solidFill>
+                  <a:srgbClr val="5B6573"/>
+                </a:solidFill>
+                <a:latin typeface="Arial"/>
+              </a:rPr>
+              <a:t>14</a:t>
             </a:r>
           </a:p>
         </p:txBody>
@@ -3140,7 +6009,7 @@
                           </a:solidFill>
                           <a:latin typeface="Arial"/>
                         </a:rPr>
-                        <a:t>Next task</a:t>
+                        <a:t>Remaining task</a:t>
                       </a:r>
                     </a:p>
                   </a:txBody>
@@ -3202,7 +6071,7 @@
                           </a:solidFill>
                           <a:latin typeface="Arial"/>
                         </a:rPr>
-                        <a:t>#25</a:t>
+                        <a:t>#33</a:t>
                       </a:r>
                     </a:p>
                   </a:txBody>
@@ -3232,7 +6101,7 @@
                           </a:solidFill>
                           <a:latin typeface="Arial"/>
                         </a:rPr>
-                        <a:t>Player / possession rules</a:t>
+                        <a:t>System, integration + player feedback</a:t>
                       </a:r>
                     </a:p>
                   </a:txBody>
@@ -3262,7 +6131,7 @@
                           </a:solidFill>
                           <a:latin typeface="Arial"/>
                         </a:rPr>
-                        <a:t>Kaleb</a:t>
+                        <a:t>Team</a:t>
                       </a:r>
                     </a:p>
                   </a:txBody>
@@ -3294,7 +6163,7 @@
                           </a:solidFill>
                           <a:latin typeface="Arial"/>
                         </a:rPr>
-                        <a:t>#36</a:t>
+                        <a:t>#34</a:t>
                       </a:r>
                     </a:p>
                   </a:txBody>
@@ -3324,191 +6193,7 @@
                           </a:solidFill>
                           <a:latin typeface="Arial"/>
                         </a:rPr>
-                        <a:t>Apple Watch keep-alive</a:t>
-                      </a:r>
-                    </a:p>
-                  </a:txBody>
-                  <a:tcPr marL="164592" marR="109728" marT="91440" marB="64008" anchor="ctr">
-                    <a:solidFill>
-                      <a:srgbClr val="FFFFFF"/>
-                    </a:solidFill>
-                  </a:tcPr>
-                </a:tc>
-                <a:tc>
-                  <a:txBody>
-                    <a:bodyPr/>
-                    <a:lstStyle/>
-                    <a:p>
-                      <a:pPr>
-                        <a:lnSpc>
-                          <a:spcPct val="106000"/>
-                        </a:lnSpc>
-                        <a:spcAft>
-                          <a:spcPts val="0"/>
-                        </a:spcAft>
-                      </a:pPr>
-                      <a:r>
-                        <a:rPr sz="2000" b="0">
-                          <a:solidFill>
-                            <a:srgbClr val="1F2328"/>
-                          </a:solidFill>
-                          <a:latin typeface="Arial"/>
-                        </a:rPr>
-                        <a:t>Kellam</a:t>
-                      </a:r>
-                    </a:p>
-                  </a:txBody>
-                  <a:tcPr marL="164592" marR="109728" marT="91440" marB="64008" anchor="ctr">
-                    <a:solidFill>
-                      <a:srgbClr val="FFFFFF"/>
-                    </a:solidFill>
-                  </a:tcPr>
-                </a:tc>
-              </a:tr>
-              <a:tr h="777240">
-                <a:tc>
-                  <a:txBody>
-                    <a:bodyPr/>
-                    <a:lstStyle/>
-                    <a:p>
-                      <a:pPr>
-                        <a:lnSpc>
-                          <a:spcPct val="106000"/>
-                        </a:lnSpc>
-                        <a:spcAft>
-                          <a:spcPts val="0"/>
-                        </a:spcAft>
-                      </a:pPr>
-                      <a:r>
-                        <a:rPr sz="2000" b="0">
-                          <a:solidFill>
-                            <a:srgbClr val="1F2328"/>
-                          </a:solidFill>
-                          <a:latin typeface="Arial"/>
-                        </a:rPr>
-                        <a:t>#37</a:t>
-                      </a:r>
-                    </a:p>
-                  </a:txBody>
-                  <a:tcPr marL="164592" marR="109728" marT="91440" marB="64008" anchor="ctr">
-                    <a:solidFill>
-                      <a:srgbClr val="F3F4F6"/>
-                    </a:solidFill>
-                  </a:tcPr>
-                </a:tc>
-                <a:tc>
-                  <a:txBody>
-                    <a:bodyPr/>
-                    <a:lstStyle/>
-                    <a:p>
-                      <a:pPr>
-                        <a:lnSpc>
-                          <a:spcPct val="106000"/>
-                        </a:lnSpc>
-                        <a:spcAft>
-                          <a:spcPts val="0"/>
-                        </a:spcAft>
-                      </a:pPr>
-                      <a:r>
-                        <a:rPr sz="2000" b="0">
-                          <a:solidFill>
-                            <a:srgbClr val="1F2328"/>
-                          </a:solidFill>
-                          <a:latin typeface="Arial"/>
-                        </a:rPr>
-                        <a:t>Remove duplicate iCloud files</a:t>
-                      </a:r>
-                    </a:p>
-                  </a:txBody>
-                  <a:tcPr marL="164592" marR="109728" marT="91440" marB="64008" anchor="ctr">
-                    <a:solidFill>
-                      <a:srgbClr val="F3F4F6"/>
-                    </a:solidFill>
-                  </a:tcPr>
-                </a:tc>
-                <a:tc>
-                  <a:txBody>
-                    <a:bodyPr/>
-                    <a:lstStyle/>
-                    <a:p>
-                      <a:pPr>
-                        <a:lnSpc>
-                          <a:spcPct val="106000"/>
-                        </a:lnSpc>
-                        <a:spcAft>
-                          <a:spcPts val="0"/>
-                        </a:spcAft>
-                      </a:pPr>
-                      <a:r>
-                        <a:rPr sz="2000" b="0">
-                          <a:solidFill>
-                            <a:srgbClr val="1F2328"/>
-                          </a:solidFill>
-                          <a:latin typeface="Arial"/>
-                        </a:rPr>
-                        <a:t>Kellam</a:t>
-                      </a:r>
-                    </a:p>
-                  </a:txBody>
-                  <a:tcPr marL="164592" marR="109728" marT="91440" marB="64008" anchor="ctr">
-                    <a:solidFill>
-                      <a:srgbClr val="F3F4F6"/>
-                    </a:solidFill>
-                  </a:tcPr>
-                </a:tc>
-              </a:tr>
-              <a:tr h="777240">
-                <a:tc>
-                  <a:txBody>
-                    <a:bodyPr/>
-                    <a:lstStyle/>
-                    <a:p>
-                      <a:pPr>
-                        <a:lnSpc>
-                          <a:spcPct val="106000"/>
-                        </a:lnSpc>
-                        <a:spcAft>
-                          <a:spcPts val="0"/>
-                        </a:spcAft>
-                      </a:pPr>
-                      <a:r>
-                        <a:rPr sz="2000" b="0">
-                          <a:solidFill>
-                            <a:srgbClr val="1F2328"/>
-                          </a:solidFill>
-                          <a:latin typeface="Arial"/>
-                        </a:rPr>
-                        <a:t>#19</a:t>
-                      </a:r>
-                    </a:p>
-                  </a:txBody>
-                  <a:tcPr marL="164592" marR="109728" marT="91440" marB="64008" anchor="ctr">
-                    <a:solidFill>
-                      <a:srgbClr val="FFFFFF"/>
-                    </a:solidFill>
-                  </a:tcPr>
-                </a:tc>
-                <a:tc>
-                  <a:txBody>
-                    <a:bodyPr/>
-                    <a:lstStyle/>
-                    <a:p>
-                      <a:pPr>
-                        <a:lnSpc>
-                          <a:spcPct val="106000"/>
-                        </a:lnSpc>
-                        <a:spcAft>
-                          <a:spcPts val="0"/>
-                        </a:spcAft>
-                      </a:pPr>
-                      <a:r>
-                        <a:rPr sz="2000" b="0">
-                          <a:solidFill>
-                            <a:srgbClr val="1F2328"/>
-                          </a:solidFill>
-                          <a:latin typeface="Arial"/>
-                        </a:rPr>
-                        <a:t>Fix repeated-shot bug on Apple Watch</a:t>
+                        <a:t>Real devices + TestFlight / Play testing</a:t>
                       </a:r>
                     </a:p>
                   </a:txBody>
@@ -3549,6 +6234,190 @@
                   </a:tcPr>
                 </a:tc>
               </a:tr>
+              <a:tr h="777240">
+                <a:tc>
+                  <a:txBody>
+                    <a:bodyPr/>
+                    <a:lstStyle/>
+                    <a:p>
+                      <a:pPr>
+                        <a:lnSpc>
+                          <a:spcPct val="106000"/>
+                        </a:lnSpc>
+                        <a:spcAft>
+                          <a:spcPts val="0"/>
+                        </a:spcAft>
+                      </a:pPr>
+                      <a:r>
+                        <a:rPr sz="2000" b="0">
+                          <a:solidFill>
+                            <a:srgbClr val="1F2328"/>
+                          </a:solidFill>
+                          <a:latin typeface="Arial"/>
+                        </a:rPr>
+                        <a:t>#35</a:t>
+                      </a:r>
+                    </a:p>
+                  </a:txBody>
+                  <a:tcPr marL="164592" marR="109728" marT="91440" marB="64008" anchor="ctr">
+                    <a:solidFill>
+                      <a:srgbClr val="F3F4F6"/>
+                    </a:solidFill>
+                  </a:tcPr>
+                </a:tc>
+                <a:tc>
+                  <a:txBody>
+                    <a:bodyPr/>
+                    <a:lstStyle/>
+                    <a:p>
+                      <a:pPr>
+                        <a:lnSpc>
+                          <a:spcPct val="106000"/>
+                        </a:lnSpc>
+                        <a:spcAft>
+                          <a:spcPts val="0"/>
+                        </a:spcAft>
+                      </a:pPr>
+                      <a:r>
+                        <a:rPr sz="2000" b="0">
+                          <a:solidFill>
+                            <a:srgbClr val="1F2328"/>
+                          </a:solidFill>
+                          <a:latin typeface="Arial"/>
+                        </a:rPr>
+                        <a:t>Report, MoMs, slides + demo video</a:t>
+                      </a:r>
+                    </a:p>
+                  </a:txBody>
+                  <a:tcPr marL="164592" marR="109728" marT="91440" marB="64008" anchor="ctr">
+                    <a:solidFill>
+                      <a:srgbClr val="F3F4F6"/>
+                    </a:solidFill>
+                  </a:tcPr>
+                </a:tc>
+                <a:tc>
+                  <a:txBody>
+                    <a:bodyPr/>
+                    <a:lstStyle/>
+                    <a:p>
+                      <a:pPr>
+                        <a:lnSpc>
+                          <a:spcPct val="106000"/>
+                        </a:lnSpc>
+                        <a:spcAft>
+                          <a:spcPts val="0"/>
+                        </a:spcAft>
+                      </a:pPr>
+                      <a:r>
+                        <a:rPr sz="2000" b="0">
+                          <a:solidFill>
+                            <a:srgbClr val="1F2328"/>
+                          </a:solidFill>
+                          <a:latin typeface="Arial"/>
+                        </a:rPr>
+                        <a:t>Melvin / team</a:t>
+                      </a:r>
+                    </a:p>
+                  </a:txBody>
+                  <a:tcPr marL="164592" marR="109728" marT="91440" marB="64008" anchor="ctr">
+                    <a:solidFill>
+                      <a:srgbClr val="F3F4F6"/>
+                    </a:solidFill>
+                  </a:tcPr>
+                </a:tc>
+              </a:tr>
+              <a:tr h="777240">
+                <a:tc>
+                  <a:txBody>
+                    <a:bodyPr/>
+                    <a:lstStyle/>
+                    <a:p>
+                      <a:pPr>
+                        <a:lnSpc>
+                          <a:spcPct val="106000"/>
+                        </a:lnSpc>
+                        <a:spcAft>
+                          <a:spcPts val="0"/>
+                        </a:spcAft>
+                      </a:pPr>
+                      <a:r>
+                        <a:rPr sz="2000" b="0">
+                          <a:solidFill>
+                            <a:srgbClr val="1F2328"/>
+                          </a:solidFill>
+                          <a:latin typeface="Arial"/>
+                        </a:rPr>
+                        <a:t>#31</a:t>
+                      </a:r>
+                    </a:p>
+                  </a:txBody>
+                  <a:tcPr marL="164592" marR="109728" marT="91440" marB="64008" anchor="ctr">
+                    <a:solidFill>
+                      <a:srgbClr val="FFFFFF"/>
+                    </a:solidFill>
+                  </a:tcPr>
+                </a:tc>
+                <a:tc>
+                  <a:txBody>
+                    <a:bodyPr/>
+                    <a:lstStyle/>
+                    <a:p>
+                      <a:pPr>
+                        <a:lnSpc>
+                          <a:spcPct val="106000"/>
+                        </a:lnSpc>
+                        <a:spcAft>
+                          <a:spcPts val="0"/>
+                        </a:spcAft>
+                      </a:pPr>
+                      <a:r>
+                        <a:rPr sz="2000" b="0">
+                          <a:solidFill>
+                            <a:srgbClr val="1F2328"/>
+                          </a:solidFill>
+                          <a:latin typeface="Arial"/>
+                        </a:rPr>
+                        <a:t>Reconcile nearby follow-up ticket</a:t>
+                      </a:r>
+                    </a:p>
+                  </a:txBody>
+                  <a:tcPr marL="164592" marR="109728" marT="91440" marB="64008" anchor="ctr">
+                    <a:solidFill>
+                      <a:srgbClr val="FFFFFF"/>
+                    </a:solidFill>
+                  </a:tcPr>
+                </a:tc>
+                <a:tc>
+                  <a:txBody>
+                    <a:bodyPr/>
+                    <a:lstStyle/>
+                    <a:p>
+                      <a:pPr>
+                        <a:lnSpc>
+                          <a:spcPct val="106000"/>
+                        </a:lnSpc>
+                        <a:spcAft>
+                          <a:spcPts val="0"/>
+                        </a:spcAft>
+                      </a:pPr>
+                      <a:r>
+                        <a:rPr sz="2000" b="0">
+                          <a:solidFill>
+                            <a:srgbClr val="1F2328"/>
+                          </a:solidFill>
+                          <a:latin typeface="Arial"/>
+                        </a:rPr>
+                        <a:t>Kaleb</a:t>
+                      </a:r>
+                    </a:p>
+                  </a:txBody>
+                  <a:tcPr marL="164592" marR="109728" marT="91440" marB="64008" anchor="ctr">
+                    <a:solidFill>
+                      <a:srgbClr val="FFFFFF"/>
+                    </a:solidFill>
+                  </a:tcPr>
+                </a:tc>
+              </a:tr>
             </a:tbl>
           </a:graphicData>
         </a:graphic>
@@ -3593,2979 +6462,7 @@
                 </a:solidFill>
                 <a:latin typeface="Arial"/>
               </a:rPr>
-              <a:t>Also tracked: Android / Wear OS UI and regression polish (#20).</a:t>
-            </a:r>
-          </a:p>
-        </p:txBody>
-      </p:sp>
-    </p:spTree>
-  </p:cSld>
-  <p:clrMapOvr>
-    <a:masterClrMapping/>
-  </p:clrMapOvr>
-</p:sld>
-</file>
-
-<file path=ppt/slides/slide11.xml><?xml version="1.0" encoding="utf-8"?>
-<p:sld xmlns:a="http://schemas.openxmlformats.org/drawingml/2006/main" xmlns:p="http://schemas.openxmlformats.org/presentationml/2006/main" xmlns:r="http://schemas.openxmlformats.org/officeDocument/2006/relationships">
-  <p:cSld>
-    <p:bg>
-      <p:bgPr>
-        <a:solidFill>
-          <a:srgbClr val="FFFFFF"/>
-        </a:solidFill>
-        <a:effectLst/>
-      </p:bgPr>
-    </p:bg>
-    <p:spTree>
-      <p:nvGrpSpPr>
-        <p:cNvPr id="1" name=""/>
-        <p:cNvGrpSpPr/>
-        <p:nvPr/>
-      </p:nvGrpSpPr>
-      <p:grpSpPr/>
-      <p:sp>
-        <p:nvSpPr>
-          <p:cNvPr id="2" name="TextBox 1"/>
-          <p:cNvSpPr txBox="1"/>
-          <p:nvPr/>
-        </p:nvSpPr>
-        <p:spPr>
-          <a:xfrm>
-            <a:off x="548640" y="329184"/>
-            <a:ext cx="11064240" cy="256032"/>
-          </a:xfrm>
-          <a:prstGeom prst="rect">
-            <a:avLst/>
-          </a:prstGeom>
-          <a:noFill/>
-        </p:spPr>
-        <p:txBody>
-          <a:bodyPr wrap="square" lIns="0" rIns="0" tIns="0" bIns="0">
-            <a:noAutofit/>
-          </a:bodyPr>
-          <a:lstStyle/>
-          <a:p>
-            <a:pPr algn="l">
-              <a:lnSpc>
-                <a:spcPct val="112000"/>
-              </a:lnSpc>
-              <a:spcBef>
-                <a:spcPts val="0"/>
-              </a:spcBef>
-              <a:spcAft>
-                <a:spcPts val="700"/>
-              </a:spcAft>
-            </a:pPr>
-            <a:r>
-              <a:rPr sz="1200" b="1">
-                <a:solidFill>
-                  <a:srgbClr val="FF8A00"/>
-                </a:solidFill>
-                <a:latin typeface="Arial"/>
-              </a:rPr>
-              <a:t>CLIENT MEETINGS</a:t>
-            </a:r>
-          </a:p>
-        </p:txBody>
-      </p:sp>
-      <p:sp>
-        <p:nvSpPr>
-          <p:cNvPr id="3" name="TextBox 2"/>
-          <p:cNvSpPr txBox="1"/>
-          <p:nvPr/>
-        </p:nvSpPr>
-        <p:spPr>
-          <a:xfrm>
-            <a:off x="548640" y="777240"/>
-            <a:ext cx="11064240" cy="749808"/>
-          </a:xfrm>
-          <a:prstGeom prst="rect">
-            <a:avLst/>
-          </a:prstGeom>
-          <a:noFill/>
-        </p:spPr>
-        <p:txBody>
-          <a:bodyPr wrap="square" lIns="0" rIns="0" tIns="0" bIns="0">
-            <a:noAutofit/>
-          </a:bodyPr>
-          <a:lstStyle/>
-          <a:p>
-            <a:pPr algn="l">
-              <a:lnSpc>
-                <a:spcPct val="112000"/>
-              </a:lnSpc>
-              <a:spcBef>
-                <a:spcPts val="0"/>
-              </a:spcBef>
-              <a:spcAft>
-                <a:spcPts val="700"/>
-              </a:spcAft>
-            </a:pPr>
-            <a:r>
-              <a:rPr sz="3400" b="1">
-                <a:solidFill>
-                  <a:srgbClr val="1F2328"/>
-                </a:solidFill>
-                <a:latin typeface="Arial"/>
-              </a:rPr>
-              <a:t>Feedback shaped the feature</a:t>
-            </a:r>
-          </a:p>
-        </p:txBody>
-      </p:sp>
-      <p:sp>
-        <p:nvSpPr>
-          <p:cNvPr id="4" name="TextBox 3"/>
-          <p:cNvSpPr txBox="1"/>
-          <p:nvPr/>
-        </p:nvSpPr>
-        <p:spPr>
-          <a:xfrm>
-            <a:off x="548640" y="6528816"/>
-            <a:ext cx="9144000" cy="182880"/>
-          </a:xfrm>
-          <a:prstGeom prst="rect">
-            <a:avLst/>
-          </a:prstGeom>
-          <a:noFill/>
-        </p:spPr>
-        <p:txBody>
-          <a:bodyPr wrap="square" lIns="0" rIns="0" tIns="0" bIns="0">
-            <a:noAutofit/>
-          </a:bodyPr>
-          <a:lstStyle/>
-          <a:p>
-            <a:pPr algn="l">
-              <a:lnSpc>
-                <a:spcPct val="112000"/>
-              </a:lnSpc>
-              <a:spcBef>
-                <a:spcPts val="0"/>
-              </a:spcBef>
-              <a:spcAft>
-                <a:spcPts val="700"/>
-              </a:spcAft>
-            </a:pPr>
-            <a:r>
-              <a:rPr sz="1000" b="0">
-                <a:solidFill>
-                  <a:srgbClr val="5B6573"/>
-                </a:solidFill>
-                <a:latin typeface="Arial"/>
-              </a:rPr>
-              <a:t>SQUATCH SPORTS · TEAM 11</a:t>
-            </a:r>
-          </a:p>
-        </p:txBody>
-      </p:sp>
-      <p:sp>
-        <p:nvSpPr>
-          <p:cNvPr id="5" name="TextBox 4"/>
-          <p:cNvSpPr txBox="1"/>
-          <p:nvPr/>
-        </p:nvSpPr>
-        <p:spPr>
-          <a:xfrm>
-            <a:off x="11091672" y="6510528"/>
-            <a:ext cx="521207" cy="201168"/>
-          </a:xfrm>
-          <a:prstGeom prst="rect">
-            <a:avLst/>
-          </a:prstGeom>
-          <a:noFill/>
-        </p:spPr>
-        <p:txBody>
-          <a:bodyPr wrap="square" lIns="0" rIns="0" tIns="0" bIns="0">
-            <a:noAutofit/>
-          </a:bodyPr>
-          <a:lstStyle/>
-          <a:p>
-            <a:pPr algn="r">
-              <a:lnSpc>
-                <a:spcPct val="112000"/>
-              </a:lnSpc>
-              <a:spcBef>
-                <a:spcPts val="0"/>
-              </a:spcBef>
-              <a:spcAft>
-                <a:spcPts val="700"/>
-              </a:spcAft>
-            </a:pPr>
-            <a:r>
-              <a:rPr sz="1000" b="0">
-                <a:solidFill>
-                  <a:srgbClr val="5B6573"/>
-                </a:solidFill>
-                <a:latin typeface="Arial"/>
-              </a:rPr>
-              <a:t>11</a:t>
-            </a:r>
-          </a:p>
-        </p:txBody>
-      </p:sp>
-      <p:sp>
-        <p:nvSpPr>
-          <p:cNvPr id="6" name="Rounded Rectangle 5"/>
-          <p:cNvSpPr/>
-          <p:nvPr/>
-        </p:nvSpPr>
-        <p:spPr>
-          <a:xfrm>
-            <a:off x="548640" y="1938528"/>
-            <a:ext cx="5394960" cy="2761488"/>
-          </a:xfrm>
-          <a:prstGeom prst="roundRect">
-            <a:avLst>
-              <a:gd name="adj" fmla="val 10000"/>
-            </a:avLst>
-          </a:prstGeom>
-          <a:solidFill>
-            <a:srgbClr val="F3F4F6"/>
-          </a:solidFill>
-          <a:ln>
-            <a:noFill/>
-          </a:ln>
-        </p:spPr>
-        <p:style>
-          <a:lnRef idx="1">
-            <a:schemeClr val="accent1"/>
-          </a:lnRef>
-          <a:fillRef idx="3">
-            <a:schemeClr val="accent1"/>
-          </a:fillRef>
-          <a:effectRef idx="2">
-            <a:schemeClr val="accent1"/>
-          </a:effectRef>
-          <a:fontRef idx="minor">
-            <a:schemeClr val="lt1"/>
-          </a:fontRef>
-        </p:style>
-        <p:txBody>
-          <a:bodyPr rtlCol="0" anchor="ctr"/>
-          <a:lstStyle/>
-          <a:p>
-            <a:pPr algn="ctr"/>
-          </a:p>
-        </p:txBody>
-      </p:sp>
-      <p:sp>
-        <p:nvSpPr>
-          <p:cNvPr id="7" name="TextBox 6"/>
-          <p:cNvSpPr txBox="1"/>
-          <p:nvPr/>
-        </p:nvSpPr>
-        <p:spPr>
-          <a:xfrm>
-            <a:off x="822959" y="2267712"/>
-            <a:ext cx="4846320" cy="329184"/>
-          </a:xfrm>
-          <a:prstGeom prst="rect">
-            <a:avLst/>
-          </a:prstGeom>
-          <a:noFill/>
-        </p:spPr>
-        <p:txBody>
-          <a:bodyPr wrap="square" lIns="0" rIns="0" tIns="0" bIns="0">
-            <a:noAutofit/>
-          </a:bodyPr>
-          <a:lstStyle/>
-          <a:p>
-            <a:pPr algn="l">
-              <a:lnSpc>
-                <a:spcPct val="112000"/>
-              </a:lnSpc>
-              <a:spcBef>
-                <a:spcPts val="0"/>
-              </a:spcBef>
-              <a:spcAft>
-                <a:spcPts val="700"/>
-              </a:spcAft>
-            </a:pPr>
-            <a:r>
-              <a:rPr sz="1500" b="1">
-                <a:solidFill>
-                  <a:srgbClr val="FF8A00"/>
-                </a:solidFill>
-                <a:latin typeface="Arial"/>
-              </a:rPr>
-              <a:t>SEPTEMBER 30</a:t>
-            </a:r>
-          </a:p>
-        </p:txBody>
-      </p:sp>
-      <p:sp>
-        <p:nvSpPr>
-          <p:cNvPr id="8" name="TextBox 7"/>
-          <p:cNvSpPr txBox="1"/>
-          <p:nvPr/>
-        </p:nvSpPr>
-        <p:spPr>
-          <a:xfrm>
-            <a:off x="822959" y="2889504"/>
-            <a:ext cx="4846320" cy="521207"/>
-          </a:xfrm>
-          <a:prstGeom prst="rect">
-            <a:avLst/>
-          </a:prstGeom>
-          <a:noFill/>
-        </p:spPr>
-        <p:txBody>
-          <a:bodyPr wrap="square" lIns="0" rIns="0" tIns="0" bIns="0">
-            <a:noAutofit/>
-          </a:bodyPr>
-          <a:lstStyle/>
-          <a:p>
-            <a:pPr algn="l">
-              <a:lnSpc>
-                <a:spcPct val="112000"/>
-              </a:lnSpc>
-              <a:spcBef>
-                <a:spcPts val="0"/>
-              </a:spcBef>
-              <a:spcAft>
-                <a:spcPts val="700"/>
-              </a:spcAft>
-            </a:pPr>
-            <a:r>
-              <a:rPr sz="2700" b="1">
-                <a:solidFill>
-                  <a:srgbClr val="1F2328"/>
-                </a:solidFill>
-                <a:latin typeface="Arial"/>
-              </a:rPr>
-              <a:t>Align the platforms</a:t>
-            </a:r>
-          </a:p>
-        </p:txBody>
-      </p:sp>
-      <p:sp>
-        <p:nvSpPr>
-          <p:cNvPr id="9" name="TextBox 8"/>
-          <p:cNvSpPr txBox="1"/>
-          <p:nvPr/>
-        </p:nvSpPr>
-        <p:spPr>
-          <a:xfrm>
-            <a:off x="822959" y="3758184"/>
-            <a:ext cx="4846320" cy="640080"/>
-          </a:xfrm>
-          <a:prstGeom prst="rect">
-            <a:avLst/>
-          </a:prstGeom>
-          <a:noFill/>
-        </p:spPr>
-        <p:txBody>
-          <a:bodyPr wrap="square" lIns="0" rIns="0" tIns="0" bIns="0">
-            <a:noAutofit/>
-          </a:bodyPr>
-          <a:lstStyle/>
-          <a:p>
-            <a:pPr algn="l">
-              <a:lnSpc>
-                <a:spcPct val="112000"/>
-              </a:lnSpc>
-              <a:spcBef>
-                <a:spcPts val="0"/>
-              </a:spcBef>
-              <a:spcAft>
-                <a:spcPts val="700"/>
-              </a:spcAft>
-            </a:pPr>
-            <a:r>
-              <a:rPr sz="2000" b="0">
-                <a:solidFill>
-                  <a:srgbClr val="5B6573"/>
-                </a:solidFill>
-                <a:latin typeface="Arial"/>
-              </a:rPr>
-              <a:t>Gamification parity + a new 1v1 mode.</a:t>
-            </a:r>
-          </a:p>
-        </p:txBody>
-      </p:sp>
-      <p:sp>
-        <p:nvSpPr>
-          <p:cNvPr id="10" name="Rounded Rectangle 9"/>
-          <p:cNvSpPr/>
-          <p:nvPr/>
-        </p:nvSpPr>
-        <p:spPr>
-          <a:xfrm>
-            <a:off x="6217920" y="1938528"/>
-            <a:ext cx="5394960" cy="2761488"/>
-          </a:xfrm>
-          <a:prstGeom prst="roundRect">
-            <a:avLst>
-              <a:gd name="adj" fmla="val 10000"/>
-            </a:avLst>
-          </a:prstGeom>
-          <a:solidFill>
-            <a:srgbClr val="F3F4F6"/>
-          </a:solidFill>
-          <a:ln>
-            <a:noFill/>
-          </a:ln>
-        </p:spPr>
-        <p:style>
-          <a:lnRef idx="1">
-            <a:schemeClr val="accent1"/>
-          </a:lnRef>
-          <a:fillRef idx="3">
-            <a:schemeClr val="accent1"/>
-          </a:fillRef>
-          <a:effectRef idx="2">
-            <a:schemeClr val="accent1"/>
-          </a:effectRef>
-          <a:fontRef idx="minor">
-            <a:schemeClr val="lt1"/>
-          </a:fontRef>
-        </p:style>
-        <p:txBody>
-          <a:bodyPr rtlCol="0" anchor="ctr"/>
-          <a:lstStyle/>
-          <a:p>
-            <a:pPr algn="ctr"/>
-          </a:p>
-        </p:txBody>
-      </p:sp>
-      <p:sp>
-        <p:nvSpPr>
-          <p:cNvPr id="11" name="TextBox 10"/>
-          <p:cNvSpPr txBox="1"/>
-          <p:nvPr/>
-        </p:nvSpPr>
-        <p:spPr>
-          <a:xfrm>
-            <a:off x="6492240" y="2267712"/>
-            <a:ext cx="4846320" cy="329184"/>
-          </a:xfrm>
-          <a:prstGeom prst="rect">
-            <a:avLst/>
-          </a:prstGeom>
-          <a:noFill/>
-        </p:spPr>
-        <p:txBody>
-          <a:bodyPr wrap="square" lIns="0" rIns="0" tIns="0" bIns="0">
-            <a:noAutofit/>
-          </a:bodyPr>
-          <a:lstStyle/>
-          <a:p>
-            <a:pPr algn="l">
-              <a:lnSpc>
-                <a:spcPct val="112000"/>
-              </a:lnSpc>
-              <a:spcBef>
-                <a:spcPts val="0"/>
-              </a:spcBef>
-              <a:spcAft>
-                <a:spcPts val="700"/>
-              </a:spcAft>
-            </a:pPr>
-            <a:r>
-              <a:rPr sz="1500" b="1">
-                <a:solidFill>
-                  <a:srgbClr val="FF8A00"/>
-                </a:solidFill>
-                <a:latin typeface="Arial"/>
-              </a:rPr>
-              <a:t>OCTOBER 14</a:t>
-            </a:r>
-          </a:p>
-        </p:txBody>
-      </p:sp>
-      <p:sp>
-        <p:nvSpPr>
-          <p:cNvPr id="12" name="TextBox 11"/>
-          <p:cNvSpPr txBox="1"/>
-          <p:nvPr/>
-        </p:nvSpPr>
-        <p:spPr>
-          <a:xfrm>
-            <a:off x="6492240" y="2889504"/>
-            <a:ext cx="4846320" cy="521207"/>
-          </a:xfrm>
-          <a:prstGeom prst="rect">
-            <a:avLst/>
-          </a:prstGeom>
-          <a:noFill/>
-        </p:spPr>
-        <p:txBody>
-          <a:bodyPr wrap="square" lIns="0" rIns="0" tIns="0" bIns="0">
-            <a:noAutofit/>
-          </a:bodyPr>
-          <a:lstStyle/>
-          <a:p>
-            <a:pPr algn="l">
-              <a:lnSpc>
-                <a:spcPct val="112000"/>
-              </a:lnSpc>
-              <a:spcBef>
-                <a:spcPts val="0"/>
-              </a:spcBef>
-              <a:spcAft>
-                <a:spcPts val="700"/>
-              </a:spcAft>
-            </a:pPr>
-            <a:r>
-              <a:rPr sz="2700" b="1">
-                <a:solidFill>
-                  <a:srgbClr val="1F2328"/>
-                </a:solidFill>
-                <a:latin typeface="Arial"/>
-              </a:rPr>
-              <a:t>Make it watch-first</a:t>
-            </a:r>
-          </a:p>
-        </p:txBody>
-      </p:sp>
-      <p:sp>
-        <p:nvSpPr>
-          <p:cNvPr id="13" name="TextBox 12"/>
-          <p:cNvSpPr txBox="1"/>
-          <p:nvPr/>
-        </p:nvSpPr>
-        <p:spPr>
-          <a:xfrm>
-            <a:off x="6492240" y="3758184"/>
-            <a:ext cx="4846320" cy="640080"/>
-          </a:xfrm>
-          <a:prstGeom prst="rect">
-            <a:avLst/>
-          </a:prstGeom>
-          <a:noFill/>
-        </p:spPr>
-        <p:txBody>
-          <a:bodyPr wrap="square" lIns="0" rIns="0" tIns="0" bIns="0">
-            <a:noAutofit/>
-          </a:bodyPr>
-          <a:lstStyle/>
-          <a:p>
-            <a:pPr algn="l">
-              <a:lnSpc>
-                <a:spcPct val="112000"/>
-              </a:lnSpc>
-              <a:spcBef>
-                <a:spcPts val="0"/>
-              </a:spcBef>
-              <a:spcAft>
-                <a:spcPts val="700"/>
-              </a:spcAft>
-            </a:pPr>
-            <a:r>
-              <a:rPr sz="2000" b="0">
-                <a:solidFill>
-                  <a:srgbClr val="5B6573"/>
-                </a:solidFill>
-                <a:latin typeface="Arial"/>
-              </a:rPr>
-              <a:t>Keep the court. Let each player use a phone.</a:t>
-            </a:r>
-          </a:p>
-        </p:txBody>
-      </p:sp>
-      <p:sp>
-        <p:nvSpPr>
-          <p:cNvPr id="14" name="TextBox 13"/>
-          <p:cNvSpPr txBox="1"/>
-          <p:nvPr/>
-        </p:nvSpPr>
-        <p:spPr>
-          <a:xfrm>
-            <a:off x="548640" y="5650992"/>
-            <a:ext cx="11064240" cy="384048"/>
-          </a:xfrm>
-          <a:prstGeom prst="rect">
-            <a:avLst/>
-          </a:prstGeom>
-          <a:noFill/>
-        </p:spPr>
-        <p:txBody>
-          <a:bodyPr wrap="square" lIns="0" rIns="0" tIns="0" bIns="0">
-            <a:noAutofit/>
-          </a:bodyPr>
-          <a:lstStyle/>
-          <a:p>
-            <a:pPr algn="l">
-              <a:lnSpc>
-                <a:spcPct val="112000"/>
-              </a:lnSpc>
-              <a:spcBef>
-                <a:spcPts val="0"/>
-              </a:spcBef>
-              <a:spcAft>
-                <a:spcPts val="700"/>
-              </a:spcAft>
-            </a:pPr>
-            <a:r>
-              <a:rPr sz="1700" b="0">
-                <a:solidFill>
-                  <a:srgbClr val="5B6573"/>
-                </a:solidFill>
-                <a:latin typeface="Arial"/>
-              </a:rPr>
-              <a:t>October 28 meeting cancelled.</a:t>
-            </a:r>
-          </a:p>
-        </p:txBody>
-      </p:sp>
-    </p:spTree>
-  </p:cSld>
-  <p:clrMapOvr>
-    <a:masterClrMapping/>
-  </p:clrMapOvr>
-</p:sld>
-</file>
-
-<file path=ppt/slides/slide12.xml><?xml version="1.0" encoding="utf-8"?>
-<p:sld xmlns:a="http://schemas.openxmlformats.org/drawingml/2006/main" xmlns:p="http://schemas.openxmlformats.org/presentationml/2006/main" xmlns:r="http://schemas.openxmlformats.org/officeDocument/2006/relationships">
-  <p:cSld>
-    <p:bg>
-      <p:bgPr>
-        <a:solidFill>
-          <a:srgbClr val="FFFFFF"/>
-        </a:solidFill>
-        <a:effectLst/>
-      </p:bgPr>
-    </p:bg>
-    <p:spTree>
-      <p:nvGrpSpPr>
-        <p:cNvPr id="1" name=""/>
-        <p:cNvGrpSpPr/>
-        <p:nvPr/>
-      </p:nvGrpSpPr>
-      <p:grpSpPr/>
-      <p:sp>
-        <p:nvSpPr>
-          <p:cNvPr id="2" name="TextBox 1"/>
-          <p:cNvSpPr txBox="1"/>
-          <p:nvPr/>
-        </p:nvSpPr>
-        <p:spPr>
-          <a:xfrm>
-            <a:off x="548640" y="329184"/>
-            <a:ext cx="11064240" cy="256032"/>
-          </a:xfrm>
-          <a:prstGeom prst="rect">
-            <a:avLst/>
-          </a:prstGeom>
-          <a:noFill/>
-        </p:spPr>
-        <p:txBody>
-          <a:bodyPr wrap="square" lIns="0" rIns="0" tIns="0" bIns="0">
-            <a:noAutofit/>
-          </a:bodyPr>
-          <a:lstStyle/>
-          <a:p>
-            <a:pPr algn="l">
-              <a:lnSpc>
-                <a:spcPct val="112000"/>
-              </a:lnSpc>
-              <a:spcBef>
-                <a:spcPts val="0"/>
-              </a:spcBef>
-              <a:spcAft>
-                <a:spcPts val="700"/>
-              </a:spcAft>
-            </a:pPr>
-            <a:r>
-              <a:rPr sz="1200" b="1">
-                <a:solidFill>
-                  <a:srgbClr val="FF8A00"/>
-                </a:solidFill>
-                <a:latin typeface="Arial"/>
-              </a:rPr>
-              <a:t>REPORT</a:t>
-            </a:r>
-          </a:p>
-        </p:txBody>
-      </p:sp>
-      <p:sp>
-        <p:nvSpPr>
-          <p:cNvPr id="3" name="TextBox 2"/>
-          <p:cNvSpPr txBox="1"/>
-          <p:nvPr/>
-        </p:nvSpPr>
-        <p:spPr>
-          <a:xfrm>
-            <a:off x="548640" y="777240"/>
-            <a:ext cx="11064240" cy="749808"/>
-          </a:xfrm>
-          <a:prstGeom prst="rect">
-            <a:avLst/>
-          </a:prstGeom>
-          <a:noFill/>
-        </p:spPr>
-        <p:txBody>
-          <a:bodyPr wrap="square" lIns="0" rIns="0" tIns="0" bIns="0">
-            <a:noAutofit/>
-          </a:bodyPr>
-          <a:lstStyle/>
-          <a:p>
-            <a:pPr algn="l">
-              <a:lnSpc>
-                <a:spcPct val="112000"/>
-              </a:lnSpc>
-              <a:spcBef>
-                <a:spcPts val="0"/>
-              </a:spcBef>
-              <a:spcAft>
-                <a:spcPts val="700"/>
-              </a:spcAft>
-            </a:pPr>
-            <a:r>
-              <a:rPr sz="3400" b="1">
-                <a:solidFill>
-                  <a:srgbClr val="1F2328"/>
-                </a:solidFill>
-                <a:latin typeface="Arial"/>
-              </a:rPr>
-              <a:t>Documentation for handoff</a:t>
-            </a:r>
-          </a:p>
-        </p:txBody>
-      </p:sp>
-      <p:sp>
-        <p:nvSpPr>
-          <p:cNvPr id="4" name="TextBox 3"/>
-          <p:cNvSpPr txBox="1"/>
-          <p:nvPr/>
-        </p:nvSpPr>
-        <p:spPr>
-          <a:xfrm>
-            <a:off x="548640" y="6528816"/>
-            <a:ext cx="9144000" cy="182880"/>
-          </a:xfrm>
-          <a:prstGeom prst="rect">
-            <a:avLst/>
-          </a:prstGeom>
-          <a:noFill/>
-        </p:spPr>
-        <p:txBody>
-          <a:bodyPr wrap="square" lIns="0" rIns="0" tIns="0" bIns="0">
-            <a:noAutofit/>
-          </a:bodyPr>
-          <a:lstStyle/>
-          <a:p>
-            <a:pPr algn="l">
-              <a:lnSpc>
-                <a:spcPct val="112000"/>
-              </a:lnSpc>
-              <a:spcBef>
-                <a:spcPts val="0"/>
-              </a:spcBef>
-              <a:spcAft>
-                <a:spcPts val="700"/>
-              </a:spcAft>
-            </a:pPr>
-            <a:r>
-              <a:rPr sz="1000" b="0">
-                <a:solidFill>
-                  <a:srgbClr val="5B6573"/>
-                </a:solidFill>
-                <a:latin typeface="Arial"/>
-              </a:rPr>
-              <a:t>SQUATCH SPORTS · TEAM 11</a:t>
-            </a:r>
-          </a:p>
-        </p:txBody>
-      </p:sp>
-      <p:sp>
-        <p:nvSpPr>
-          <p:cNvPr id="5" name="TextBox 4"/>
-          <p:cNvSpPr txBox="1"/>
-          <p:nvPr/>
-        </p:nvSpPr>
-        <p:spPr>
-          <a:xfrm>
-            <a:off x="11091672" y="6510528"/>
-            <a:ext cx="521207" cy="201168"/>
-          </a:xfrm>
-          <a:prstGeom prst="rect">
-            <a:avLst/>
-          </a:prstGeom>
-          <a:noFill/>
-        </p:spPr>
-        <p:txBody>
-          <a:bodyPr wrap="square" lIns="0" rIns="0" tIns="0" bIns="0">
-            <a:noAutofit/>
-          </a:bodyPr>
-          <a:lstStyle/>
-          <a:p>
-            <a:pPr algn="r">
-              <a:lnSpc>
-                <a:spcPct val="112000"/>
-              </a:lnSpc>
-              <a:spcBef>
-                <a:spcPts val="0"/>
-              </a:spcBef>
-              <a:spcAft>
-                <a:spcPts val="700"/>
-              </a:spcAft>
-            </a:pPr>
-            <a:r>
-              <a:rPr sz="1000" b="0">
-                <a:solidFill>
-                  <a:srgbClr val="5B6573"/>
-                </a:solidFill>
-                <a:latin typeface="Arial"/>
-              </a:rPr>
-              <a:t>12</a:t>
-            </a:r>
-          </a:p>
-        </p:txBody>
-      </p:sp>
-      <p:sp>
-        <p:nvSpPr>
-          <p:cNvPr id="6" name="Rounded Rectangle 5"/>
-          <p:cNvSpPr/>
-          <p:nvPr/>
-        </p:nvSpPr>
-        <p:spPr>
-          <a:xfrm>
-            <a:off x="548640" y="2048256"/>
-            <a:ext cx="3566160" cy="2231136"/>
-          </a:xfrm>
-          <a:prstGeom prst="roundRect">
-            <a:avLst>
-              <a:gd name="adj" fmla="val 10000"/>
-            </a:avLst>
-          </a:prstGeom>
-          <a:solidFill>
-            <a:srgbClr val="F3F4F6"/>
-          </a:solidFill>
-          <a:ln>
-            <a:noFill/>
-          </a:ln>
-        </p:spPr>
-        <p:style>
-          <a:lnRef idx="1">
-            <a:schemeClr val="accent1"/>
-          </a:lnRef>
-          <a:fillRef idx="3">
-            <a:schemeClr val="accent1"/>
-          </a:fillRef>
-          <a:effectRef idx="2">
-            <a:schemeClr val="accent1"/>
-          </a:effectRef>
-          <a:fontRef idx="minor">
-            <a:schemeClr val="lt1"/>
-          </a:fontRef>
-        </p:style>
-        <p:txBody>
-          <a:bodyPr rtlCol="0" anchor="ctr"/>
-          <a:lstStyle/>
-          <a:p>
-            <a:pPr algn="ctr"/>
-          </a:p>
-        </p:txBody>
-      </p:sp>
-      <p:sp>
-        <p:nvSpPr>
-          <p:cNvPr id="7" name="TextBox 6"/>
-          <p:cNvSpPr txBox="1"/>
-          <p:nvPr/>
-        </p:nvSpPr>
-        <p:spPr>
-          <a:xfrm>
-            <a:off x="777240" y="2450592"/>
-            <a:ext cx="3108960" cy="612648"/>
-          </a:xfrm>
-          <a:prstGeom prst="rect">
-            <a:avLst/>
-          </a:prstGeom>
-          <a:noFill/>
-        </p:spPr>
-        <p:txBody>
-          <a:bodyPr wrap="square" lIns="0" rIns="0" tIns="0" bIns="0">
-            <a:noAutofit/>
-          </a:bodyPr>
-          <a:lstStyle/>
-          <a:p>
-            <a:pPr algn="l">
-              <a:lnSpc>
-                <a:spcPct val="112000"/>
-              </a:lnSpc>
-              <a:spcBef>
-                <a:spcPts val="0"/>
-              </a:spcBef>
-              <a:spcAft>
-                <a:spcPts val="700"/>
-              </a:spcAft>
-            </a:pPr>
-            <a:r>
-              <a:rPr sz="2500" b="1">
-                <a:solidFill>
-                  <a:srgbClr val="FF8A00"/>
-                </a:solidFill>
-                <a:latin typeface="Arial"/>
-              </a:rPr>
-              <a:t>Report</a:t>
-            </a:r>
-          </a:p>
-        </p:txBody>
-      </p:sp>
-      <p:sp>
-        <p:nvSpPr>
-          <p:cNvPr id="8" name="TextBox 7"/>
-          <p:cNvSpPr txBox="1"/>
-          <p:nvPr/>
-        </p:nvSpPr>
-        <p:spPr>
-          <a:xfrm>
-            <a:off x="777240" y="3337560"/>
-            <a:ext cx="3108960" cy="594360"/>
-          </a:xfrm>
-          <a:prstGeom prst="rect">
-            <a:avLst/>
-          </a:prstGeom>
-          <a:noFill/>
-        </p:spPr>
-        <p:txBody>
-          <a:bodyPr wrap="square" lIns="0" rIns="0" tIns="0" bIns="0">
-            <a:noAutofit/>
-          </a:bodyPr>
-          <a:lstStyle/>
-          <a:p>
-            <a:pPr algn="l">
-              <a:lnSpc>
-                <a:spcPct val="112000"/>
-              </a:lnSpc>
-              <a:spcBef>
-                <a:spcPts val="0"/>
-              </a:spcBef>
-              <a:spcAft>
-                <a:spcPts val="700"/>
-              </a:spcAft>
-            </a:pPr>
-            <a:r>
-              <a:rPr sz="2000" b="0">
-                <a:solidFill>
-                  <a:srgbClr val="5B6573"/>
-                </a:solidFill>
-                <a:latin typeface="Arial"/>
-              </a:rPr>
-              <a:t>Features + team contributions</a:t>
-            </a:r>
-          </a:p>
-        </p:txBody>
-      </p:sp>
-      <p:sp>
-        <p:nvSpPr>
-          <p:cNvPr id="9" name="Rounded Rectangle 8"/>
-          <p:cNvSpPr/>
-          <p:nvPr/>
-        </p:nvSpPr>
-        <p:spPr>
-          <a:xfrm>
-            <a:off x="4343400" y="2048256"/>
-            <a:ext cx="3566160" cy="2231136"/>
-          </a:xfrm>
-          <a:prstGeom prst="roundRect">
-            <a:avLst>
-              <a:gd name="adj" fmla="val 10000"/>
-            </a:avLst>
-          </a:prstGeom>
-          <a:solidFill>
-            <a:srgbClr val="F3F4F6"/>
-          </a:solidFill>
-          <a:ln>
-            <a:noFill/>
-          </a:ln>
-        </p:spPr>
-        <p:style>
-          <a:lnRef idx="1">
-            <a:schemeClr val="accent1"/>
-          </a:lnRef>
-          <a:fillRef idx="3">
-            <a:schemeClr val="accent1"/>
-          </a:fillRef>
-          <a:effectRef idx="2">
-            <a:schemeClr val="accent1"/>
-          </a:effectRef>
-          <a:fontRef idx="minor">
-            <a:schemeClr val="lt1"/>
-          </a:fontRef>
-        </p:style>
-        <p:txBody>
-          <a:bodyPr rtlCol="0" anchor="ctr"/>
-          <a:lstStyle/>
-          <a:p>
-            <a:pPr algn="ctr"/>
-          </a:p>
-        </p:txBody>
-      </p:sp>
-      <p:sp>
-        <p:nvSpPr>
-          <p:cNvPr id="10" name="TextBox 9"/>
-          <p:cNvSpPr txBox="1"/>
-          <p:nvPr/>
-        </p:nvSpPr>
-        <p:spPr>
-          <a:xfrm>
-            <a:off x="4572000" y="2450592"/>
-            <a:ext cx="3108960" cy="612648"/>
-          </a:xfrm>
-          <a:prstGeom prst="rect">
-            <a:avLst/>
-          </a:prstGeom>
-          <a:noFill/>
-        </p:spPr>
-        <p:txBody>
-          <a:bodyPr wrap="square" lIns="0" rIns="0" tIns="0" bIns="0">
-            <a:noAutofit/>
-          </a:bodyPr>
-          <a:lstStyle/>
-          <a:p>
-            <a:pPr algn="l">
-              <a:lnSpc>
-                <a:spcPct val="112000"/>
-              </a:lnSpc>
-              <a:spcBef>
-                <a:spcPts val="0"/>
-              </a:spcBef>
-              <a:spcAft>
-                <a:spcPts val="700"/>
-              </a:spcAft>
-            </a:pPr>
-            <a:r>
-              <a:rPr sz="2500" b="1">
-                <a:solidFill>
-                  <a:srgbClr val="FF8A00"/>
-                </a:solidFill>
-                <a:latin typeface="Arial"/>
-              </a:rPr>
-              <a:t>Meeting minutes</a:t>
-            </a:r>
-          </a:p>
-        </p:txBody>
-      </p:sp>
-      <p:sp>
-        <p:nvSpPr>
-          <p:cNvPr id="11" name="TextBox 10"/>
-          <p:cNvSpPr txBox="1"/>
-          <p:nvPr/>
-        </p:nvSpPr>
-        <p:spPr>
-          <a:xfrm>
-            <a:off x="4572000" y="3337560"/>
-            <a:ext cx="3108960" cy="594360"/>
-          </a:xfrm>
-          <a:prstGeom prst="rect">
-            <a:avLst/>
-          </a:prstGeom>
-          <a:noFill/>
-        </p:spPr>
-        <p:txBody>
-          <a:bodyPr wrap="square" lIns="0" rIns="0" tIns="0" bIns="0">
-            <a:noAutofit/>
-          </a:bodyPr>
-          <a:lstStyle/>
-          <a:p>
-            <a:pPr algn="l">
-              <a:lnSpc>
-                <a:spcPct val="112000"/>
-              </a:lnSpc>
-              <a:spcBef>
-                <a:spcPts val="0"/>
-              </a:spcBef>
-              <a:spcAft>
-                <a:spcPts val="700"/>
-              </a:spcAft>
-            </a:pPr>
-            <a:r>
-              <a:rPr sz="2000" b="0">
-                <a:solidFill>
-                  <a:srgbClr val="5B6573"/>
-                </a:solidFill>
-                <a:latin typeface="Arial"/>
-              </a:rPr>
-              <a:t>Decisions + action items</a:t>
-            </a:r>
-          </a:p>
-        </p:txBody>
-      </p:sp>
-      <p:sp>
-        <p:nvSpPr>
-          <p:cNvPr id="12" name="Rounded Rectangle 11"/>
-          <p:cNvSpPr/>
-          <p:nvPr/>
-        </p:nvSpPr>
-        <p:spPr>
-          <a:xfrm>
-            <a:off x="8138160" y="2048256"/>
-            <a:ext cx="3566160" cy="2231136"/>
-          </a:xfrm>
-          <a:prstGeom prst="roundRect">
-            <a:avLst>
-              <a:gd name="adj" fmla="val 10000"/>
-            </a:avLst>
-          </a:prstGeom>
-          <a:solidFill>
-            <a:srgbClr val="F3F4F6"/>
-          </a:solidFill>
-          <a:ln>
-            <a:noFill/>
-          </a:ln>
-        </p:spPr>
-        <p:style>
-          <a:lnRef idx="1">
-            <a:schemeClr val="accent1"/>
-          </a:lnRef>
-          <a:fillRef idx="3">
-            <a:schemeClr val="accent1"/>
-          </a:fillRef>
-          <a:effectRef idx="2">
-            <a:schemeClr val="accent1"/>
-          </a:effectRef>
-          <a:fontRef idx="minor">
-            <a:schemeClr val="lt1"/>
-          </a:fontRef>
-        </p:style>
-        <p:txBody>
-          <a:bodyPr rtlCol="0" anchor="ctr"/>
-          <a:lstStyle/>
-          <a:p>
-            <a:pPr algn="ctr"/>
-          </a:p>
-        </p:txBody>
-      </p:sp>
-      <p:sp>
-        <p:nvSpPr>
-          <p:cNvPr id="13" name="TextBox 12"/>
-          <p:cNvSpPr txBox="1"/>
-          <p:nvPr/>
-        </p:nvSpPr>
-        <p:spPr>
-          <a:xfrm>
-            <a:off x="8366760" y="2450592"/>
-            <a:ext cx="3108960" cy="612648"/>
-          </a:xfrm>
-          <a:prstGeom prst="rect">
-            <a:avLst/>
-          </a:prstGeom>
-          <a:noFill/>
-        </p:spPr>
-        <p:txBody>
-          <a:bodyPr wrap="square" lIns="0" rIns="0" tIns="0" bIns="0">
-            <a:noAutofit/>
-          </a:bodyPr>
-          <a:lstStyle/>
-          <a:p>
-            <a:pPr algn="l">
-              <a:lnSpc>
-                <a:spcPct val="112000"/>
-              </a:lnSpc>
-              <a:spcBef>
-                <a:spcPts val="0"/>
-              </a:spcBef>
-              <a:spcAft>
-                <a:spcPts val="700"/>
-              </a:spcAft>
-            </a:pPr>
-            <a:r>
-              <a:rPr sz="2500" b="1">
-                <a:solidFill>
-                  <a:srgbClr val="FF8A00"/>
-                </a:solidFill>
-                <a:latin typeface="Arial"/>
-              </a:rPr>
-              <a:t>Test evidence</a:t>
-            </a:r>
-          </a:p>
-        </p:txBody>
-      </p:sp>
-      <p:sp>
-        <p:nvSpPr>
-          <p:cNvPr id="14" name="TextBox 13"/>
-          <p:cNvSpPr txBox="1"/>
-          <p:nvPr/>
-        </p:nvSpPr>
-        <p:spPr>
-          <a:xfrm>
-            <a:off x="8366760" y="3337560"/>
-            <a:ext cx="3108960" cy="594360"/>
-          </a:xfrm>
-          <a:prstGeom prst="rect">
-            <a:avLst/>
-          </a:prstGeom>
-          <a:noFill/>
-        </p:spPr>
-        <p:txBody>
-          <a:bodyPr wrap="square" lIns="0" rIns="0" tIns="0" bIns="0">
-            <a:noAutofit/>
-          </a:bodyPr>
-          <a:lstStyle/>
-          <a:p>
-            <a:pPr algn="l">
-              <a:lnSpc>
-                <a:spcPct val="112000"/>
-              </a:lnSpc>
-              <a:spcBef>
-                <a:spcPts val="0"/>
-              </a:spcBef>
-              <a:spcAft>
-                <a:spcPts val="700"/>
-              </a:spcAft>
-            </a:pPr>
-            <a:r>
-              <a:rPr sz="2000" b="0">
-                <a:solidFill>
-                  <a:srgbClr val="5B6573"/>
-                </a:solidFill>
-                <a:latin typeface="Arial"/>
-              </a:rPr>
-              <a:t>Results + logs + screenshots</a:t>
-            </a:r>
-          </a:p>
-        </p:txBody>
-      </p:sp>
-      <p:sp>
-        <p:nvSpPr>
-          <p:cNvPr id="15" name="TextBox 14"/>
-          <p:cNvSpPr txBox="1"/>
-          <p:nvPr/>
-        </p:nvSpPr>
-        <p:spPr>
-          <a:xfrm>
-            <a:off x="548640" y="5221224"/>
-            <a:ext cx="11064240" cy="621792"/>
-          </a:xfrm>
-          <a:prstGeom prst="rect">
-            <a:avLst/>
-          </a:prstGeom>
-          <a:noFill/>
-        </p:spPr>
-        <p:txBody>
-          <a:bodyPr wrap="square" lIns="0" rIns="0" tIns="0" bIns="0">
-            <a:noAutofit/>
-          </a:bodyPr>
-          <a:lstStyle/>
-          <a:p>
-            <a:pPr algn="ctr">
-              <a:lnSpc>
-                <a:spcPct val="112000"/>
-              </a:lnSpc>
-              <a:spcBef>
-                <a:spcPts val="0"/>
-              </a:spcBef>
-              <a:spcAft>
-                <a:spcPts val="700"/>
-              </a:spcAft>
-            </a:pPr>
-            <a:r>
-              <a:rPr sz="2600" b="1">
-                <a:solidFill>
-                  <a:srgbClr val="1F2328"/>
-                </a:solidFill>
-                <a:latin typeface="Arial"/>
-              </a:rPr>
-              <a:t>Next: recording + unlisted video link.</a:t>
-            </a:r>
-          </a:p>
-        </p:txBody>
-      </p:sp>
-    </p:spTree>
-  </p:cSld>
-  <p:clrMapOvr>
-    <a:masterClrMapping/>
-  </p:clrMapOvr>
-</p:sld>
-</file>
-
-<file path=ppt/slides/slide13.xml><?xml version="1.0" encoding="utf-8"?>
-<p:sld xmlns:a="http://schemas.openxmlformats.org/drawingml/2006/main" xmlns:p="http://schemas.openxmlformats.org/presentationml/2006/main" xmlns:r="http://schemas.openxmlformats.org/officeDocument/2006/relationships">
-  <p:cSld>
-    <p:bg>
-      <p:bgPr>
-        <a:solidFill>
-          <a:srgbClr val="FFFFFF"/>
-        </a:solidFill>
-        <a:effectLst/>
-      </p:bgPr>
-    </p:bg>
-    <p:spTree>
-      <p:nvGrpSpPr>
-        <p:cNvPr id="1" name=""/>
-        <p:cNvGrpSpPr/>
-        <p:nvPr/>
-      </p:nvGrpSpPr>
-      <p:grpSpPr/>
-      <p:sp>
-        <p:nvSpPr>
-          <p:cNvPr id="2" name="TextBox 1"/>
-          <p:cNvSpPr txBox="1"/>
-          <p:nvPr/>
-        </p:nvSpPr>
-        <p:spPr>
-          <a:xfrm>
-            <a:off x="548640" y="329184"/>
-            <a:ext cx="11064240" cy="256032"/>
-          </a:xfrm>
-          <a:prstGeom prst="rect">
-            <a:avLst/>
-          </a:prstGeom>
-          <a:noFill/>
-        </p:spPr>
-        <p:txBody>
-          <a:bodyPr wrap="square" lIns="0" rIns="0" tIns="0" bIns="0">
-            <a:noAutofit/>
-          </a:bodyPr>
-          <a:lstStyle/>
-          <a:p>
-            <a:pPr algn="l">
-              <a:lnSpc>
-                <a:spcPct val="112000"/>
-              </a:lnSpc>
-              <a:spcBef>
-                <a:spcPts val="0"/>
-              </a:spcBef>
-              <a:spcAft>
-                <a:spcPts val="700"/>
-              </a:spcAft>
-            </a:pPr>
-            <a:r>
-              <a:rPr sz="1200" b="1">
-                <a:solidFill>
-                  <a:srgbClr val="FF8A00"/>
-                </a:solidFill>
-                <a:latin typeface="Arial"/>
-              </a:rPr>
-              <a:t>AI</a:t>
-            </a:r>
-          </a:p>
-        </p:txBody>
-      </p:sp>
-      <p:sp>
-        <p:nvSpPr>
-          <p:cNvPr id="3" name="TextBox 2"/>
-          <p:cNvSpPr txBox="1"/>
-          <p:nvPr/>
-        </p:nvSpPr>
-        <p:spPr>
-          <a:xfrm>
-            <a:off x="548640" y="777240"/>
-            <a:ext cx="11064240" cy="749808"/>
-          </a:xfrm>
-          <a:prstGeom prst="rect">
-            <a:avLst/>
-          </a:prstGeom>
-          <a:noFill/>
-        </p:spPr>
-        <p:txBody>
-          <a:bodyPr wrap="square" lIns="0" rIns="0" tIns="0" bIns="0">
-            <a:noAutofit/>
-          </a:bodyPr>
-          <a:lstStyle/>
-          <a:p>
-            <a:pPr algn="l">
-              <a:lnSpc>
-                <a:spcPct val="112000"/>
-              </a:lnSpc>
-              <a:spcBef>
-                <a:spcPts val="0"/>
-              </a:spcBef>
-              <a:spcAft>
-                <a:spcPts val="700"/>
-              </a:spcAft>
-            </a:pPr>
-            <a:r>
-              <a:rPr sz="3400" b="1">
-                <a:solidFill>
-                  <a:srgbClr val="1F2328"/>
-                </a:solidFill>
-                <a:latin typeface="Arial"/>
-              </a:rPr>
-              <a:t>AI accelerated. The team verified.</a:t>
-            </a:r>
-          </a:p>
-        </p:txBody>
-      </p:sp>
-      <p:sp>
-        <p:nvSpPr>
-          <p:cNvPr id="4" name="TextBox 3"/>
-          <p:cNvSpPr txBox="1"/>
-          <p:nvPr/>
-        </p:nvSpPr>
-        <p:spPr>
-          <a:xfrm>
-            <a:off x="548640" y="6528816"/>
-            <a:ext cx="9144000" cy="182880"/>
-          </a:xfrm>
-          <a:prstGeom prst="rect">
-            <a:avLst/>
-          </a:prstGeom>
-          <a:noFill/>
-        </p:spPr>
-        <p:txBody>
-          <a:bodyPr wrap="square" lIns="0" rIns="0" tIns="0" bIns="0">
-            <a:noAutofit/>
-          </a:bodyPr>
-          <a:lstStyle/>
-          <a:p>
-            <a:pPr algn="l">
-              <a:lnSpc>
-                <a:spcPct val="112000"/>
-              </a:lnSpc>
-              <a:spcBef>
-                <a:spcPts val="0"/>
-              </a:spcBef>
-              <a:spcAft>
-                <a:spcPts val="700"/>
-              </a:spcAft>
-            </a:pPr>
-            <a:r>
-              <a:rPr sz="1000" b="0">
-                <a:solidFill>
-                  <a:srgbClr val="5B6573"/>
-                </a:solidFill>
-                <a:latin typeface="Arial"/>
-              </a:rPr>
-              <a:t>SQUATCH SPORTS · TEAM 11</a:t>
-            </a:r>
-          </a:p>
-        </p:txBody>
-      </p:sp>
-      <p:sp>
-        <p:nvSpPr>
-          <p:cNvPr id="5" name="TextBox 4"/>
-          <p:cNvSpPr txBox="1"/>
-          <p:nvPr/>
-        </p:nvSpPr>
-        <p:spPr>
-          <a:xfrm>
-            <a:off x="11091672" y="6510528"/>
-            <a:ext cx="521207" cy="201168"/>
-          </a:xfrm>
-          <a:prstGeom prst="rect">
-            <a:avLst/>
-          </a:prstGeom>
-          <a:noFill/>
-        </p:spPr>
-        <p:txBody>
-          <a:bodyPr wrap="square" lIns="0" rIns="0" tIns="0" bIns="0">
-            <a:noAutofit/>
-          </a:bodyPr>
-          <a:lstStyle/>
-          <a:p>
-            <a:pPr algn="r">
-              <a:lnSpc>
-                <a:spcPct val="112000"/>
-              </a:lnSpc>
-              <a:spcBef>
-                <a:spcPts val="0"/>
-              </a:spcBef>
-              <a:spcAft>
-                <a:spcPts val="700"/>
-              </a:spcAft>
-            </a:pPr>
-            <a:r>
-              <a:rPr sz="1000" b="0">
-                <a:solidFill>
-                  <a:srgbClr val="5B6573"/>
-                </a:solidFill>
-                <a:latin typeface="Arial"/>
-              </a:rPr>
-              <a:t>13</a:t>
-            </a:r>
-          </a:p>
-        </p:txBody>
-      </p:sp>
-      <p:sp>
-        <p:nvSpPr>
-          <p:cNvPr id="6" name="Rounded Rectangle 5"/>
-          <p:cNvSpPr/>
-          <p:nvPr/>
-        </p:nvSpPr>
-        <p:spPr>
-          <a:xfrm>
-            <a:off x="548640" y="1920240"/>
-            <a:ext cx="3566160" cy="3136392"/>
-          </a:xfrm>
-          <a:prstGeom prst="roundRect">
-            <a:avLst>
-              <a:gd name="adj" fmla="val 10000"/>
-            </a:avLst>
-          </a:prstGeom>
-          <a:solidFill>
-            <a:srgbClr val="F3F4F6"/>
-          </a:solidFill>
-          <a:ln>
-            <a:noFill/>
-          </a:ln>
-        </p:spPr>
-        <p:style>
-          <a:lnRef idx="1">
-            <a:schemeClr val="accent1"/>
-          </a:lnRef>
-          <a:fillRef idx="3">
-            <a:schemeClr val="accent1"/>
-          </a:fillRef>
-          <a:effectRef idx="2">
-            <a:schemeClr val="accent1"/>
-          </a:effectRef>
-          <a:fontRef idx="minor">
-            <a:schemeClr val="lt1"/>
-          </a:fontRef>
-        </p:style>
-        <p:txBody>
-          <a:bodyPr rtlCol="0" anchor="ctr"/>
-          <a:lstStyle/>
-          <a:p>
-            <a:pPr algn="ctr"/>
-          </a:p>
-        </p:txBody>
-      </p:sp>
-      <p:sp>
-        <p:nvSpPr>
-          <p:cNvPr id="7" name="TextBox 6"/>
-          <p:cNvSpPr txBox="1"/>
-          <p:nvPr/>
-        </p:nvSpPr>
-        <p:spPr>
-          <a:xfrm>
-            <a:off x="822959" y="2240280"/>
-            <a:ext cx="3017520" cy="594360"/>
-          </a:xfrm>
-          <a:prstGeom prst="rect">
-            <a:avLst/>
-          </a:prstGeom>
-          <a:noFill/>
-        </p:spPr>
-        <p:txBody>
-          <a:bodyPr wrap="square" lIns="0" rIns="0" tIns="0" bIns="0">
-            <a:noAutofit/>
-          </a:bodyPr>
-          <a:lstStyle/>
-          <a:p>
-            <a:pPr algn="l">
-              <a:lnSpc>
-                <a:spcPct val="112000"/>
-              </a:lnSpc>
-              <a:spcBef>
-                <a:spcPts val="0"/>
-              </a:spcBef>
-              <a:spcAft>
-                <a:spcPts val="700"/>
-              </a:spcAft>
-            </a:pPr>
-            <a:r>
-              <a:rPr sz="3600" b="1">
-                <a:solidFill>
-                  <a:srgbClr val="FF8A00"/>
-                </a:solidFill>
-                <a:latin typeface="Arial"/>
-              </a:rPr>
-              <a:t>01</a:t>
-            </a:r>
-          </a:p>
-        </p:txBody>
-      </p:sp>
-      <p:sp>
-        <p:nvSpPr>
-          <p:cNvPr id="8" name="TextBox 7"/>
-          <p:cNvSpPr txBox="1"/>
-          <p:nvPr/>
-        </p:nvSpPr>
-        <p:spPr>
-          <a:xfrm>
-            <a:off x="822959" y="3200400"/>
-            <a:ext cx="3017520" cy="603504"/>
-          </a:xfrm>
-          <a:prstGeom prst="rect">
-            <a:avLst/>
-          </a:prstGeom>
-          <a:noFill/>
-        </p:spPr>
-        <p:txBody>
-          <a:bodyPr wrap="square" lIns="0" rIns="0" tIns="0" bIns="0">
-            <a:noAutofit/>
-          </a:bodyPr>
-          <a:lstStyle/>
-          <a:p>
-            <a:pPr algn="l">
-              <a:lnSpc>
-                <a:spcPct val="112000"/>
-              </a:lnSpc>
-              <a:spcBef>
-                <a:spcPts val="0"/>
-              </a:spcBef>
-              <a:spcAft>
-                <a:spcPts val="700"/>
-              </a:spcAft>
-            </a:pPr>
-            <a:r>
-              <a:rPr sz="2400" b="1">
-                <a:solidFill>
-                  <a:srgbClr val="1F2328"/>
-                </a:solidFill>
-                <a:latin typeface="Arial"/>
-              </a:rPr>
-              <a:t>Build faster</a:t>
-            </a:r>
-          </a:p>
-        </p:txBody>
-      </p:sp>
-      <p:sp>
-        <p:nvSpPr>
-          <p:cNvPr id="9" name="TextBox 8"/>
-          <p:cNvSpPr txBox="1"/>
-          <p:nvPr/>
-        </p:nvSpPr>
-        <p:spPr>
-          <a:xfrm>
-            <a:off x="822959" y="4123944"/>
-            <a:ext cx="3017520" cy="640080"/>
-          </a:xfrm>
-          <a:prstGeom prst="rect">
-            <a:avLst/>
-          </a:prstGeom>
-          <a:noFill/>
-        </p:spPr>
-        <p:txBody>
-          <a:bodyPr wrap="square" lIns="0" rIns="0" tIns="0" bIns="0">
-            <a:noAutofit/>
-          </a:bodyPr>
-          <a:lstStyle/>
-          <a:p>
-            <a:pPr algn="l">
-              <a:lnSpc>
-                <a:spcPct val="112000"/>
-              </a:lnSpc>
-              <a:spcBef>
-                <a:spcPts val="0"/>
-              </a:spcBef>
-              <a:spcAft>
-                <a:spcPts val="700"/>
-              </a:spcAft>
-            </a:pPr>
-            <a:r>
-              <a:rPr sz="2000" b="0">
-                <a:solidFill>
-                  <a:srgbClr val="5B6573"/>
-                </a:solidFill>
-                <a:latin typeface="Arial"/>
-              </a:rPr>
-              <a:t>Porting, tests and debugging</a:t>
-            </a:r>
-          </a:p>
-        </p:txBody>
-      </p:sp>
-      <p:sp>
-        <p:nvSpPr>
-          <p:cNvPr id="10" name="Rounded Rectangle 9"/>
-          <p:cNvSpPr/>
-          <p:nvPr/>
-        </p:nvSpPr>
-        <p:spPr>
-          <a:xfrm>
-            <a:off x="4343400" y="1920240"/>
-            <a:ext cx="3566160" cy="3136392"/>
-          </a:xfrm>
-          <a:prstGeom prst="roundRect">
-            <a:avLst>
-              <a:gd name="adj" fmla="val 10000"/>
-            </a:avLst>
-          </a:prstGeom>
-          <a:solidFill>
-            <a:srgbClr val="F3F4F6"/>
-          </a:solidFill>
-          <a:ln>
-            <a:noFill/>
-          </a:ln>
-        </p:spPr>
-        <p:style>
-          <a:lnRef idx="1">
-            <a:schemeClr val="accent1"/>
-          </a:lnRef>
-          <a:fillRef idx="3">
-            <a:schemeClr val="accent1"/>
-          </a:fillRef>
-          <a:effectRef idx="2">
-            <a:schemeClr val="accent1"/>
-          </a:effectRef>
-          <a:fontRef idx="minor">
-            <a:schemeClr val="lt1"/>
-          </a:fontRef>
-        </p:style>
-        <p:txBody>
-          <a:bodyPr rtlCol="0" anchor="ctr"/>
-          <a:lstStyle/>
-          <a:p>
-            <a:pPr algn="ctr"/>
-          </a:p>
-        </p:txBody>
-      </p:sp>
-      <p:sp>
-        <p:nvSpPr>
-          <p:cNvPr id="11" name="TextBox 10"/>
-          <p:cNvSpPr txBox="1"/>
-          <p:nvPr/>
-        </p:nvSpPr>
-        <p:spPr>
-          <a:xfrm>
-            <a:off x="4617720" y="2240280"/>
-            <a:ext cx="3017520" cy="594360"/>
-          </a:xfrm>
-          <a:prstGeom prst="rect">
-            <a:avLst/>
-          </a:prstGeom>
-          <a:noFill/>
-        </p:spPr>
-        <p:txBody>
-          <a:bodyPr wrap="square" lIns="0" rIns="0" tIns="0" bIns="0">
-            <a:noAutofit/>
-          </a:bodyPr>
-          <a:lstStyle/>
-          <a:p>
-            <a:pPr algn="l">
-              <a:lnSpc>
-                <a:spcPct val="112000"/>
-              </a:lnSpc>
-              <a:spcBef>
-                <a:spcPts val="0"/>
-              </a:spcBef>
-              <a:spcAft>
-                <a:spcPts val="700"/>
-              </a:spcAft>
-            </a:pPr>
-            <a:r>
-              <a:rPr sz="3600" b="1">
-                <a:solidFill>
-                  <a:srgbClr val="FF8A00"/>
-                </a:solidFill>
-                <a:latin typeface="Arial"/>
-              </a:rPr>
-              <a:t>02</a:t>
-            </a:r>
-          </a:p>
-        </p:txBody>
-      </p:sp>
-      <p:sp>
-        <p:nvSpPr>
-          <p:cNvPr id="12" name="TextBox 11"/>
-          <p:cNvSpPr txBox="1"/>
-          <p:nvPr/>
-        </p:nvSpPr>
-        <p:spPr>
-          <a:xfrm>
-            <a:off x="4617720" y="3200400"/>
-            <a:ext cx="3017520" cy="603504"/>
-          </a:xfrm>
-          <a:prstGeom prst="rect">
-            <a:avLst/>
-          </a:prstGeom>
-          <a:noFill/>
-        </p:spPr>
-        <p:txBody>
-          <a:bodyPr wrap="square" lIns="0" rIns="0" tIns="0" bIns="0">
-            <a:noAutofit/>
-          </a:bodyPr>
-          <a:lstStyle/>
-          <a:p>
-            <a:pPr algn="l">
-              <a:lnSpc>
-                <a:spcPct val="112000"/>
-              </a:lnSpc>
-              <a:spcBef>
-                <a:spcPts val="0"/>
-              </a:spcBef>
-              <a:spcAft>
-                <a:spcPts val="700"/>
-              </a:spcAft>
-            </a:pPr>
-            <a:r>
-              <a:rPr sz="2400" b="1">
-                <a:solidFill>
-                  <a:srgbClr val="1F2328"/>
-                </a:solidFill>
-                <a:latin typeface="Arial"/>
-              </a:rPr>
-              <a:t>Review carefully</a:t>
-            </a:r>
-          </a:p>
-        </p:txBody>
-      </p:sp>
-      <p:sp>
-        <p:nvSpPr>
-          <p:cNvPr id="13" name="TextBox 12"/>
-          <p:cNvSpPr txBox="1"/>
-          <p:nvPr/>
-        </p:nvSpPr>
-        <p:spPr>
-          <a:xfrm>
-            <a:off x="4617720" y="4123944"/>
-            <a:ext cx="3017520" cy="640080"/>
-          </a:xfrm>
-          <a:prstGeom prst="rect">
-            <a:avLst/>
-          </a:prstGeom>
-          <a:noFill/>
-        </p:spPr>
-        <p:txBody>
-          <a:bodyPr wrap="square" lIns="0" rIns="0" tIns="0" bIns="0">
-            <a:noAutofit/>
-          </a:bodyPr>
-          <a:lstStyle/>
-          <a:p>
-            <a:pPr algn="l">
-              <a:lnSpc>
-                <a:spcPct val="112000"/>
-              </a:lnSpc>
-              <a:spcBef>
-                <a:spcPts val="0"/>
-              </a:spcBef>
-              <a:spcAft>
-                <a:spcPts val="700"/>
-              </a:spcAft>
-            </a:pPr>
-            <a:r>
-              <a:rPr sz="2000" b="0">
-                <a:solidFill>
-                  <a:srgbClr val="5B6573"/>
-                </a:solidFill>
-                <a:latin typeface="Arial"/>
-              </a:rPr>
-              <a:t>Rules, code and UX decisions</a:t>
-            </a:r>
-          </a:p>
-        </p:txBody>
-      </p:sp>
-      <p:sp>
-        <p:nvSpPr>
-          <p:cNvPr id="14" name="Rounded Rectangle 13"/>
-          <p:cNvSpPr/>
-          <p:nvPr/>
-        </p:nvSpPr>
-        <p:spPr>
-          <a:xfrm>
-            <a:off x="8138160" y="1920240"/>
-            <a:ext cx="3566160" cy="3136392"/>
-          </a:xfrm>
-          <a:prstGeom prst="roundRect">
-            <a:avLst>
-              <a:gd name="adj" fmla="val 10000"/>
-            </a:avLst>
-          </a:prstGeom>
-          <a:solidFill>
-            <a:srgbClr val="F3F4F6"/>
-          </a:solidFill>
-          <a:ln>
-            <a:noFill/>
-          </a:ln>
-        </p:spPr>
-        <p:style>
-          <a:lnRef idx="1">
-            <a:schemeClr val="accent1"/>
-          </a:lnRef>
-          <a:fillRef idx="3">
-            <a:schemeClr val="accent1"/>
-          </a:fillRef>
-          <a:effectRef idx="2">
-            <a:schemeClr val="accent1"/>
-          </a:effectRef>
-          <a:fontRef idx="minor">
-            <a:schemeClr val="lt1"/>
-          </a:fontRef>
-        </p:style>
-        <p:txBody>
-          <a:bodyPr rtlCol="0" anchor="ctr"/>
-          <a:lstStyle/>
-          <a:p>
-            <a:pPr algn="ctr"/>
-          </a:p>
-        </p:txBody>
-      </p:sp>
-      <p:sp>
-        <p:nvSpPr>
-          <p:cNvPr id="15" name="TextBox 14"/>
-          <p:cNvSpPr txBox="1"/>
-          <p:nvPr/>
-        </p:nvSpPr>
-        <p:spPr>
-          <a:xfrm>
-            <a:off x="8412480" y="2240280"/>
-            <a:ext cx="3017520" cy="594360"/>
-          </a:xfrm>
-          <a:prstGeom prst="rect">
-            <a:avLst/>
-          </a:prstGeom>
-          <a:noFill/>
-        </p:spPr>
-        <p:txBody>
-          <a:bodyPr wrap="square" lIns="0" rIns="0" tIns="0" bIns="0">
-            <a:noAutofit/>
-          </a:bodyPr>
-          <a:lstStyle/>
-          <a:p>
-            <a:pPr algn="l">
-              <a:lnSpc>
-                <a:spcPct val="112000"/>
-              </a:lnSpc>
-              <a:spcBef>
-                <a:spcPts val="0"/>
-              </a:spcBef>
-              <a:spcAft>
-                <a:spcPts val="700"/>
-              </a:spcAft>
-            </a:pPr>
-            <a:r>
-              <a:rPr sz="3600" b="1">
-                <a:solidFill>
-                  <a:srgbClr val="FF8A00"/>
-                </a:solidFill>
-                <a:latin typeface="Arial"/>
-              </a:rPr>
-              <a:t>03</a:t>
-            </a:r>
-          </a:p>
-        </p:txBody>
-      </p:sp>
-      <p:sp>
-        <p:nvSpPr>
-          <p:cNvPr id="16" name="TextBox 15"/>
-          <p:cNvSpPr txBox="1"/>
-          <p:nvPr/>
-        </p:nvSpPr>
-        <p:spPr>
-          <a:xfrm>
-            <a:off x="8412480" y="3200400"/>
-            <a:ext cx="3017520" cy="603504"/>
-          </a:xfrm>
-          <a:prstGeom prst="rect">
-            <a:avLst/>
-          </a:prstGeom>
-          <a:noFill/>
-        </p:spPr>
-        <p:txBody>
-          <a:bodyPr wrap="square" lIns="0" rIns="0" tIns="0" bIns="0">
-            <a:noAutofit/>
-          </a:bodyPr>
-          <a:lstStyle/>
-          <a:p>
-            <a:pPr algn="l">
-              <a:lnSpc>
-                <a:spcPct val="112000"/>
-              </a:lnSpc>
-              <a:spcBef>
-                <a:spcPts val="0"/>
-              </a:spcBef>
-              <a:spcAft>
-                <a:spcPts val="700"/>
-              </a:spcAft>
-            </a:pPr>
-            <a:r>
-              <a:rPr sz="2400" b="1">
-                <a:solidFill>
-                  <a:srgbClr val="1F2328"/>
-                </a:solidFill>
-                <a:latin typeface="Arial"/>
-              </a:rPr>
-              <a:t>Verify results</a:t>
-            </a:r>
-          </a:p>
-        </p:txBody>
-      </p:sp>
-      <p:sp>
-        <p:nvSpPr>
-          <p:cNvPr id="17" name="TextBox 16"/>
-          <p:cNvSpPr txBox="1"/>
-          <p:nvPr/>
-        </p:nvSpPr>
-        <p:spPr>
-          <a:xfrm>
-            <a:off x="8412480" y="4123944"/>
-            <a:ext cx="3017520" cy="640080"/>
-          </a:xfrm>
-          <a:prstGeom prst="rect">
-            <a:avLst/>
-          </a:prstGeom>
-          <a:noFill/>
-        </p:spPr>
-        <p:txBody>
-          <a:bodyPr wrap="square" lIns="0" rIns="0" tIns="0" bIns="0">
-            <a:noAutofit/>
-          </a:bodyPr>
-          <a:lstStyle/>
-          <a:p>
-            <a:pPr algn="l">
-              <a:lnSpc>
-                <a:spcPct val="112000"/>
-              </a:lnSpc>
-              <a:spcBef>
-                <a:spcPts val="0"/>
-              </a:spcBef>
-              <a:spcAft>
-                <a:spcPts val="700"/>
-              </a:spcAft>
-            </a:pPr>
-            <a:r>
-              <a:rPr sz="2000" b="0">
-                <a:solidFill>
-                  <a:srgbClr val="5B6573"/>
-                </a:solidFill>
-                <a:latin typeface="Arial"/>
-              </a:rPr>
-              <a:t>Automated checks + device tests</a:t>
-            </a:r>
-          </a:p>
-        </p:txBody>
-      </p:sp>
-      <p:sp>
-        <p:nvSpPr>
-          <p:cNvPr id="18" name="TextBox 17"/>
-          <p:cNvSpPr txBox="1"/>
-          <p:nvPr/>
-        </p:nvSpPr>
-        <p:spPr>
-          <a:xfrm>
-            <a:off x="548640" y="5641848"/>
-            <a:ext cx="11064240" cy="420624"/>
-          </a:xfrm>
-          <a:prstGeom prst="rect">
-            <a:avLst/>
-          </a:prstGeom>
-          <a:noFill/>
-        </p:spPr>
-        <p:txBody>
-          <a:bodyPr wrap="square" lIns="0" rIns="0" tIns="0" bIns="0">
-            <a:noAutofit/>
-          </a:bodyPr>
-          <a:lstStyle/>
-          <a:p>
-            <a:pPr algn="ctr">
-              <a:lnSpc>
-                <a:spcPct val="112000"/>
-              </a:lnSpc>
-              <a:spcBef>
-                <a:spcPts val="0"/>
-              </a:spcBef>
-              <a:spcAft>
-                <a:spcPts val="700"/>
-              </a:spcAft>
-            </a:pPr>
-            <a:r>
-              <a:rPr sz="1900" b="0">
-                <a:solidFill>
-                  <a:srgbClr val="5B6573"/>
-                </a:solidFill>
-                <a:latin typeface="Arial"/>
-              </a:rPr>
-              <a:t>Final decisions and deliverables remain our responsibility.</a:t>
-            </a:r>
-          </a:p>
-        </p:txBody>
-      </p:sp>
-    </p:spTree>
-  </p:cSld>
-  <p:clrMapOvr>
-    <a:masterClrMapping/>
-  </p:clrMapOvr>
-</p:sld>
-</file>
-
-<file path=ppt/slides/slide14.xml><?xml version="1.0" encoding="utf-8"?>
-<p:sld xmlns:a="http://schemas.openxmlformats.org/drawingml/2006/main" xmlns:p="http://schemas.openxmlformats.org/presentationml/2006/main" xmlns:r="http://schemas.openxmlformats.org/officeDocument/2006/relationships">
-  <p:cSld>
-    <p:bg>
-      <p:bgPr>
-        <a:solidFill>
-          <a:srgbClr val="FFFFFF"/>
-        </a:solidFill>
-        <a:effectLst/>
-      </p:bgPr>
-    </p:bg>
-    <p:spTree>
-      <p:nvGrpSpPr>
-        <p:cNvPr id="1" name=""/>
-        <p:cNvGrpSpPr/>
-        <p:nvPr/>
-      </p:nvGrpSpPr>
-      <p:grpSpPr/>
-      <p:sp>
-        <p:nvSpPr>
-          <p:cNvPr id="2" name="TextBox 1"/>
-          <p:cNvSpPr txBox="1"/>
-          <p:nvPr/>
-        </p:nvSpPr>
-        <p:spPr>
-          <a:xfrm>
-            <a:off x="548640" y="329184"/>
-            <a:ext cx="11064240" cy="256032"/>
-          </a:xfrm>
-          <a:prstGeom prst="rect">
-            <a:avLst/>
-          </a:prstGeom>
-          <a:noFill/>
-        </p:spPr>
-        <p:txBody>
-          <a:bodyPr wrap="square" lIns="0" rIns="0" tIns="0" bIns="0">
-            <a:noAutofit/>
-          </a:bodyPr>
-          <a:lstStyle/>
-          <a:p>
-            <a:pPr algn="l">
-              <a:lnSpc>
-                <a:spcPct val="112000"/>
-              </a:lnSpc>
-              <a:spcBef>
-                <a:spcPts val="0"/>
-              </a:spcBef>
-              <a:spcAft>
-                <a:spcPts val="700"/>
-              </a:spcAft>
-            </a:pPr>
-            <a:r>
-              <a:rPr sz="1200" b="1">
-                <a:solidFill>
-                  <a:srgbClr val="FF8A00"/>
-                </a:solidFill>
-                <a:latin typeface="Arial"/>
-              </a:rPr>
-              <a:t>ACHIEVEMENTS &amp; CHALLENGES</a:t>
-            </a:r>
-          </a:p>
-        </p:txBody>
-      </p:sp>
-      <p:sp>
-        <p:nvSpPr>
-          <p:cNvPr id="3" name="TextBox 2"/>
-          <p:cNvSpPr txBox="1"/>
-          <p:nvPr/>
-        </p:nvSpPr>
-        <p:spPr>
-          <a:xfrm>
-            <a:off x="548640" y="777240"/>
-            <a:ext cx="11064240" cy="749808"/>
-          </a:xfrm>
-          <a:prstGeom prst="rect">
-            <a:avLst/>
-          </a:prstGeom>
-          <a:noFill/>
-        </p:spPr>
-        <p:txBody>
-          <a:bodyPr wrap="square" lIns="0" rIns="0" tIns="0" bIns="0">
-            <a:noAutofit/>
-          </a:bodyPr>
-          <a:lstStyle/>
-          <a:p>
-            <a:pPr algn="l">
-              <a:lnSpc>
-                <a:spcPct val="112000"/>
-              </a:lnSpc>
-              <a:spcBef>
-                <a:spcPts val="0"/>
-              </a:spcBef>
-              <a:spcAft>
-                <a:spcPts val="700"/>
-              </a:spcAft>
-            </a:pPr>
-            <a:r>
-              <a:rPr sz="3400" b="1">
-                <a:solidFill>
-                  <a:srgbClr val="1F2328"/>
-                </a:solidFill>
-                <a:latin typeface="Arial"/>
-              </a:rPr>
-              <a:t>What we delivered. What we learned.</a:t>
-            </a:r>
-          </a:p>
-        </p:txBody>
-      </p:sp>
-      <p:sp>
-        <p:nvSpPr>
-          <p:cNvPr id="4" name="TextBox 3"/>
-          <p:cNvSpPr txBox="1"/>
-          <p:nvPr/>
-        </p:nvSpPr>
-        <p:spPr>
-          <a:xfrm>
-            <a:off x="548640" y="6528816"/>
-            <a:ext cx="9144000" cy="182880"/>
-          </a:xfrm>
-          <a:prstGeom prst="rect">
-            <a:avLst/>
-          </a:prstGeom>
-          <a:noFill/>
-        </p:spPr>
-        <p:txBody>
-          <a:bodyPr wrap="square" lIns="0" rIns="0" tIns="0" bIns="0">
-            <a:noAutofit/>
-          </a:bodyPr>
-          <a:lstStyle/>
-          <a:p>
-            <a:pPr algn="l">
-              <a:lnSpc>
-                <a:spcPct val="112000"/>
-              </a:lnSpc>
-              <a:spcBef>
-                <a:spcPts val="0"/>
-              </a:spcBef>
-              <a:spcAft>
-                <a:spcPts val="700"/>
-              </a:spcAft>
-            </a:pPr>
-            <a:r>
-              <a:rPr sz="1000" b="0">
-                <a:solidFill>
-                  <a:srgbClr val="5B6573"/>
-                </a:solidFill>
-                <a:latin typeface="Arial"/>
-              </a:rPr>
-              <a:t>SQUATCH SPORTS · TEAM 11</a:t>
-            </a:r>
-          </a:p>
-        </p:txBody>
-      </p:sp>
-      <p:sp>
-        <p:nvSpPr>
-          <p:cNvPr id="5" name="TextBox 4"/>
-          <p:cNvSpPr txBox="1"/>
-          <p:nvPr/>
-        </p:nvSpPr>
-        <p:spPr>
-          <a:xfrm>
-            <a:off x="11091672" y="6510528"/>
-            <a:ext cx="521207" cy="201168"/>
-          </a:xfrm>
-          <a:prstGeom prst="rect">
-            <a:avLst/>
-          </a:prstGeom>
-          <a:noFill/>
-        </p:spPr>
-        <p:txBody>
-          <a:bodyPr wrap="square" lIns="0" rIns="0" tIns="0" bIns="0">
-            <a:noAutofit/>
-          </a:bodyPr>
-          <a:lstStyle/>
-          <a:p>
-            <a:pPr algn="r">
-              <a:lnSpc>
-                <a:spcPct val="112000"/>
-              </a:lnSpc>
-              <a:spcBef>
-                <a:spcPts val="0"/>
-              </a:spcBef>
-              <a:spcAft>
-                <a:spcPts val="700"/>
-              </a:spcAft>
-            </a:pPr>
-            <a:r>
-              <a:rPr sz="1000" b="0">
-                <a:solidFill>
-                  <a:srgbClr val="5B6573"/>
-                </a:solidFill>
-                <a:latin typeface="Arial"/>
-              </a:rPr>
-              <a:t>14</a:t>
-            </a:r>
-          </a:p>
-        </p:txBody>
-      </p:sp>
-      <p:sp>
-        <p:nvSpPr>
-          <p:cNvPr id="6" name="Rounded Rectangle 5"/>
-          <p:cNvSpPr/>
-          <p:nvPr/>
-        </p:nvSpPr>
-        <p:spPr>
-          <a:xfrm>
-            <a:off x="548640" y="1856231"/>
-            <a:ext cx="5394960" cy="4087368"/>
-          </a:xfrm>
-          <a:prstGeom prst="roundRect">
-            <a:avLst>
-              <a:gd name="adj" fmla="val 10000"/>
-            </a:avLst>
-          </a:prstGeom>
-          <a:solidFill>
-            <a:srgbClr val="F3F4F6"/>
-          </a:solidFill>
-          <a:ln>
-            <a:noFill/>
-          </a:ln>
-        </p:spPr>
-        <p:style>
-          <a:lnRef idx="1">
-            <a:schemeClr val="accent1"/>
-          </a:lnRef>
-          <a:fillRef idx="3">
-            <a:schemeClr val="accent1"/>
-          </a:fillRef>
-          <a:effectRef idx="2">
-            <a:schemeClr val="accent1"/>
-          </a:effectRef>
-          <a:fontRef idx="minor">
-            <a:schemeClr val="lt1"/>
-          </a:fontRef>
-        </p:style>
-        <p:txBody>
-          <a:bodyPr rtlCol="0" anchor="ctr"/>
-          <a:lstStyle/>
-          <a:p>
-            <a:pPr algn="ctr"/>
-          </a:p>
-        </p:txBody>
-      </p:sp>
-      <p:sp>
-        <p:nvSpPr>
-          <p:cNvPr id="7" name="TextBox 6"/>
-          <p:cNvSpPr txBox="1"/>
-          <p:nvPr/>
-        </p:nvSpPr>
-        <p:spPr>
-          <a:xfrm>
-            <a:off x="822959" y="2212848"/>
-            <a:ext cx="4846320" cy="493776"/>
-          </a:xfrm>
-          <a:prstGeom prst="rect">
-            <a:avLst/>
-          </a:prstGeom>
-          <a:noFill/>
-        </p:spPr>
-        <p:txBody>
-          <a:bodyPr wrap="square" lIns="0" rIns="0" tIns="0" bIns="0">
-            <a:noAutofit/>
-          </a:bodyPr>
-          <a:lstStyle/>
-          <a:p>
-            <a:pPr algn="l">
-              <a:lnSpc>
-                <a:spcPct val="112000"/>
-              </a:lnSpc>
-              <a:spcBef>
-                <a:spcPts val="0"/>
-              </a:spcBef>
-              <a:spcAft>
-                <a:spcPts val="700"/>
-              </a:spcAft>
-            </a:pPr>
-            <a:r>
-              <a:rPr sz="2700" b="1">
-                <a:solidFill>
-                  <a:srgbClr val="2FA85A"/>
-                </a:solidFill>
-                <a:latin typeface="Arial"/>
-              </a:rPr>
-              <a:t>Delivered</a:t>
-            </a:r>
-          </a:p>
-        </p:txBody>
-      </p:sp>
-      <p:sp>
-        <p:nvSpPr>
-          <p:cNvPr id="8" name="Rectangle 7"/>
-          <p:cNvSpPr/>
-          <p:nvPr/>
-        </p:nvSpPr>
-        <p:spPr>
-          <a:xfrm>
-            <a:off x="822959" y="3255264"/>
-            <a:ext cx="82296" cy="82296"/>
-          </a:xfrm>
-          <a:prstGeom prst="rect">
-            <a:avLst/>
-          </a:prstGeom>
-          <a:solidFill>
-            <a:srgbClr val="FF8A00"/>
-          </a:solidFill>
-          <a:ln>
-            <a:noFill/>
-          </a:ln>
-        </p:spPr>
-        <p:style>
-          <a:lnRef idx="1">
-            <a:schemeClr val="accent1"/>
-          </a:lnRef>
-          <a:fillRef idx="3">
-            <a:schemeClr val="accent1"/>
-          </a:fillRef>
-          <a:effectRef idx="2">
-            <a:schemeClr val="accent1"/>
-          </a:effectRef>
-          <a:fontRef idx="minor">
-            <a:schemeClr val="lt1"/>
-          </a:fontRef>
-        </p:style>
-        <p:txBody>
-          <a:bodyPr rtlCol="0" anchor="ctr"/>
-          <a:lstStyle/>
-          <a:p>
-            <a:pPr algn="ctr"/>
-          </a:p>
-        </p:txBody>
-      </p:sp>
-      <p:sp>
-        <p:nvSpPr>
-          <p:cNvPr id="9" name="TextBox 8"/>
-          <p:cNvSpPr txBox="1"/>
-          <p:nvPr/>
-        </p:nvSpPr>
-        <p:spPr>
-          <a:xfrm>
-            <a:off x="1078992" y="3145536"/>
-            <a:ext cx="4498848" cy="713232"/>
-          </a:xfrm>
-          <a:prstGeom prst="rect">
-            <a:avLst/>
-          </a:prstGeom>
-          <a:noFill/>
-        </p:spPr>
-        <p:txBody>
-          <a:bodyPr wrap="square" lIns="0" rIns="0" tIns="0" bIns="0">
-            <a:noAutofit/>
-          </a:bodyPr>
-          <a:lstStyle/>
-          <a:p>
-            <a:pPr algn="l">
-              <a:lnSpc>
-                <a:spcPct val="112000"/>
-              </a:lnSpc>
-              <a:spcBef>
-                <a:spcPts val="0"/>
-              </a:spcBef>
-              <a:spcAft>
-                <a:spcPts val="700"/>
-              </a:spcAft>
-            </a:pPr>
-            <a:r>
-              <a:rPr sz="2200" b="0">
-                <a:solidFill>
-                  <a:srgbClr val="1F2328"/>
-                </a:solidFill>
-                <a:latin typeface="Arial"/>
-              </a:rPr>
-              <a:t>Aligned major features</a:t>
-            </a:r>
-          </a:p>
-        </p:txBody>
-      </p:sp>
-      <p:sp>
-        <p:nvSpPr>
-          <p:cNvPr id="10" name="Rectangle 9"/>
-          <p:cNvSpPr/>
-          <p:nvPr/>
-        </p:nvSpPr>
-        <p:spPr>
-          <a:xfrm>
-            <a:off x="822959" y="4078224"/>
-            <a:ext cx="82296" cy="82296"/>
-          </a:xfrm>
-          <a:prstGeom prst="rect">
-            <a:avLst/>
-          </a:prstGeom>
-          <a:solidFill>
-            <a:srgbClr val="FF8A00"/>
-          </a:solidFill>
-          <a:ln>
-            <a:noFill/>
-          </a:ln>
-        </p:spPr>
-        <p:style>
-          <a:lnRef idx="1">
-            <a:schemeClr val="accent1"/>
-          </a:lnRef>
-          <a:fillRef idx="3">
-            <a:schemeClr val="accent1"/>
-          </a:fillRef>
-          <a:effectRef idx="2">
-            <a:schemeClr val="accent1"/>
-          </a:effectRef>
-          <a:fontRef idx="minor">
-            <a:schemeClr val="lt1"/>
-          </a:fontRef>
-        </p:style>
-        <p:txBody>
-          <a:bodyPr rtlCol="0" anchor="ctr"/>
-          <a:lstStyle/>
-          <a:p>
-            <a:pPr algn="ctr"/>
-          </a:p>
-        </p:txBody>
-      </p:sp>
-      <p:sp>
-        <p:nvSpPr>
-          <p:cNvPr id="11" name="TextBox 10"/>
-          <p:cNvSpPr txBox="1"/>
-          <p:nvPr/>
-        </p:nvSpPr>
-        <p:spPr>
-          <a:xfrm>
-            <a:off x="1078992" y="3968496"/>
-            <a:ext cx="4498848" cy="713232"/>
-          </a:xfrm>
-          <a:prstGeom prst="rect">
-            <a:avLst/>
-          </a:prstGeom>
-          <a:noFill/>
-        </p:spPr>
-        <p:txBody>
-          <a:bodyPr wrap="square" lIns="0" rIns="0" tIns="0" bIns="0">
-            <a:noAutofit/>
-          </a:bodyPr>
-          <a:lstStyle/>
-          <a:p>
-            <a:pPr algn="l">
-              <a:lnSpc>
-                <a:spcPct val="112000"/>
-              </a:lnSpc>
-              <a:spcBef>
-                <a:spcPts val="0"/>
-              </a:spcBef>
-              <a:spcAft>
-                <a:spcPts val="700"/>
-              </a:spcAft>
-            </a:pPr>
-            <a:r>
-              <a:rPr sz="2200" b="0">
-                <a:solidFill>
-                  <a:srgbClr val="1F2328"/>
-                </a:solidFill>
-                <a:latin typeface="Arial"/>
-              </a:rPr>
-              <a:t>Phone + watch 1v1</a:t>
-            </a:r>
-          </a:p>
-        </p:txBody>
-      </p:sp>
-      <p:sp>
-        <p:nvSpPr>
-          <p:cNvPr id="12" name="Rectangle 11"/>
-          <p:cNvSpPr/>
-          <p:nvPr/>
-        </p:nvSpPr>
-        <p:spPr>
-          <a:xfrm>
-            <a:off x="822959" y="4901184"/>
-            <a:ext cx="82296" cy="82296"/>
-          </a:xfrm>
-          <a:prstGeom prst="rect">
-            <a:avLst/>
-          </a:prstGeom>
-          <a:solidFill>
-            <a:srgbClr val="FF8A00"/>
-          </a:solidFill>
-          <a:ln>
-            <a:noFill/>
-          </a:ln>
-        </p:spPr>
-        <p:style>
-          <a:lnRef idx="1">
-            <a:schemeClr val="accent1"/>
-          </a:lnRef>
-          <a:fillRef idx="3">
-            <a:schemeClr val="accent1"/>
-          </a:fillRef>
-          <a:effectRef idx="2">
-            <a:schemeClr val="accent1"/>
-          </a:effectRef>
-          <a:fontRef idx="minor">
-            <a:schemeClr val="lt1"/>
-          </a:fontRef>
-        </p:style>
-        <p:txBody>
-          <a:bodyPr rtlCol="0" anchor="ctr"/>
-          <a:lstStyle/>
-          <a:p>
-            <a:pPr algn="ctr"/>
-          </a:p>
-        </p:txBody>
-      </p:sp>
-      <p:sp>
-        <p:nvSpPr>
-          <p:cNvPr id="13" name="TextBox 12"/>
-          <p:cNvSpPr txBox="1"/>
-          <p:nvPr/>
-        </p:nvSpPr>
-        <p:spPr>
-          <a:xfrm>
-            <a:off x="1078992" y="4791456"/>
-            <a:ext cx="4498848" cy="713232"/>
-          </a:xfrm>
-          <a:prstGeom prst="rect">
-            <a:avLst/>
-          </a:prstGeom>
-          <a:noFill/>
-        </p:spPr>
-        <p:txBody>
-          <a:bodyPr wrap="square" lIns="0" rIns="0" tIns="0" bIns="0">
-            <a:noAutofit/>
-          </a:bodyPr>
-          <a:lstStyle/>
-          <a:p>
-            <a:pPr algn="l">
-              <a:lnSpc>
-                <a:spcPct val="112000"/>
-              </a:lnSpc>
-              <a:spcBef>
-                <a:spcPts val="0"/>
-              </a:spcBef>
-              <a:spcAft>
-                <a:spcPts val="700"/>
-              </a:spcAft>
-            </a:pPr>
-            <a:r>
-              <a:rPr sz="2200" b="0">
-                <a:solidFill>
-                  <a:srgbClr val="1F2328"/>
-                </a:solidFill>
-                <a:latin typeface="Arial"/>
-              </a:rPr>
-              <a:t>Nearby competition</a:t>
-            </a:r>
-          </a:p>
-        </p:txBody>
-      </p:sp>
-      <p:sp>
-        <p:nvSpPr>
-          <p:cNvPr id="14" name="Rounded Rectangle 13"/>
-          <p:cNvSpPr/>
-          <p:nvPr/>
-        </p:nvSpPr>
-        <p:spPr>
-          <a:xfrm>
-            <a:off x="6217920" y="1856231"/>
-            <a:ext cx="5394960" cy="4087368"/>
-          </a:xfrm>
-          <a:prstGeom prst="roundRect">
-            <a:avLst>
-              <a:gd name="adj" fmla="val 10000"/>
-            </a:avLst>
-          </a:prstGeom>
-          <a:solidFill>
-            <a:srgbClr val="F3F4F6"/>
-          </a:solidFill>
-          <a:ln>
-            <a:noFill/>
-          </a:ln>
-        </p:spPr>
-        <p:style>
-          <a:lnRef idx="1">
-            <a:schemeClr val="accent1"/>
-          </a:lnRef>
-          <a:fillRef idx="3">
-            <a:schemeClr val="accent1"/>
-          </a:fillRef>
-          <a:effectRef idx="2">
-            <a:schemeClr val="accent1"/>
-          </a:effectRef>
-          <a:fontRef idx="minor">
-            <a:schemeClr val="lt1"/>
-          </a:fontRef>
-        </p:style>
-        <p:txBody>
-          <a:bodyPr rtlCol="0" anchor="ctr"/>
-          <a:lstStyle/>
-          <a:p>
-            <a:pPr algn="ctr"/>
-          </a:p>
-        </p:txBody>
-      </p:sp>
-      <p:sp>
-        <p:nvSpPr>
-          <p:cNvPr id="15" name="TextBox 14"/>
-          <p:cNvSpPr txBox="1"/>
-          <p:nvPr/>
-        </p:nvSpPr>
-        <p:spPr>
-          <a:xfrm>
-            <a:off x="6492240" y="2212848"/>
-            <a:ext cx="4846320" cy="493776"/>
-          </a:xfrm>
-          <a:prstGeom prst="rect">
-            <a:avLst/>
-          </a:prstGeom>
-          <a:noFill/>
-        </p:spPr>
-        <p:txBody>
-          <a:bodyPr wrap="square" lIns="0" rIns="0" tIns="0" bIns="0">
-            <a:noAutofit/>
-          </a:bodyPr>
-          <a:lstStyle/>
-          <a:p>
-            <a:pPr algn="l">
-              <a:lnSpc>
-                <a:spcPct val="112000"/>
-              </a:lnSpc>
-              <a:spcBef>
-                <a:spcPts val="0"/>
-              </a:spcBef>
-              <a:spcAft>
-                <a:spcPts val="700"/>
-              </a:spcAft>
-            </a:pPr>
-            <a:r>
-              <a:rPr sz="2700" b="1">
-                <a:solidFill>
-                  <a:srgbClr val="FF8A00"/>
-                </a:solidFill>
-                <a:latin typeface="Arial"/>
-              </a:rPr>
-              <a:t>Learned</a:t>
-            </a:r>
-          </a:p>
-        </p:txBody>
-      </p:sp>
-      <p:sp>
-        <p:nvSpPr>
-          <p:cNvPr id="16" name="Rectangle 15"/>
-          <p:cNvSpPr/>
-          <p:nvPr/>
-        </p:nvSpPr>
-        <p:spPr>
-          <a:xfrm>
-            <a:off x="6492240" y="3255264"/>
-            <a:ext cx="82296" cy="82296"/>
-          </a:xfrm>
-          <a:prstGeom prst="rect">
-            <a:avLst/>
-          </a:prstGeom>
-          <a:solidFill>
-            <a:srgbClr val="FF8A00"/>
-          </a:solidFill>
-          <a:ln>
-            <a:noFill/>
-          </a:ln>
-        </p:spPr>
-        <p:style>
-          <a:lnRef idx="1">
-            <a:schemeClr val="accent1"/>
-          </a:lnRef>
-          <a:fillRef idx="3">
-            <a:schemeClr val="accent1"/>
-          </a:fillRef>
-          <a:effectRef idx="2">
-            <a:schemeClr val="accent1"/>
-          </a:effectRef>
-          <a:fontRef idx="minor">
-            <a:schemeClr val="lt1"/>
-          </a:fontRef>
-        </p:style>
-        <p:txBody>
-          <a:bodyPr rtlCol="0" anchor="ctr"/>
-          <a:lstStyle/>
-          <a:p>
-            <a:pPr algn="ctr"/>
-          </a:p>
-        </p:txBody>
-      </p:sp>
-      <p:sp>
-        <p:nvSpPr>
-          <p:cNvPr id="17" name="TextBox 16"/>
-          <p:cNvSpPr txBox="1"/>
-          <p:nvPr/>
-        </p:nvSpPr>
-        <p:spPr>
-          <a:xfrm>
-            <a:off x="6748272" y="3145536"/>
-            <a:ext cx="4498848" cy="713232"/>
-          </a:xfrm>
-          <a:prstGeom prst="rect">
-            <a:avLst/>
-          </a:prstGeom>
-          <a:noFill/>
-        </p:spPr>
-        <p:txBody>
-          <a:bodyPr wrap="square" lIns="0" rIns="0" tIns="0" bIns="0">
-            <a:noAutofit/>
-          </a:bodyPr>
-          <a:lstStyle/>
-          <a:p>
-            <a:pPr algn="l">
-              <a:lnSpc>
-                <a:spcPct val="112000"/>
-              </a:lnSpc>
-              <a:spcBef>
-                <a:spcPts val="0"/>
-              </a:spcBef>
-              <a:spcAft>
-                <a:spcPts val="700"/>
-              </a:spcAft>
-            </a:pPr>
-            <a:r>
-              <a:rPr sz="2200" b="0">
-                <a:solidFill>
-                  <a:srgbClr val="1F2328"/>
-                </a:solidFill>
-                <a:latin typeface="Arial"/>
-              </a:rPr>
-              <a:t>Order plays in one place</a:t>
-            </a:r>
-          </a:p>
-        </p:txBody>
-      </p:sp>
-      <p:sp>
-        <p:nvSpPr>
-          <p:cNvPr id="18" name="Rectangle 17"/>
-          <p:cNvSpPr/>
-          <p:nvPr/>
-        </p:nvSpPr>
-        <p:spPr>
-          <a:xfrm>
-            <a:off x="6492240" y="4078224"/>
-            <a:ext cx="82296" cy="82296"/>
-          </a:xfrm>
-          <a:prstGeom prst="rect">
-            <a:avLst/>
-          </a:prstGeom>
-          <a:solidFill>
-            <a:srgbClr val="FF8A00"/>
-          </a:solidFill>
-          <a:ln>
-            <a:noFill/>
-          </a:ln>
-        </p:spPr>
-        <p:style>
-          <a:lnRef idx="1">
-            <a:schemeClr val="accent1"/>
-          </a:lnRef>
-          <a:fillRef idx="3">
-            <a:schemeClr val="accent1"/>
-          </a:fillRef>
-          <a:effectRef idx="2">
-            <a:schemeClr val="accent1"/>
-          </a:effectRef>
-          <a:fontRef idx="minor">
-            <a:schemeClr val="lt1"/>
-          </a:fontRef>
-        </p:style>
-        <p:txBody>
-          <a:bodyPr rtlCol="0" anchor="ctr"/>
-          <a:lstStyle/>
-          <a:p>
-            <a:pPr algn="ctr"/>
-          </a:p>
-        </p:txBody>
-      </p:sp>
-      <p:sp>
-        <p:nvSpPr>
-          <p:cNvPr id="19" name="TextBox 18"/>
-          <p:cNvSpPr txBox="1"/>
-          <p:nvPr/>
-        </p:nvSpPr>
-        <p:spPr>
-          <a:xfrm>
-            <a:off x="6748272" y="3968496"/>
-            <a:ext cx="4498848" cy="713232"/>
-          </a:xfrm>
-          <a:prstGeom prst="rect">
-            <a:avLst/>
-          </a:prstGeom>
-          <a:noFill/>
-        </p:spPr>
-        <p:txBody>
-          <a:bodyPr wrap="square" lIns="0" rIns="0" tIns="0" bIns="0">
-            <a:noAutofit/>
-          </a:bodyPr>
-          <a:lstStyle/>
-          <a:p>
-            <a:pPr algn="l">
-              <a:lnSpc>
-                <a:spcPct val="112000"/>
-              </a:lnSpc>
-              <a:spcBef>
-                <a:spcPts val="0"/>
-              </a:spcBef>
-              <a:spcAft>
-                <a:spcPts val="700"/>
-              </a:spcAft>
-            </a:pPr>
-            <a:r>
-              <a:rPr sz="2200" b="0">
-                <a:solidFill>
-                  <a:srgbClr val="1F2328"/>
-                </a:solidFill>
-                <a:latin typeface="Arial"/>
-              </a:rPr>
-              <a:t>Design for round screens</a:t>
-            </a:r>
-          </a:p>
-        </p:txBody>
-      </p:sp>
-      <p:sp>
-        <p:nvSpPr>
-          <p:cNvPr id="20" name="Rectangle 19"/>
-          <p:cNvSpPr/>
-          <p:nvPr/>
-        </p:nvSpPr>
-        <p:spPr>
-          <a:xfrm>
-            <a:off x="6492240" y="4901184"/>
-            <a:ext cx="82296" cy="82296"/>
-          </a:xfrm>
-          <a:prstGeom prst="rect">
-            <a:avLst/>
-          </a:prstGeom>
-          <a:solidFill>
-            <a:srgbClr val="FF8A00"/>
-          </a:solidFill>
-          <a:ln>
-            <a:noFill/>
-          </a:ln>
-        </p:spPr>
-        <p:style>
-          <a:lnRef idx="1">
-            <a:schemeClr val="accent1"/>
-          </a:lnRef>
-          <a:fillRef idx="3">
-            <a:schemeClr val="accent1"/>
-          </a:fillRef>
-          <a:effectRef idx="2">
-            <a:schemeClr val="accent1"/>
-          </a:effectRef>
-          <a:fontRef idx="minor">
-            <a:schemeClr val="lt1"/>
-          </a:fontRef>
-        </p:style>
-        <p:txBody>
-          <a:bodyPr rtlCol="0" anchor="ctr"/>
-          <a:lstStyle/>
-          <a:p>
-            <a:pPr algn="ctr"/>
-          </a:p>
-        </p:txBody>
-      </p:sp>
-      <p:sp>
-        <p:nvSpPr>
-          <p:cNvPr id="21" name="TextBox 20"/>
-          <p:cNvSpPr txBox="1"/>
-          <p:nvPr/>
-        </p:nvSpPr>
-        <p:spPr>
-          <a:xfrm>
-            <a:off x="6748272" y="4791456"/>
-            <a:ext cx="4498848" cy="713232"/>
-          </a:xfrm>
-          <a:prstGeom prst="rect">
-            <a:avLst/>
-          </a:prstGeom>
-          <a:noFill/>
-        </p:spPr>
-        <p:txBody>
-          <a:bodyPr wrap="square" lIns="0" rIns="0" tIns="0" bIns="0">
-            <a:noAutofit/>
-          </a:bodyPr>
-          <a:lstStyle/>
-          <a:p>
-            <a:pPr algn="l">
-              <a:lnSpc>
-                <a:spcPct val="112000"/>
-              </a:lnSpc>
-              <a:spcBef>
-                <a:spcPts val="0"/>
-              </a:spcBef>
-              <a:spcAft>
-                <a:spcPts val="700"/>
-              </a:spcAft>
-            </a:pPr>
-            <a:r>
-              <a:rPr sz="2200" b="0">
-                <a:solidFill>
-                  <a:srgbClr val="1F2328"/>
-                </a:solidFill>
-                <a:latin typeface="Arial"/>
-              </a:rPr>
-              <a:t>Test on hardware earlier</a:t>
+              <a:t>Kaleb’s feature is complete; #31 is board reconciliation.</a:t>
             </a:r>
           </a:p>
         </p:txBody>
@@ -6579,617 +6476,6 @@
 </file>
 
 <file path=ppt/slides/slide15.xml><?xml version="1.0" encoding="utf-8"?>
-<p:sld xmlns:a="http://schemas.openxmlformats.org/drawingml/2006/main" xmlns:p="http://schemas.openxmlformats.org/presentationml/2006/main" xmlns:r="http://schemas.openxmlformats.org/officeDocument/2006/relationships">
-  <p:cSld>
-    <p:bg>
-      <p:bgPr>
-        <a:solidFill>
-          <a:srgbClr val="FFFFFF"/>
-        </a:solidFill>
-        <a:effectLst/>
-      </p:bgPr>
-    </p:bg>
-    <p:spTree>
-      <p:nvGrpSpPr>
-        <p:cNvPr id="1" name=""/>
-        <p:cNvGrpSpPr/>
-        <p:nvPr/>
-      </p:nvGrpSpPr>
-      <p:grpSpPr/>
-      <p:sp>
-        <p:nvSpPr>
-          <p:cNvPr id="2" name="TextBox 1"/>
-          <p:cNvSpPr txBox="1"/>
-          <p:nvPr/>
-        </p:nvSpPr>
-        <p:spPr>
-          <a:xfrm>
-            <a:off x="548640" y="329184"/>
-            <a:ext cx="11064240" cy="256032"/>
-          </a:xfrm>
-          <a:prstGeom prst="rect">
-            <a:avLst/>
-          </a:prstGeom>
-          <a:noFill/>
-        </p:spPr>
-        <p:txBody>
-          <a:bodyPr wrap="square" lIns="0" rIns="0" tIns="0" bIns="0">
-            <a:noAutofit/>
-          </a:bodyPr>
-          <a:lstStyle/>
-          <a:p>
-            <a:pPr algn="l">
-              <a:lnSpc>
-                <a:spcPct val="112000"/>
-              </a:lnSpc>
-              <a:spcBef>
-                <a:spcPts val="0"/>
-              </a:spcBef>
-              <a:spcAft>
-                <a:spcPts val="700"/>
-              </a:spcAft>
-            </a:pPr>
-            <a:r>
-              <a:rPr sz="1200" b="1">
-                <a:solidFill>
-                  <a:srgbClr val="FF8A00"/>
-                </a:solidFill>
-                <a:latin typeface="Arial"/>
-              </a:rPr>
-              <a:t>NEXT STEPS</a:t>
-            </a:r>
-          </a:p>
-        </p:txBody>
-      </p:sp>
-      <p:sp>
-        <p:nvSpPr>
-          <p:cNvPr id="3" name="TextBox 2"/>
-          <p:cNvSpPr txBox="1"/>
-          <p:nvPr/>
-        </p:nvSpPr>
-        <p:spPr>
-          <a:xfrm>
-            <a:off x="548640" y="777240"/>
-            <a:ext cx="11064240" cy="749808"/>
-          </a:xfrm>
-          <a:prstGeom prst="rect">
-            <a:avLst/>
-          </a:prstGeom>
-          <a:noFill/>
-        </p:spPr>
-        <p:txBody>
-          <a:bodyPr wrap="square" lIns="0" rIns="0" tIns="0" bIns="0">
-            <a:noAutofit/>
-          </a:bodyPr>
-          <a:lstStyle/>
-          <a:p>
-            <a:pPr algn="l">
-              <a:lnSpc>
-                <a:spcPct val="112000"/>
-              </a:lnSpc>
-              <a:spcBef>
-                <a:spcPts val="0"/>
-              </a:spcBef>
-              <a:spcAft>
-                <a:spcPts val="700"/>
-              </a:spcAft>
-            </a:pPr>
-            <a:r>
-              <a:rPr sz="3400" b="1">
-                <a:solidFill>
-                  <a:srgbClr val="1F2328"/>
-                </a:solidFill>
-                <a:latin typeface="Arial"/>
-              </a:rPr>
-              <a:t>Validate. Refine. Hand off.</a:t>
-            </a:r>
-          </a:p>
-        </p:txBody>
-      </p:sp>
-      <p:sp>
-        <p:nvSpPr>
-          <p:cNvPr id="4" name="TextBox 3"/>
-          <p:cNvSpPr txBox="1"/>
-          <p:nvPr/>
-        </p:nvSpPr>
-        <p:spPr>
-          <a:xfrm>
-            <a:off x="548640" y="6528816"/>
-            <a:ext cx="9144000" cy="182880"/>
-          </a:xfrm>
-          <a:prstGeom prst="rect">
-            <a:avLst/>
-          </a:prstGeom>
-          <a:noFill/>
-        </p:spPr>
-        <p:txBody>
-          <a:bodyPr wrap="square" lIns="0" rIns="0" tIns="0" bIns="0">
-            <a:noAutofit/>
-          </a:bodyPr>
-          <a:lstStyle/>
-          <a:p>
-            <a:pPr algn="l">
-              <a:lnSpc>
-                <a:spcPct val="112000"/>
-              </a:lnSpc>
-              <a:spcBef>
-                <a:spcPts val="0"/>
-              </a:spcBef>
-              <a:spcAft>
-                <a:spcPts val="700"/>
-              </a:spcAft>
-            </a:pPr>
-            <a:r>
-              <a:rPr sz="1000" b="0">
-                <a:solidFill>
-                  <a:srgbClr val="5B6573"/>
-                </a:solidFill>
-                <a:latin typeface="Arial"/>
-              </a:rPr>
-              <a:t>SQUATCH SPORTS · TEAM 11</a:t>
-            </a:r>
-          </a:p>
-        </p:txBody>
-      </p:sp>
-      <p:sp>
-        <p:nvSpPr>
-          <p:cNvPr id="5" name="TextBox 4"/>
-          <p:cNvSpPr txBox="1"/>
-          <p:nvPr/>
-        </p:nvSpPr>
-        <p:spPr>
-          <a:xfrm>
-            <a:off x="11091672" y="6510528"/>
-            <a:ext cx="521207" cy="201168"/>
-          </a:xfrm>
-          <a:prstGeom prst="rect">
-            <a:avLst/>
-          </a:prstGeom>
-          <a:noFill/>
-        </p:spPr>
-        <p:txBody>
-          <a:bodyPr wrap="square" lIns="0" rIns="0" tIns="0" bIns="0">
-            <a:noAutofit/>
-          </a:bodyPr>
-          <a:lstStyle/>
-          <a:p>
-            <a:pPr algn="r">
-              <a:lnSpc>
-                <a:spcPct val="112000"/>
-              </a:lnSpc>
-              <a:spcBef>
-                <a:spcPts val="0"/>
-              </a:spcBef>
-              <a:spcAft>
-                <a:spcPts val="700"/>
-              </a:spcAft>
-            </a:pPr>
-            <a:r>
-              <a:rPr sz="1000" b="0">
-                <a:solidFill>
-                  <a:srgbClr val="5B6573"/>
-                </a:solidFill>
-                <a:latin typeface="Arial"/>
-              </a:rPr>
-              <a:t>15</a:t>
-            </a:r>
-          </a:p>
-        </p:txBody>
-      </p:sp>
-      <p:sp>
-        <p:nvSpPr>
-          <p:cNvPr id="6" name="Rounded Rectangle 5"/>
-          <p:cNvSpPr/>
-          <p:nvPr/>
-        </p:nvSpPr>
-        <p:spPr>
-          <a:xfrm>
-            <a:off x="548640" y="1965960"/>
-            <a:ext cx="11064240" cy="987552"/>
-          </a:xfrm>
-          <a:prstGeom prst="roundRect">
-            <a:avLst>
-              <a:gd name="adj" fmla="val 10000"/>
-            </a:avLst>
-          </a:prstGeom>
-          <a:solidFill>
-            <a:srgbClr val="F3F4F6"/>
-          </a:solidFill>
-          <a:ln>
-            <a:noFill/>
-          </a:ln>
-        </p:spPr>
-        <p:style>
-          <a:lnRef idx="1">
-            <a:schemeClr val="accent1"/>
-          </a:lnRef>
-          <a:fillRef idx="3">
-            <a:schemeClr val="accent1"/>
-          </a:fillRef>
-          <a:effectRef idx="2">
-            <a:schemeClr val="accent1"/>
-          </a:effectRef>
-          <a:fontRef idx="minor">
-            <a:schemeClr val="lt1"/>
-          </a:fontRef>
-        </p:style>
-        <p:txBody>
-          <a:bodyPr rtlCol="0" anchor="ctr"/>
-          <a:lstStyle/>
-          <a:p>
-            <a:pPr algn="ctr"/>
-          </a:p>
-        </p:txBody>
-      </p:sp>
-      <p:sp>
-        <p:nvSpPr>
-          <p:cNvPr id="7" name="TextBox 6"/>
-          <p:cNvSpPr txBox="1"/>
-          <p:nvPr/>
-        </p:nvSpPr>
-        <p:spPr>
-          <a:xfrm>
-            <a:off x="841248" y="2157984"/>
-            <a:ext cx="786384" cy="566928"/>
-          </a:xfrm>
-          <a:prstGeom prst="rect">
-            <a:avLst/>
-          </a:prstGeom>
-          <a:noFill/>
-        </p:spPr>
-        <p:txBody>
-          <a:bodyPr wrap="square" lIns="0" rIns="0" tIns="0" bIns="0">
-            <a:noAutofit/>
-          </a:bodyPr>
-          <a:lstStyle/>
-          <a:p>
-            <a:pPr algn="l">
-              <a:lnSpc>
-                <a:spcPct val="112000"/>
-              </a:lnSpc>
-              <a:spcBef>
-                <a:spcPts val="0"/>
-              </a:spcBef>
-              <a:spcAft>
-                <a:spcPts val="700"/>
-              </a:spcAft>
-            </a:pPr>
-            <a:r>
-              <a:rPr sz="3000" b="1">
-                <a:solidFill>
-                  <a:srgbClr val="FF8A00"/>
-                </a:solidFill>
-                <a:latin typeface="Arial"/>
-              </a:rPr>
-              <a:t>01</a:t>
-            </a:r>
-          </a:p>
-        </p:txBody>
-      </p:sp>
-      <p:sp>
-        <p:nvSpPr>
-          <p:cNvPr id="8" name="TextBox 7"/>
-          <p:cNvSpPr txBox="1"/>
-          <p:nvPr/>
-        </p:nvSpPr>
-        <p:spPr>
-          <a:xfrm>
-            <a:off x="1883664" y="2231136"/>
-            <a:ext cx="9235440" cy="484632"/>
-          </a:xfrm>
-          <a:prstGeom prst="rect">
-            <a:avLst/>
-          </a:prstGeom>
-          <a:noFill/>
-        </p:spPr>
-        <p:txBody>
-          <a:bodyPr wrap="square" lIns="0" rIns="0" tIns="0" bIns="0">
-            <a:noAutofit/>
-          </a:bodyPr>
-          <a:lstStyle/>
-          <a:p>
-            <a:pPr algn="l">
-              <a:lnSpc>
-                <a:spcPct val="112000"/>
-              </a:lnSpc>
-              <a:spcBef>
-                <a:spcPts val="0"/>
-              </a:spcBef>
-              <a:spcAft>
-                <a:spcPts val="700"/>
-              </a:spcAft>
-            </a:pPr>
-            <a:r>
-              <a:rPr sz="2500" b="1">
-                <a:solidFill>
-                  <a:srgbClr val="1F2328"/>
-                </a:solidFill>
-                <a:latin typeface="Arial"/>
-              </a:rPr>
-              <a:t>Validate Android Nearby on hardware</a:t>
-            </a:r>
-          </a:p>
-        </p:txBody>
-      </p:sp>
-      <p:sp>
-        <p:nvSpPr>
-          <p:cNvPr id="9" name="Rounded Rectangle 8"/>
-          <p:cNvSpPr/>
-          <p:nvPr/>
-        </p:nvSpPr>
-        <p:spPr>
-          <a:xfrm>
-            <a:off x="548640" y="3227832"/>
-            <a:ext cx="11064240" cy="987552"/>
-          </a:xfrm>
-          <a:prstGeom prst="roundRect">
-            <a:avLst>
-              <a:gd name="adj" fmla="val 10000"/>
-            </a:avLst>
-          </a:prstGeom>
-          <a:solidFill>
-            <a:srgbClr val="F3F4F6"/>
-          </a:solidFill>
-          <a:ln>
-            <a:noFill/>
-          </a:ln>
-        </p:spPr>
-        <p:style>
-          <a:lnRef idx="1">
-            <a:schemeClr val="accent1"/>
-          </a:lnRef>
-          <a:fillRef idx="3">
-            <a:schemeClr val="accent1"/>
-          </a:fillRef>
-          <a:effectRef idx="2">
-            <a:schemeClr val="accent1"/>
-          </a:effectRef>
-          <a:fontRef idx="minor">
-            <a:schemeClr val="lt1"/>
-          </a:fontRef>
-        </p:style>
-        <p:txBody>
-          <a:bodyPr rtlCol="0" anchor="ctr"/>
-          <a:lstStyle/>
-          <a:p>
-            <a:pPr algn="ctr"/>
-          </a:p>
-        </p:txBody>
-      </p:sp>
-      <p:sp>
-        <p:nvSpPr>
-          <p:cNvPr id="10" name="TextBox 9"/>
-          <p:cNvSpPr txBox="1"/>
-          <p:nvPr/>
-        </p:nvSpPr>
-        <p:spPr>
-          <a:xfrm>
-            <a:off x="841248" y="3419856"/>
-            <a:ext cx="786384" cy="566928"/>
-          </a:xfrm>
-          <a:prstGeom prst="rect">
-            <a:avLst/>
-          </a:prstGeom>
-          <a:noFill/>
-        </p:spPr>
-        <p:txBody>
-          <a:bodyPr wrap="square" lIns="0" rIns="0" tIns="0" bIns="0">
-            <a:noAutofit/>
-          </a:bodyPr>
-          <a:lstStyle/>
-          <a:p>
-            <a:pPr algn="l">
-              <a:lnSpc>
-                <a:spcPct val="112000"/>
-              </a:lnSpc>
-              <a:spcBef>
-                <a:spcPts val="0"/>
-              </a:spcBef>
-              <a:spcAft>
-                <a:spcPts val="700"/>
-              </a:spcAft>
-            </a:pPr>
-            <a:r>
-              <a:rPr sz="3000" b="1">
-                <a:solidFill>
-                  <a:srgbClr val="FF8A00"/>
-                </a:solidFill>
-                <a:latin typeface="Arial"/>
-              </a:rPr>
-              <a:t>02</a:t>
-            </a:r>
-          </a:p>
-        </p:txBody>
-      </p:sp>
-      <p:sp>
-        <p:nvSpPr>
-          <p:cNvPr id="11" name="TextBox 10"/>
-          <p:cNvSpPr txBox="1"/>
-          <p:nvPr/>
-        </p:nvSpPr>
-        <p:spPr>
-          <a:xfrm>
-            <a:off x="1883664" y="3493008"/>
-            <a:ext cx="9235440" cy="484632"/>
-          </a:xfrm>
-          <a:prstGeom prst="rect">
-            <a:avLst/>
-          </a:prstGeom>
-          <a:noFill/>
-        </p:spPr>
-        <p:txBody>
-          <a:bodyPr wrap="square" lIns="0" rIns="0" tIns="0" bIns="0">
-            <a:noAutofit/>
-          </a:bodyPr>
-          <a:lstStyle/>
-          <a:p>
-            <a:pPr algn="l">
-              <a:lnSpc>
-                <a:spcPct val="112000"/>
-              </a:lnSpc>
-              <a:spcBef>
-                <a:spcPts val="0"/>
-              </a:spcBef>
-              <a:spcAft>
-                <a:spcPts val="700"/>
-              </a:spcAft>
-            </a:pPr>
-            <a:r>
-              <a:rPr sz="2500" b="1">
-                <a:solidFill>
-                  <a:srgbClr val="1F2328"/>
-                </a:solidFill>
-                <a:latin typeface="Arial"/>
-              </a:rPr>
-              <a:t>Collect player feedback</a:t>
-            </a:r>
-          </a:p>
-        </p:txBody>
-      </p:sp>
-      <p:sp>
-        <p:nvSpPr>
-          <p:cNvPr id="12" name="Rounded Rectangle 11"/>
-          <p:cNvSpPr/>
-          <p:nvPr/>
-        </p:nvSpPr>
-        <p:spPr>
-          <a:xfrm>
-            <a:off x="548640" y="4489704"/>
-            <a:ext cx="11064240" cy="987552"/>
-          </a:xfrm>
-          <a:prstGeom prst="roundRect">
-            <a:avLst>
-              <a:gd name="adj" fmla="val 10000"/>
-            </a:avLst>
-          </a:prstGeom>
-          <a:solidFill>
-            <a:srgbClr val="F3F4F6"/>
-          </a:solidFill>
-          <a:ln>
-            <a:noFill/>
-          </a:ln>
-        </p:spPr>
-        <p:style>
-          <a:lnRef idx="1">
-            <a:schemeClr val="accent1"/>
-          </a:lnRef>
-          <a:fillRef idx="3">
-            <a:schemeClr val="accent1"/>
-          </a:fillRef>
-          <a:effectRef idx="2">
-            <a:schemeClr val="accent1"/>
-          </a:effectRef>
-          <a:fontRef idx="minor">
-            <a:schemeClr val="lt1"/>
-          </a:fontRef>
-        </p:style>
-        <p:txBody>
-          <a:bodyPr rtlCol="0" anchor="ctr"/>
-          <a:lstStyle/>
-          <a:p>
-            <a:pPr algn="ctr"/>
-          </a:p>
-        </p:txBody>
-      </p:sp>
-      <p:sp>
-        <p:nvSpPr>
-          <p:cNvPr id="13" name="TextBox 12"/>
-          <p:cNvSpPr txBox="1"/>
-          <p:nvPr/>
-        </p:nvSpPr>
-        <p:spPr>
-          <a:xfrm>
-            <a:off x="841248" y="4681728"/>
-            <a:ext cx="786384" cy="566928"/>
-          </a:xfrm>
-          <a:prstGeom prst="rect">
-            <a:avLst/>
-          </a:prstGeom>
-          <a:noFill/>
-        </p:spPr>
-        <p:txBody>
-          <a:bodyPr wrap="square" lIns="0" rIns="0" tIns="0" bIns="0">
-            <a:noAutofit/>
-          </a:bodyPr>
-          <a:lstStyle/>
-          <a:p>
-            <a:pPr algn="l">
-              <a:lnSpc>
-                <a:spcPct val="112000"/>
-              </a:lnSpc>
-              <a:spcBef>
-                <a:spcPts val="0"/>
-              </a:spcBef>
-              <a:spcAft>
-                <a:spcPts val="700"/>
-              </a:spcAft>
-            </a:pPr>
-            <a:r>
-              <a:rPr sz="3000" b="1">
-                <a:solidFill>
-                  <a:srgbClr val="FF8A00"/>
-                </a:solidFill>
-                <a:latin typeface="Arial"/>
-              </a:rPr>
-              <a:t>03</a:t>
-            </a:r>
-          </a:p>
-        </p:txBody>
-      </p:sp>
-      <p:sp>
-        <p:nvSpPr>
-          <p:cNvPr id="14" name="TextBox 13"/>
-          <p:cNvSpPr txBox="1"/>
-          <p:nvPr/>
-        </p:nvSpPr>
-        <p:spPr>
-          <a:xfrm>
-            <a:off x="1883664" y="4754880"/>
-            <a:ext cx="9235440" cy="484632"/>
-          </a:xfrm>
-          <a:prstGeom prst="rect">
-            <a:avLst/>
-          </a:prstGeom>
-          <a:noFill/>
-        </p:spPr>
-        <p:txBody>
-          <a:bodyPr wrap="square" lIns="0" rIns="0" tIns="0" bIns="0">
-            <a:noAutofit/>
-          </a:bodyPr>
-          <a:lstStyle/>
-          <a:p>
-            <a:pPr algn="l">
-              <a:lnSpc>
-                <a:spcPct val="112000"/>
-              </a:lnSpc>
-              <a:spcBef>
-                <a:spcPts val="0"/>
-              </a:spcBef>
-              <a:spcAft>
-                <a:spcPts val="700"/>
-              </a:spcAft>
-            </a:pPr>
-            <a:r>
-              <a:rPr sz="2500" b="1">
-                <a:solidFill>
-                  <a:srgbClr val="1F2328"/>
-                </a:solidFill>
-                <a:latin typeface="Arial"/>
-              </a:rPr>
-              <a:t>Prepare client testing + final handoff</a:t>
-            </a:r>
-          </a:p>
-        </p:txBody>
-      </p:sp>
-    </p:spTree>
-  </p:cSld>
-  <p:clrMapOvr>
-    <a:masterClrMapping/>
-  </p:clrMapOvr>
-</p:sld>
-</file>
-
-<file path=ppt/slides/slide16.xml><?xml version="1.0" encoding="utf-8"?>
 <p:sld xmlns:a="http://schemas.openxmlformats.org/drawingml/2006/main" xmlns:p="http://schemas.openxmlformats.org/presentationml/2006/main" xmlns:r="http://schemas.openxmlformats.org/officeDocument/2006/relationships">
   <p:cSld>
     <p:bg>
@@ -13492,7 +12778,7 @@
                 </a:solidFill>
                 <a:latin typeface="Arial"/>
               </a:rPr>
-              <a:t>Sprint 5 closeout</a:t>
+              <a:t>Sprint 6 ownership</a:t>
             </a:r>
           </a:p>
         </p:txBody>
@@ -13661,7 +12947,7 @@
                           </a:solidFill>
                           <a:latin typeface="Arial"/>
                         </a:rPr>
-                        <a:t>Remaining item</a:t>
+                        <a:t>Next task</a:t>
                       </a:r>
                     </a:p>
                   </a:txBody>
@@ -13723,7 +13009,7 @@
                           </a:solidFill>
                           <a:latin typeface="Arial"/>
                         </a:rPr>
-                        <a:t>#31</a:t>
+                        <a:t>#25</a:t>
                       </a:r>
                     </a:p>
                   </a:txBody>
@@ -13753,7 +13039,7 @@
                           </a:solidFill>
                           <a:latin typeface="Arial"/>
                         </a:rPr>
-                        <a:t>Reconcile nearby follow-up ticket</a:t>
+                        <a:t>Player / possession rules</a:t>
                       </a:r>
                     </a:p>
                   </a:txBody>
@@ -13815,7 +13101,7 @@
                           </a:solidFill>
                           <a:latin typeface="Arial"/>
                         </a:rPr>
-                        <a:t>#33</a:t>
+                        <a:t>#36</a:t>
                       </a:r>
                     </a:p>
                   </a:txBody>
@@ -13845,7 +13131,191 @@
                           </a:solidFill>
                           <a:latin typeface="Arial"/>
                         </a:rPr>
-                        <a:t>System, integration + user testing</a:t>
+                        <a:t>Apple Watch keep-alive</a:t>
+                      </a:r>
+                    </a:p>
+                  </a:txBody>
+                  <a:tcPr marL="164592" marR="109728" marT="91440" marB="64008" anchor="ctr">
+                    <a:solidFill>
+                      <a:srgbClr val="FFFFFF"/>
+                    </a:solidFill>
+                  </a:tcPr>
+                </a:tc>
+                <a:tc>
+                  <a:txBody>
+                    <a:bodyPr/>
+                    <a:lstStyle/>
+                    <a:p>
+                      <a:pPr>
+                        <a:lnSpc>
+                          <a:spcPct val="106000"/>
+                        </a:lnSpc>
+                        <a:spcAft>
+                          <a:spcPts val="0"/>
+                        </a:spcAft>
+                      </a:pPr>
+                      <a:r>
+                        <a:rPr sz="2000" b="0">
+                          <a:solidFill>
+                            <a:srgbClr val="1F2328"/>
+                          </a:solidFill>
+                          <a:latin typeface="Arial"/>
+                        </a:rPr>
+                        <a:t>Kellam</a:t>
+                      </a:r>
+                    </a:p>
+                  </a:txBody>
+                  <a:tcPr marL="164592" marR="109728" marT="91440" marB="64008" anchor="ctr">
+                    <a:solidFill>
+                      <a:srgbClr val="FFFFFF"/>
+                    </a:solidFill>
+                  </a:tcPr>
+                </a:tc>
+              </a:tr>
+              <a:tr h="777240">
+                <a:tc>
+                  <a:txBody>
+                    <a:bodyPr/>
+                    <a:lstStyle/>
+                    <a:p>
+                      <a:pPr>
+                        <a:lnSpc>
+                          <a:spcPct val="106000"/>
+                        </a:lnSpc>
+                        <a:spcAft>
+                          <a:spcPts val="0"/>
+                        </a:spcAft>
+                      </a:pPr>
+                      <a:r>
+                        <a:rPr sz="2000" b="0">
+                          <a:solidFill>
+                            <a:srgbClr val="1F2328"/>
+                          </a:solidFill>
+                          <a:latin typeface="Arial"/>
+                        </a:rPr>
+                        <a:t>#37</a:t>
+                      </a:r>
+                    </a:p>
+                  </a:txBody>
+                  <a:tcPr marL="164592" marR="109728" marT="91440" marB="64008" anchor="ctr">
+                    <a:solidFill>
+                      <a:srgbClr val="F3F4F6"/>
+                    </a:solidFill>
+                  </a:tcPr>
+                </a:tc>
+                <a:tc>
+                  <a:txBody>
+                    <a:bodyPr/>
+                    <a:lstStyle/>
+                    <a:p>
+                      <a:pPr>
+                        <a:lnSpc>
+                          <a:spcPct val="106000"/>
+                        </a:lnSpc>
+                        <a:spcAft>
+                          <a:spcPts val="0"/>
+                        </a:spcAft>
+                      </a:pPr>
+                      <a:r>
+                        <a:rPr sz="2000" b="0">
+                          <a:solidFill>
+                            <a:srgbClr val="1F2328"/>
+                          </a:solidFill>
+                          <a:latin typeface="Arial"/>
+                        </a:rPr>
+                        <a:t>Remove duplicate iCloud files</a:t>
+                      </a:r>
+                    </a:p>
+                  </a:txBody>
+                  <a:tcPr marL="164592" marR="109728" marT="91440" marB="64008" anchor="ctr">
+                    <a:solidFill>
+                      <a:srgbClr val="F3F4F6"/>
+                    </a:solidFill>
+                  </a:tcPr>
+                </a:tc>
+                <a:tc>
+                  <a:txBody>
+                    <a:bodyPr/>
+                    <a:lstStyle/>
+                    <a:p>
+                      <a:pPr>
+                        <a:lnSpc>
+                          <a:spcPct val="106000"/>
+                        </a:lnSpc>
+                        <a:spcAft>
+                          <a:spcPts val="0"/>
+                        </a:spcAft>
+                      </a:pPr>
+                      <a:r>
+                        <a:rPr sz="2000" b="0">
+                          <a:solidFill>
+                            <a:srgbClr val="1F2328"/>
+                          </a:solidFill>
+                          <a:latin typeface="Arial"/>
+                        </a:rPr>
+                        <a:t>Kellam</a:t>
+                      </a:r>
+                    </a:p>
+                  </a:txBody>
+                  <a:tcPr marL="164592" marR="109728" marT="91440" marB="64008" anchor="ctr">
+                    <a:solidFill>
+                      <a:srgbClr val="F3F4F6"/>
+                    </a:solidFill>
+                  </a:tcPr>
+                </a:tc>
+              </a:tr>
+              <a:tr h="777240">
+                <a:tc>
+                  <a:txBody>
+                    <a:bodyPr/>
+                    <a:lstStyle/>
+                    <a:p>
+                      <a:pPr>
+                        <a:lnSpc>
+                          <a:spcPct val="106000"/>
+                        </a:lnSpc>
+                        <a:spcAft>
+                          <a:spcPts val="0"/>
+                        </a:spcAft>
+                      </a:pPr>
+                      <a:r>
+                        <a:rPr sz="2000" b="0">
+                          <a:solidFill>
+                            <a:srgbClr val="1F2328"/>
+                          </a:solidFill>
+                          <a:latin typeface="Arial"/>
+                        </a:rPr>
+                        <a:t>#19</a:t>
+                      </a:r>
+                    </a:p>
+                  </a:txBody>
+                  <a:tcPr marL="164592" marR="109728" marT="91440" marB="64008" anchor="ctr">
+                    <a:solidFill>
+                      <a:srgbClr val="FFFFFF"/>
+                    </a:solidFill>
+                  </a:tcPr>
+                </a:tc>
+                <a:tc>
+                  <a:txBody>
+                    <a:bodyPr/>
+                    <a:lstStyle/>
+                    <a:p>
+                      <a:pPr>
+                        <a:lnSpc>
+                          <a:spcPct val="106000"/>
+                        </a:lnSpc>
+                        <a:spcAft>
+                          <a:spcPts val="0"/>
+                        </a:spcAft>
+                      </a:pPr>
+                      <a:r>
+                        <a:rPr sz="2000" b="0">
+                          <a:solidFill>
+                            <a:srgbClr val="1F2328"/>
+                          </a:solidFill>
+                          <a:latin typeface="Arial"/>
+                        </a:rPr>
+                        <a:t>Fix repeated-shot bug on Apple Watch</a:t>
                       </a:r>
                     </a:p>
                   </a:txBody>
@@ -13886,190 +13356,6 @@
                   </a:tcPr>
                 </a:tc>
               </a:tr>
-              <a:tr h="777240">
-                <a:tc>
-                  <a:txBody>
-                    <a:bodyPr/>
-                    <a:lstStyle/>
-                    <a:p>
-                      <a:pPr>
-                        <a:lnSpc>
-                          <a:spcPct val="106000"/>
-                        </a:lnSpc>
-                        <a:spcAft>
-                          <a:spcPts val="0"/>
-                        </a:spcAft>
-                      </a:pPr>
-                      <a:r>
-                        <a:rPr sz="2000" b="0">
-                          <a:solidFill>
-                            <a:srgbClr val="1F2328"/>
-                          </a:solidFill>
-                          <a:latin typeface="Arial"/>
-                        </a:rPr>
-                        <a:t>#34</a:t>
-                      </a:r>
-                    </a:p>
-                  </a:txBody>
-                  <a:tcPr marL="164592" marR="109728" marT="91440" marB="64008" anchor="ctr">
-                    <a:solidFill>
-                      <a:srgbClr val="F3F4F6"/>
-                    </a:solidFill>
-                  </a:tcPr>
-                </a:tc>
-                <a:tc>
-                  <a:txBody>
-                    <a:bodyPr/>
-                    <a:lstStyle/>
-                    <a:p>
-                      <a:pPr>
-                        <a:lnSpc>
-                          <a:spcPct val="106000"/>
-                        </a:lnSpc>
-                        <a:spcAft>
-                          <a:spcPts val="0"/>
-                        </a:spcAft>
-                      </a:pPr>
-                      <a:r>
-                        <a:rPr sz="2000" b="0">
-                          <a:solidFill>
-                            <a:srgbClr val="1F2328"/>
-                          </a:solidFill>
-                          <a:latin typeface="Arial"/>
-                        </a:rPr>
-                        <a:t>Real devices + TestFlight / Play testing</a:t>
-                      </a:r>
-                    </a:p>
-                  </a:txBody>
-                  <a:tcPr marL="164592" marR="109728" marT="91440" marB="64008" anchor="ctr">
-                    <a:solidFill>
-                      <a:srgbClr val="F3F4F6"/>
-                    </a:solidFill>
-                  </a:tcPr>
-                </a:tc>
-                <a:tc>
-                  <a:txBody>
-                    <a:bodyPr/>
-                    <a:lstStyle/>
-                    <a:p>
-                      <a:pPr>
-                        <a:lnSpc>
-                          <a:spcPct val="106000"/>
-                        </a:lnSpc>
-                        <a:spcAft>
-                          <a:spcPts val="0"/>
-                        </a:spcAft>
-                      </a:pPr>
-                      <a:r>
-                        <a:rPr sz="2000" b="0">
-                          <a:solidFill>
-                            <a:srgbClr val="1F2328"/>
-                          </a:solidFill>
-                          <a:latin typeface="Arial"/>
-                        </a:rPr>
-                        <a:t>Team</a:t>
-                      </a:r>
-                    </a:p>
-                  </a:txBody>
-                  <a:tcPr marL="164592" marR="109728" marT="91440" marB="64008" anchor="ctr">
-                    <a:solidFill>
-                      <a:srgbClr val="F3F4F6"/>
-                    </a:solidFill>
-                  </a:tcPr>
-                </a:tc>
-              </a:tr>
-              <a:tr h="777240">
-                <a:tc>
-                  <a:txBody>
-                    <a:bodyPr/>
-                    <a:lstStyle/>
-                    <a:p>
-                      <a:pPr>
-                        <a:lnSpc>
-                          <a:spcPct val="106000"/>
-                        </a:lnSpc>
-                        <a:spcAft>
-                          <a:spcPts val="0"/>
-                        </a:spcAft>
-                      </a:pPr>
-                      <a:r>
-                        <a:rPr sz="2000" b="0">
-                          <a:solidFill>
-                            <a:srgbClr val="1F2328"/>
-                          </a:solidFill>
-                          <a:latin typeface="Arial"/>
-                        </a:rPr>
-                        <a:t>#35</a:t>
-                      </a:r>
-                    </a:p>
-                  </a:txBody>
-                  <a:tcPr marL="164592" marR="109728" marT="91440" marB="64008" anchor="ctr">
-                    <a:solidFill>
-                      <a:srgbClr val="FFFFFF"/>
-                    </a:solidFill>
-                  </a:tcPr>
-                </a:tc>
-                <a:tc>
-                  <a:txBody>
-                    <a:bodyPr/>
-                    <a:lstStyle/>
-                    <a:p>
-                      <a:pPr>
-                        <a:lnSpc>
-                          <a:spcPct val="106000"/>
-                        </a:lnSpc>
-                        <a:spcAft>
-                          <a:spcPts val="0"/>
-                        </a:spcAft>
-                      </a:pPr>
-                      <a:r>
-                        <a:rPr sz="2000" b="0">
-                          <a:solidFill>
-                            <a:srgbClr val="1F2328"/>
-                          </a:solidFill>
-                          <a:latin typeface="Arial"/>
-                        </a:rPr>
-                        <a:t>Report, MoMs, slides + demo video</a:t>
-                      </a:r>
-                    </a:p>
-                  </a:txBody>
-                  <a:tcPr marL="164592" marR="109728" marT="91440" marB="64008" anchor="ctr">
-                    <a:solidFill>
-                      <a:srgbClr val="FFFFFF"/>
-                    </a:solidFill>
-                  </a:tcPr>
-                </a:tc>
-                <a:tc>
-                  <a:txBody>
-                    <a:bodyPr/>
-                    <a:lstStyle/>
-                    <a:p>
-                      <a:pPr>
-                        <a:lnSpc>
-                          <a:spcPct val="106000"/>
-                        </a:lnSpc>
-                        <a:spcAft>
-                          <a:spcPts val="0"/>
-                        </a:spcAft>
-                      </a:pPr>
-                      <a:r>
-                        <a:rPr sz="2000" b="0">
-                          <a:solidFill>
-                            <a:srgbClr val="1F2328"/>
-                          </a:solidFill>
-                          <a:latin typeface="Arial"/>
-                        </a:rPr>
-                        <a:t>Melvin / team</a:t>
-                      </a:r>
-                    </a:p>
-                  </a:txBody>
-                  <a:tcPr marL="164592" marR="109728" marT="91440" marB="64008" anchor="ctr">
-                    <a:solidFill>
-                      <a:srgbClr val="FFFFFF"/>
-                    </a:solidFill>
-                  </a:tcPr>
-                </a:tc>
-              </a:tr>
             </a:tbl>
           </a:graphicData>
         </a:graphic>
@@ -14114,7 +13400,7 @@
                 </a:solidFill>
                 <a:latin typeface="Arial"/>
               </a:rPr>
-              <a:t>Kaleb’s feature is complete; #31 is board reconciliation.</a:t>
+              <a:t>Also tracked: Android / Wear OS UI and regression polish (#20).</a:t>
             </a:r>
           </a:p>
         </p:txBody>
